--- a/assets/demo-slide.pptx
+++ b/assets/demo-slide.pptx
@@ -21,7 +21,7 @@
     <p:embeddedFont>
       <p:font typeface="Space Grotesk Medium" pitchFamily="2" charset="77"/>
       <p:regular r:id="rId6"/>
-      <p:bold r:id="rId7"/>
+      <p:bold r:id=""/>
     </p:embeddedFont>
   </p:embeddedFontLst>
   <p:defaultTextStyle>
@@ -849,6 +849,72 @@
     </a:lvl9pPr>
   </p:notesStyle>
 </p:notesMaster>
+</file>
+
+<file path=ppt/notesSlides/notesSlide1.xml><?xml version="1.0" encoding="utf-8"?>
+<p:notes xmlns:a="http://schemas.openxmlformats.org/drawingml/2006/main" xmlns:r="http://schemas.openxmlformats.org/officeDocument/2006/relationships" xmlns:p="http://schemas.openxmlformats.org/presentationml/2006/main">
+  <p:cSld>
+    <p:spTree>
+      <p:nvGrpSpPr>
+        <p:cNvPr id="1" name=""/>
+        <p:cNvGrpSpPr/>
+        <p:nvPr/>
+      </p:nvGrpSpPr>
+      <p:grpSpPr>
+        <a:xfrm>
+          <a:off x="0" y="0"/>
+          <a:ext cx="0" cy="0"/>
+          <a:chOff x="0" y="0"/>
+          <a:chExt cx="0" cy="0"/>
+        </a:xfrm>
+      </p:grpSpPr>
+      <p:sp>
+        <p:nvSpPr>
+          <p:cNvPr id="2" name="Slide Image Placeholder 1"/>
+          <p:cNvSpPr>
+            <a:spLocks noGrp="1" noRot="1" noChangeAspect="1"/>
+          </p:cNvSpPr>
+          <p:nvPr>
+            <p:ph type="sldImg"/>
+          </p:nvPr>
+        </p:nvSpPr>
+        <p:spPr>
+          <a:xfrm>
+            <a:off x="381000" y="685800"/>
+            <a:ext cx="6096000" cy="3429000"/>
+          </a:xfrm>
+        </p:spPr>
+      </p:sp>
+      <p:sp>
+        <p:nvSpPr>
+          <p:cNvPr id="3" name="Notes Placeholder 2"/>
+          <p:cNvSpPr>
+            <a:spLocks noGrp="1"/>
+          </p:cNvSpPr>
+          <p:nvPr>
+            <p:ph type="body" idx="1"/>
+          </p:nvPr>
+        </p:nvSpPr>
+        <p:spPr/>
+        <p:txBody>
+          <a:bodyPr/>
+          <a:lstStyle/>
+          <a:p>
+            <a:endParaRPr lang="en-US" dirty="0"/>
+          </a:p>
+        </p:txBody>
+      </p:sp>
+    </p:spTree>
+    <p:extLst>
+      <p:ext uri="{BB962C8B-B14F-4D97-AF65-F5344CB8AC3E}">
+        <p14:creationId xmlns:p14="http://schemas.microsoft.com/office/powerpoint/2010/main" val="1975225290"/>
+      </p:ext>
+    </p:extLst>
+  </p:cSld>
+  <p:clrMapOvr>
+    <a:masterClrMapping/>
+  </p:clrMapOvr>
+</p:notes>
 </file>
 
 <file path=ppt/slideLayouts/slideLayout1.xml><?xml version="1.0" encoding="utf-8"?>
@@ -12396,412 +12462,115 @@
           <a:chExt cx="0" cy="0"/>
         </a:xfrm>
       </p:grpSpPr>
-      <p:grpSp>
-        <p:nvGrpSpPr>
-          <p:cNvPr id="89" name="Google Shape;1470;p112">
+      <p:pic>
+        <p:nvPicPr>
+          <p:cNvPr id="36" name="Google Shape;448;p42">
             <a:extLst>
               <a:ext uri="{FF2B5EF4-FFF2-40B4-BE49-F238E27FC236}">
-                <a16:creationId xmlns:a16="http://schemas.microsoft.com/office/drawing/2014/main" id="{4225ABA9-DAC7-AF21-6158-30ACAC064E8D}"/>
+                <a16:creationId xmlns:a16="http://schemas.microsoft.com/office/drawing/2014/main" id="{6D8516C0-ED39-BA33-952D-3E0B83D62AD9}"/>
               </a:ext>
             </a:extLst>
           </p:cNvPr>
-          <p:cNvGrpSpPr/>
+          <p:cNvPicPr preferRelativeResize="0"/>
           <p:nvPr/>
-        </p:nvGrpSpPr>
-        <p:grpSpPr>
+        </p:nvPicPr>
+        <p:blipFill rotWithShape="1">
+          <a:blip r:embed="rId3">
+            <a:alphaModFix/>
+          </a:blip>
+          <a:srcRect/>
+          <a:stretch/>
+        </p:blipFill>
+        <p:spPr>
           <a:xfrm>
-            <a:off x="10347488" y="513986"/>
-            <a:ext cx="1467239" cy="1457444"/>
-            <a:chOff x="4285033" y="2530794"/>
-            <a:chExt cx="2433176" cy="2393305"/>
+            <a:off x="7221383" y="831737"/>
+            <a:ext cx="540000" cy="540000"/>
           </a:xfrm>
-        </p:grpSpPr>
-        <p:pic>
-          <p:nvPicPr>
-            <p:cNvPr id="90" name="Google Shape;1471;p112">
-              <a:extLst>
-                <a:ext uri="{FF2B5EF4-FFF2-40B4-BE49-F238E27FC236}">
-                  <a16:creationId xmlns:a16="http://schemas.microsoft.com/office/drawing/2014/main" id="{70203C35-2957-FE92-D4D3-2374AFD3CB12}"/>
-                </a:ext>
-              </a:extLst>
-            </p:cNvPr>
-            <p:cNvPicPr preferRelativeResize="0"/>
-            <p:nvPr/>
-          </p:nvPicPr>
-          <p:blipFill rotWithShape="1">
-            <a:blip r:embed="rId2">
-              <a:alphaModFix/>
-            </a:blip>
-            <a:srcRect/>
-            <a:stretch/>
-          </p:blipFill>
-          <p:spPr>
-            <a:xfrm>
-              <a:off x="4781622" y="2530794"/>
-              <a:ext cx="1440000" cy="1440000"/>
-            </a:xfrm>
-            <a:prstGeom prst="rect">
-              <a:avLst/>
-            </a:prstGeom>
+          <a:prstGeom prst="rect">
+            <a:avLst/>
+          </a:prstGeom>
+          <a:noFill/>
+          <a:ln>
             <a:noFill/>
-            <a:ln>
-              <a:noFill/>
-            </a:ln>
-          </p:spPr>
-        </p:pic>
-        <p:sp>
-          <p:nvSpPr>
-            <p:cNvPr id="91" name="Google Shape;1472;p112">
-              <a:extLst>
-                <a:ext uri="{FF2B5EF4-FFF2-40B4-BE49-F238E27FC236}">
-                  <a16:creationId xmlns:a16="http://schemas.microsoft.com/office/drawing/2014/main" id="{4C8486C5-C129-911B-2F05-FCCAD6B84FA6}"/>
-                </a:ext>
-              </a:extLst>
-            </p:cNvPr>
-            <p:cNvSpPr txBox="1"/>
-            <p:nvPr/>
-          </p:nvSpPr>
-          <p:spPr>
-            <a:xfrm>
-              <a:off x="4285033" y="4064972"/>
-              <a:ext cx="2433176" cy="859127"/>
-            </a:xfrm>
-            <a:prstGeom prst="rect">
-              <a:avLst/>
-            </a:prstGeom>
-            <a:noFill/>
-            <a:ln>
-              <a:noFill/>
-            </a:ln>
-          </p:spPr>
-          <p:txBody>
-            <a:bodyPr spcFirstLastPara="1" wrap="square" lIns="91425" tIns="45700" rIns="91425" bIns="45700" anchor="t" anchorCtr="0">
-              <a:spAutoFit/>
-            </a:bodyPr>
-            <a:lstStyle/>
-            <a:p>
-              <a:pPr marL="0" marR="0" lvl="0" indent="0" algn="ctr" rtl="0">
-                <a:lnSpc>
-                  <a:spcPct val="100000"/>
-                </a:lnSpc>
-                <a:spcBef>
-                  <a:spcPts val="0"/>
-                </a:spcBef>
-                <a:spcAft>
-                  <a:spcPts val="0"/>
-                </a:spcAft>
-                <a:buClr>
-                  <a:srgbClr val="000000"/>
-                </a:buClr>
-                <a:buSzPts val="1400"/>
-                <a:buFont typeface="Arial"/>
-                <a:buNone/>
-              </a:pPr>
-              <a:r>
-                <a:rPr lang="en-US" sz="1400" b="1" i="0" u="none" strike="noStrike" cap="none" dirty="0">
-                  <a:solidFill>
-                    <a:schemeClr val="dk1"/>
-                  </a:solidFill>
-                  <a:latin typeface="Space Grotesk"/>
-                  <a:ea typeface="Space Grotesk"/>
-                  <a:cs typeface="Space Grotesk"/>
-                  <a:sym typeface="Space Grotesk"/>
-                </a:rPr>
-                <a:t>Cron input binding</a:t>
-              </a:r>
-              <a:endParaRPr sz="1400" b="1" i="0" u="none" strike="noStrike" cap="none" dirty="0">
-                <a:solidFill>
-                  <a:schemeClr val="dk1"/>
-                </a:solidFill>
-                <a:latin typeface="Space Grotesk"/>
-                <a:ea typeface="Space Grotesk"/>
-                <a:cs typeface="Space Grotesk"/>
-                <a:sym typeface="Space Grotesk"/>
-              </a:endParaRPr>
-            </a:p>
-          </p:txBody>
-        </p:sp>
-      </p:grpSp>
-      <p:grpSp>
-        <p:nvGrpSpPr>
-          <p:cNvPr id="34" name="Group 33">
+          </a:ln>
+        </p:spPr>
+      </p:pic>
+      <p:sp>
+        <p:nvSpPr>
+          <p:cNvPr id="37" name="TextBox 36">
             <a:extLst>
               <a:ext uri="{FF2B5EF4-FFF2-40B4-BE49-F238E27FC236}">
-                <a16:creationId xmlns:a16="http://schemas.microsoft.com/office/drawing/2014/main" id="{A3927644-0444-932D-9D97-3B7D9B578F48}"/>
+                <a16:creationId xmlns:a16="http://schemas.microsoft.com/office/drawing/2014/main" id="{3F991F66-D0BF-C0A2-023E-01CC9E3BD74A}"/>
               </a:ext>
             </a:extLst>
           </p:cNvPr>
-          <p:cNvGrpSpPr/>
+          <p:cNvSpPr txBox="1"/>
           <p:nvPr/>
-        </p:nvGrpSpPr>
-        <p:grpSpPr>
+        </p:nvSpPr>
+        <p:spPr>
           <a:xfrm>
-            <a:off x="5839717" y="178554"/>
-            <a:ext cx="3086357" cy="1265998"/>
-            <a:chOff x="3517336" y="1909198"/>
-            <a:chExt cx="3086357" cy="1265998"/>
+            <a:off x="6739717" y="1390746"/>
+            <a:ext cx="1609736" cy="276999"/>
           </a:xfrm>
-        </p:grpSpPr>
-        <p:cxnSp>
-          <p:nvCxnSpPr>
-            <p:cNvPr id="35" name="Google Shape;442;p42">
-              <a:extLst>
-                <a:ext uri="{FF2B5EF4-FFF2-40B4-BE49-F238E27FC236}">
-                  <a16:creationId xmlns:a16="http://schemas.microsoft.com/office/drawing/2014/main" id="{49DCCCEF-F61E-2779-06E0-9B37953EF845}"/>
-                </a:ext>
-              </a:extLst>
-            </p:cNvPr>
-            <p:cNvCxnSpPr>
-              <a:cxnSpLocks/>
-            </p:cNvCxnSpPr>
-            <p:nvPr/>
-          </p:nvCxnSpPr>
-          <p:spPr>
-            <a:xfrm>
-              <a:off x="3533101" y="2853511"/>
-              <a:ext cx="1546850" cy="0"/>
-            </a:xfrm>
-            <a:prstGeom prst="straightConnector1">
-              <a:avLst/>
-            </a:prstGeom>
-            <a:noFill/>
-            <a:ln w="25400" cap="flat" cmpd="sng">
-              <a:solidFill>
-                <a:schemeClr val="dk1"/>
-              </a:solidFill>
-              <a:prstDash val="solid"/>
-              <a:miter lim="800000"/>
-              <a:headEnd type="none" w="sm" len="sm"/>
-              <a:tailEnd type="triangle" w="lg" len="lg"/>
-            </a:ln>
-          </p:spPr>
-        </p:cxnSp>
-        <p:pic>
-          <p:nvPicPr>
-            <p:cNvPr id="36" name="Google Shape;448;p42">
-              <a:extLst>
-                <a:ext uri="{FF2B5EF4-FFF2-40B4-BE49-F238E27FC236}">
-                  <a16:creationId xmlns:a16="http://schemas.microsoft.com/office/drawing/2014/main" id="{6D8516C0-ED39-BA33-952D-3E0B83D62AD9}"/>
-                </a:ext>
-              </a:extLst>
-            </p:cNvPr>
-            <p:cNvPicPr preferRelativeResize="0"/>
-            <p:nvPr/>
-          </p:nvPicPr>
-          <p:blipFill rotWithShape="1">
-            <a:blip r:embed="rId3">
-              <a:alphaModFix/>
-            </a:blip>
-            <a:srcRect/>
-            <a:stretch/>
-          </p:blipFill>
-          <p:spPr>
-            <a:xfrm>
-              <a:off x="3999002" y="1909198"/>
-              <a:ext cx="540000" cy="540000"/>
-            </a:xfrm>
-            <a:prstGeom prst="rect">
-              <a:avLst/>
-            </a:prstGeom>
-            <a:noFill/>
-            <a:ln>
-              <a:noFill/>
-            </a:ln>
-          </p:spPr>
-        </p:pic>
-        <p:sp>
-          <p:nvSpPr>
-            <p:cNvPr id="37" name="TextBox 36">
-              <a:extLst>
-                <a:ext uri="{FF2B5EF4-FFF2-40B4-BE49-F238E27FC236}">
-                  <a16:creationId xmlns:a16="http://schemas.microsoft.com/office/drawing/2014/main" id="{3F991F66-D0BF-C0A2-023E-01CC9E3BD74A}"/>
-                </a:ext>
-              </a:extLst>
-            </p:cNvPr>
-            <p:cNvSpPr txBox="1"/>
-            <p:nvPr/>
-          </p:nvSpPr>
-          <p:spPr>
-            <a:xfrm>
-              <a:off x="3517336" y="2468207"/>
-              <a:ext cx="1628972" cy="276999"/>
-            </a:xfrm>
-            <a:prstGeom prst="rect">
-              <a:avLst/>
-            </a:prstGeom>
-            <a:noFill/>
-          </p:spPr>
-          <p:txBody>
-            <a:bodyPr wrap="none" rtlCol="0">
-              <a:spAutoFit/>
-            </a:bodyPr>
-            <a:lstStyle/>
-            <a:p>
-              <a:r>
-                <a:rPr lang="en-US" sz="1200" b="1" dirty="0">
-                  <a:solidFill>
-                    <a:schemeClr val="accent2"/>
-                  </a:solidFill>
-                  <a:latin typeface="Space Grotesk" pitchFamily="2" charset="0"/>
-                  <a:cs typeface="Space Grotesk" pitchFamily="2" charset="0"/>
-                </a:rPr>
-                <a:t>POST</a:t>
-              </a:r>
-              <a:r>
-                <a:rPr lang="en-US" sz="1200" b="1" dirty="0">
-                  <a:latin typeface="Space Grotesk" pitchFamily="2" charset="0"/>
-                  <a:cs typeface="Space Grotesk" pitchFamily="2" charset="0"/>
-                </a:rPr>
-                <a:t> </a:t>
-              </a:r>
-              <a:r>
-                <a:rPr lang="en-US" sz="1200" dirty="0">
-                  <a:latin typeface="Space Grotesk" pitchFamily="2" charset="0"/>
-                  <a:cs typeface="Space Grotesk" pitchFamily="2" charset="0"/>
-                </a:rPr>
-                <a:t>/v1.0/</a:t>
-              </a:r>
-              <a:r>
-                <a:rPr lang="en-US" sz="1200" b="1" dirty="0">
-                  <a:solidFill>
-                    <a:schemeClr val="accent6"/>
-                  </a:solidFill>
-                  <a:latin typeface="Space Grotesk" pitchFamily="2" charset="0"/>
-                  <a:cs typeface="Space Grotesk" pitchFamily="2" charset="0"/>
-                </a:rPr>
-                <a:t>publish</a:t>
-              </a:r>
-              <a:r>
-                <a:rPr lang="en-US" sz="1200" dirty="0">
-                  <a:latin typeface="Space Grotesk" pitchFamily="2" charset="0"/>
-                  <a:cs typeface="Space Grotesk" pitchFamily="2" charset="0"/>
-                </a:rPr>
-                <a:t>/</a:t>
-              </a:r>
-              <a:endParaRPr lang="en-NL" sz="1200" dirty="0">
+          <a:prstGeom prst="rect">
+            <a:avLst/>
+          </a:prstGeom>
+          <a:noFill/>
+        </p:spPr>
+        <p:txBody>
+          <a:bodyPr wrap="none" rtlCol="0">
+            <a:spAutoFit/>
+          </a:bodyPr>
+          <a:lstStyle/>
+          <a:p>
+            <a:r>
+              <a:rPr lang="en-US" sz="1200" b="1" dirty="0">
+                <a:solidFill>
+                  <a:schemeClr val="accent2"/>
+                </a:solidFill>
                 <a:latin typeface="Space Grotesk" pitchFamily="2" charset="0"/>
                 <a:cs typeface="Space Grotesk" pitchFamily="2" charset="0"/>
-              </a:endParaRPr>
-            </a:p>
-          </p:txBody>
-        </p:sp>
-        <p:grpSp>
-          <p:nvGrpSpPr>
-            <p:cNvPr id="38" name="Group 37">
-              <a:extLst>
-                <a:ext uri="{FF2B5EF4-FFF2-40B4-BE49-F238E27FC236}">
-                  <a16:creationId xmlns:a16="http://schemas.microsoft.com/office/drawing/2014/main" id="{C5EC879F-8DC3-2774-753D-C76C5DA00144}"/>
-                </a:ext>
-              </a:extLst>
-            </p:cNvPr>
-            <p:cNvGrpSpPr>
-              <a:grpSpLocks noChangeAspect="1"/>
-            </p:cNvGrpSpPr>
-            <p:nvPr/>
-          </p:nvGrpSpPr>
-          <p:grpSpPr>
-            <a:xfrm>
-              <a:off x="5160311" y="2552396"/>
-              <a:ext cx="1443382" cy="622800"/>
-              <a:chOff x="2698596" y="1626722"/>
-              <a:chExt cx="1800000" cy="776676"/>
-            </a:xfrm>
-          </p:grpSpPr>
-          <p:pic>
-            <p:nvPicPr>
-              <p:cNvPr id="39" name="Google Shape;1922;p8">
-                <a:extLst>
-                  <a:ext uri="{FF2B5EF4-FFF2-40B4-BE49-F238E27FC236}">
-                    <a16:creationId xmlns:a16="http://schemas.microsoft.com/office/drawing/2014/main" id="{CB3BCAE1-B740-CF5A-1AB1-ECA6E83CC106}"/>
-                  </a:ext>
-                </a:extLst>
-              </p:cNvPr>
-              <p:cNvPicPr preferRelativeResize="0"/>
-              <p:nvPr/>
-            </p:nvPicPr>
-            <p:blipFill rotWithShape="1">
-              <a:blip r:embed="rId4">
-                <a:alphaModFix/>
-              </a:blip>
-              <a:srcRect/>
-              <a:stretch/>
-            </p:blipFill>
-            <p:spPr>
-              <a:xfrm>
-                <a:off x="2698596" y="1626722"/>
-                <a:ext cx="1800000" cy="776676"/>
-              </a:xfrm>
-              <a:prstGeom prst="rect">
-                <a:avLst/>
-              </a:prstGeom>
-              <a:noFill/>
-              <a:ln>
-                <a:noFill/>
-              </a:ln>
-            </p:spPr>
-          </p:pic>
-          <p:sp>
-            <p:nvSpPr>
-              <p:cNvPr id="40" name="Google Shape;1931;p8">
-                <a:extLst>
-                  <a:ext uri="{FF2B5EF4-FFF2-40B4-BE49-F238E27FC236}">
-                    <a16:creationId xmlns:a16="http://schemas.microsoft.com/office/drawing/2014/main" id="{E030D7DE-AF4B-6702-E09D-913196586709}"/>
-                  </a:ext>
-                </a:extLst>
-              </p:cNvPr>
-              <p:cNvSpPr txBox="1"/>
-              <p:nvPr/>
-            </p:nvSpPr>
-            <p:spPr>
-              <a:xfrm>
-                <a:off x="2766412" y="1748904"/>
-                <a:ext cx="1288822" cy="345388"/>
-              </a:xfrm>
-              <a:prstGeom prst="rect">
-                <a:avLst/>
-              </a:prstGeom>
-              <a:noFill/>
-              <a:ln>
-                <a:noFill/>
-              </a:ln>
-            </p:spPr>
-            <p:txBody>
-              <a:bodyPr spcFirstLastPara="1" wrap="square" lIns="91425" tIns="45700" rIns="91425" bIns="45700" anchor="t" anchorCtr="0">
-                <a:spAutoFit/>
-              </a:bodyPr>
-              <a:lstStyle/>
-              <a:p>
-                <a:pPr marL="0" marR="0" lvl="0" indent="0" algn="ctr" rtl="0">
-                  <a:lnSpc>
-                    <a:spcPct val="100000"/>
-                  </a:lnSpc>
-                  <a:spcBef>
-                    <a:spcPts val="0"/>
-                  </a:spcBef>
-                  <a:spcAft>
-                    <a:spcPts val="0"/>
-                  </a:spcAft>
-                  <a:buClr>
-                    <a:srgbClr val="000000"/>
-                  </a:buClr>
-                  <a:buSzPts val="1400"/>
-                  <a:buFont typeface="Arial"/>
-                  <a:buNone/>
-                </a:pPr>
-                <a:endParaRPr sz="1200" b="1" i="0" u="none" strike="noStrike" cap="none" dirty="0">
-                  <a:solidFill>
-                    <a:srgbClr val="121C29"/>
-                  </a:solidFill>
-                  <a:latin typeface="Space Grotesk"/>
-                  <a:ea typeface="Space Grotesk"/>
-                  <a:cs typeface="Space Grotesk"/>
-                  <a:sym typeface="Space Grotesk"/>
-                </a:endParaRPr>
-              </a:p>
-            </p:txBody>
-          </p:sp>
-        </p:grpSp>
-      </p:grpSp>
+              </a:rPr>
+              <a:t>POST</a:t>
+            </a:r>
+            <a:r>
+              <a:rPr lang="en-US" sz="1200" b="1" dirty="0">
+                <a:latin typeface="Space Grotesk" pitchFamily="2" charset="0"/>
+                <a:cs typeface="Space Grotesk" pitchFamily="2" charset="0"/>
+              </a:rPr>
+              <a:t> </a:t>
+            </a:r>
+            <a:r>
+              <a:rPr lang="en-US" sz="1200" dirty="0">
+                <a:latin typeface="Space Grotesk" pitchFamily="2" charset="0"/>
+                <a:cs typeface="Space Grotesk" pitchFamily="2" charset="0"/>
+              </a:rPr>
+              <a:t>/v1.0/</a:t>
+            </a:r>
+            <a:r>
+              <a:rPr lang="en-US" sz="1200" b="1" dirty="0">
+                <a:solidFill>
+                  <a:schemeClr val="accent6"/>
+                </a:solidFill>
+                <a:latin typeface="Space Grotesk" pitchFamily="2" charset="0"/>
+                <a:cs typeface="Space Grotesk" pitchFamily="2" charset="0"/>
+              </a:rPr>
+              <a:t>publish</a:t>
+            </a:r>
+            <a:r>
+              <a:rPr lang="en-US" sz="1200" dirty="0">
+                <a:latin typeface="Space Grotesk" pitchFamily="2" charset="0"/>
+                <a:cs typeface="Space Grotesk" pitchFamily="2" charset="0"/>
+              </a:rPr>
+              <a:t>/</a:t>
+            </a:r>
+            <a:endParaRPr lang="en-NL" sz="1200" dirty="0">
+              <a:latin typeface="Space Grotesk" pitchFamily="2" charset="0"/>
+              <a:cs typeface="Space Grotesk" pitchFamily="2" charset="0"/>
+            </a:endParaRPr>
+          </a:p>
+        </p:txBody>
+      </p:sp>
       <p:grpSp>
         <p:nvGrpSpPr>
           <p:cNvPr id="5" name="Google Shape;1814;p4">
@@ -12837,7 +12606,7 @@
             <p:nvPr/>
           </p:nvPicPr>
           <p:blipFill rotWithShape="1">
-            <a:blip r:embed="rId5">
+            <a:blip r:embed="rId4">
               <a:alphaModFix/>
             </a:blip>
             <a:srcRect/>
@@ -12946,7 +12715,7 @@
         </p:nvGrpSpPr>
         <p:grpSpPr>
           <a:xfrm>
-            <a:off x="10391164" y="2981452"/>
+            <a:off x="2904552" y="2845995"/>
             <a:ext cx="1766667" cy="1800000"/>
             <a:chOff x="3071990" y="1647687"/>
             <a:chExt cx="1855000" cy="1890000"/>
@@ -12965,7 +12734,7 @@
             <p:nvPr/>
           </p:nvPicPr>
           <p:blipFill rotWithShape="1">
-            <a:blip r:embed="rId5">
+            <a:blip r:embed="rId4">
               <a:alphaModFix/>
             </a:blip>
             <a:srcRect/>
@@ -13093,7 +12862,7 @@
             <p:nvPr/>
           </p:nvPicPr>
           <p:blipFill rotWithShape="1">
-            <a:blip r:embed="rId6">
+            <a:blip r:embed="rId5">
               <a:alphaModFix/>
             </a:blip>
             <a:srcRect/>
@@ -13202,7 +12971,7 @@
         </p:nvGrpSpPr>
         <p:grpSpPr>
           <a:xfrm>
-            <a:off x="4088815" y="5735133"/>
+            <a:off x="4461555" y="6350850"/>
             <a:ext cx="1766667" cy="1800000"/>
             <a:chOff x="1008840" y="1539000"/>
             <a:chExt cx="1855000" cy="1890000"/>
@@ -13221,7 +12990,7 @@
             <p:nvPr/>
           </p:nvPicPr>
           <p:blipFill rotWithShape="1">
-            <a:blip r:embed="rId6">
+            <a:blip r:embed="rId5">
               <a:alphaModFix/>
             </a:blip>
             <a:srcRect/>
@@ -13330,7 +13099,7 @@
         </p:nvGrpSpPr>
         <p:grpSpPr>
           <a:xfrm>
-            <a:off x="7172194" y="5735133"/>
+            <a:off x="7544934" y="6350850"/>
             <a:ext cx="1766667" cy="1800000"/>
             <a:chOff x="1008840" y="1539000"/>
             <a:chExt cx="1855000" cy="1890000"/>
@@ -13349,7 +13118,7 @@
             <p:nvPr/>
           </p:nvPicPr>
           <p:blipFill rotWithShape="1">
-            <a:blip r:embed="rId6">
+            <a:blip r:embed="rId5">
               <a:alphaModFix/>
             </a:blip>
             <a:srcRect/>
@@ -13433,144 +13202,186 @@
           </p:txBody>
         </p:sp>
       </p:grpSp>
-      <p:pic>
-        <p:nvPicPr>
-          <p:cNvPr id="27" name="Google Shape;777;p58">
+      <p:grpSp>
+        <p:nvGrpSpPr>
+          <p:cNvPr id="106" name="Group 105">
             <a:extLst>
               <a:ext uri="{FF2B5EF4-FFF2-40B4-BE49-F238E27FC236}">
-                <a16:creationId xmlns:a16="http://schemas.microsoft.com/office/drawing/2014/main" id="{6CAEB624-73AB-7E2F-2F3B-16ECA11DE49D}"/>
+                <a16:creationId xmlns:a16="http://schemas.microsoft.com/office/drawing/2014/main" id="{51FE8BD3-A0AC-C790-63D4-D75924A9B032}"/>
               </a:ext>
             </a:extLst>
           </p:cNvPr>
-          <p:cNvPicPr preferRelativeResize="0"/>
+          <p:cNvGrpSpPr/>
           <p:nvPr/>
-        </p:nvPicPr>
-        <p:blipFill rotWithShape="1">
-          <a:blip r:embed="rId7">
-            <a:alphaModFix/>
-          </a:blip>
-          <a:srcRect/>
-          <a:stretch/>
-        </p:blipFill>
-        <p:spPr>
+        </p:nvGrpSpPr>
+        <p:grpSpPr>
           <a:xfrm>
-            <a:off x="4730991" y="3923293"/>
-            <a:ext cx="746881" cy="941390"/>
+            <a:off x="5691383" y="1966082"/>
+            <a:ext cx="1800000" cy="776676"/>
+            <a:chOff x="5049258" y="2735488"/>
+            <a:chExt cx="1800000" cy="776676"/>
           </a:xfrm>
-          <a:prstGeom prst="rect">
-            <a:avLst/>
-          </a:prstGeom>
-          <a:noFill/>
-          <a:ln>
+        </p:grpSpPr>
+        <p:pic>
+          <p:nvPicPr>
+            <p:cNvPr id="104" name="Google Shape;1924;p8">
+              <a:extLst>
+                <a:ext uri="{FF2B5EF4-FFF2-40B4-BE49-F238E27FC236}">
+                  <a16:creationId xmlns:a16="http://schemas.microsoft.com/office/drawing/2014/main" id="{13C40835-8551-BBD2-D9AC-6C126BF73D40}"/>
+                </a:ext>
+              </a:extLst>
+            </p:cNvPr>
+            <p:cNvPicPr preferRelativeResize="0"/>
+            <p:nvPr/>
+          </p:nvPicPr>
+          <p:blipFill rotWithShape="1">
+            <a:blip r:embed="rId6">
+              <a:alphaModFix/>
+            </a:blip>
+            <a:srcRect/>
+            <a:stretch/>
+          </p:blipFill>
+          <p:spPr>
+            <a:xfrm>
+              <a:off x="5049258" y="2735488"/>
+              <a:ext cx="1800000" cy="776676"/>
+            </a:xfrm>
+            <a:prstGeom prst="rect">
+              <a:avLst/>
+            </a:prstGeom>
             <a:noFill/>
-          </a:ln>
-        </p:spPr>
-      </p:pic>
-      <p:pic>
-        <p:nvPicPr>
-          <p:cNvPr id="28" name="Google Shape;1089;p89">
-            <a:extLst>
-              <a:ext uri="{FF2B5EF4-FFF2-40B4-BE49-F238E27FC236}">
-                <a16:creationId xmlns:a16="http://schemas.microsoft.com/office/drawing/2014/main" id="{96C22134-6DB7-46F9-32C5-DBC2609FA050}"/>
-              </a:ext>
-            </a:extLst>
-          </p:cNvPr>
-          <p:cNvPicPr preferRelativeResize="0"/>
-          <p:nvPr/>
-        </p:nvPicPr>
-        <p:blipFill rotWithShape="1">
-          <a:blip r:embed="rId8">
-            <a:alphaModFix/>
-          </a:blip>
-          <a:srcRect/>
-          <a:stretch/>
-        </p:blipFill>
-        <p:spPr>
-          <a:xfrm>
-            <a:off x="8101839" y="870558"/>
-            <a:ext cx="313762" cy="525526"/>
-          </a:xfrm>
-          <a:prstGeom prst="rect">
-            <a:avLst/>
-          </a:prstGeom>
-          <a:noFill/>
-          <a:ln>
-            <a:noFill/>
-          </a:ln>
-        </p:spPr>
-      </p:pic>
-      <p:sp>
-        <p:nvSpPr>
-          <p:cNvPr id="29" name="Google Shape;1090;p89">
-            <a:extLst>
-              <a:ext uri="{FF2B5EF4-FFF2-40B4-BE49-F238E27FC236}">
-                <a16:creationId xmlns:a16="http://schemas.microsoft.com/office/drawing/2014/main" id="{C236FF25-7236-C616-14B1-8B1527319A8F}"/>
-              </a:ext>
-            </a:extLst>
-          </p:cNvPr>
-          <p:cNvSpPr txBox="1"/>
-          <p:nvPr/>
-        </p:nvSpPr>
-        <p:spPr>
-          <a:xfrm>
-            <a:off x="7172194" y="967096"/>
-            <a:ext cx="1299906" cy="307736"/>
-          </a:xfrm>
-          <a:prstGeom prst="rect">
-            <a:avLst/>
-          </a:prstGeom>
-          <a:noFill/>
-          <a:ln>
-            <a:noFill/>
-          </a:ln>
-        </p:spPr>
-        <p:txBody>
-          <a:bodyPr spcFirstLastPara="1" wrap="square" lIns="91425" tIns="45700" rIns="91425" bIns="45700" anchor="t" anchorCtr="0">
-            <a:spAutoFit/>
-          </a:bodyPr>
-          <a:lstStyle/>
-          <a:p>
-            <a:pPr marL="0" marR="0" lvl="0" indent="0" algn="ctr" rtl="0">
-              <a:lnSpc>
-                <a:spcPct val="100000"/>
-              </a:lnSpc>
-              <a:spcBef>
-                <a:spcPts val="0"/>
-              </a:spcBef>
-              <a:spcAft>
-                <a:spcPts val="0"/>
-              </a:spcAft>
-              <a:buClr>
-                <a:srgbClr val="000000"/>
-              </a:buClr>
-              <a:buSzPts val="1200"/>
-              <a:buFont typeface="Arial"/>
-              <a:buNone/>
-            </a:pPr>
-            <a:r>
-              <a:rPr lang="en-US" sz="1400" b="0" i="0" u="none" strike="noStrike" cap="none" dirty="0">
-                <a:solidFill>
-                  <a:srgbClr val="121C29"/>
-                </a:solidFill>
-                <a:latin typeface="Space Grotesk"/>
-                <a:ea typeface="Space Grotesk"/>
-                <a:cs typeface="Space Grotesk"/>
-                <a:sym typeface="Space Grotesk"/>
-              </a:rPr>
-              <a:t>Kafka</a:t>
-            </a:r>
-            <a:endParaRPr sz="1400" b="0" i="0" u="none" strike="noStrike" cap="none" dirty="0">
-              <a:solidFill>
-                <a:srgbClr val="121C29"/>
-              </a:solidFill>
-              <a:latin typeface="Space Grotesk"/>
-              <a:ea typeface="Space Grotesk"/>
-              <a:cs typeface="Space Grotesk"/>
-              <a:sym typeface="Space Grotesk"/>
-            </a:endParaRPr>
-          </a:p>
-        </p:txBody>
-      </p:sp>
+            <a:ln>
+              <a:noFill/>
+            </a:ln>
+          </p:spPr>
+        </p:pic>
+        <p:grpSp>
+          <p:nvGrpSpPr>
+            <p:cNvPr id="101" name="Group 100">
+              <a:extLst>
+                <a:ext uri="{FF2B5EF4-FFF2-40B4-BE49-F238E27FC236}">
+                  <a16:creationId xmlns:a16="http://schemas.microsoft.com/office/drawing/2014/main" id="{93E20F35-27D2-E318-D1C2-A187BF23D317}"/>
+                </a:ext>
+              </a:extLst>
+            </p:cNvPr>
+            <p:cNvGrpSpPr/>
+            <p:nvPr/>
+          </p:nvGrpSpPr>
+          <p:grpSpPr>
+            <a:xfrm>
+              <a:off x="5108902" y="2888152"/>
+              <a:ext cx="1152770" cy="525526"/>
+              <a:chOff x="5108902" y="2888152"/>
+              <a:chExt cx="1152770" cy="525526"/>
+            </a:xfrm>
+          </p:grpSpPr>
+          <p:pic>
+            <p:nvPicPr>
+              <p:cNvPr id="28" name="Google Shape;1089;p89">
+                <a:extLst>
+                  <a:ext uri="{FF2B5EF4-FFF2-40B4-BE49-F238E27FC236}">
+                    <a16:creationId xmlns:a16="http://schemas.microsoft.com/office/drawing/2014/main" id="{96C22134-6DB7-46F9-32C5-DBC2609FA050}"/>
+                  </a:ext>
+                </a:extLst>
+              </p:cNvPr>
+              <p:cNvPicPr preferRelativeResize="0"/>
+              <p:nvPr/>
+            </p:nvPicPr>
+            <p:blipFill rotWithShape="1">
+              <a:blip r:embed="rId7">
+                <a:alphaModFix/>
+              </a:blip>
+              <a:srcRect/>
+              <a:stretch/>
+            </p:blipFill>
+            <p:spPr>
+              <a:xfrm>
+                <a:off x="5947910" y="2888152"/>
+                <a:ext cx="313762" cy="525526"/>
+              </a:xfrm>
+              <a:prstGeom prst="rect">
+                <a:avLst/>
+              </a:prstGeom>
+              <a:noFill/>
+              <a:ln>
+                <a:noFill/>
+              </a:ln>
+            </p:spPr>
+          </p:pic>
+          <p:sp>
+            <p:nvSpPr>
+              <p:cNvPr id="29" name="Google Shape;1090;p89">
+                <a:extLst>
+                  <a:ext uri="{FF2B5EF4-FFF2-40B4-BE49-F238E27FC236}">
+                    <a16:creationId xmlns:a16="http://schemas.microsoft.com/office/drawing/2014/main" id="{C236FF25-7236-C616-14B1-8B1527319A8F}"/>
+                  </a:ext>
+                </a:extLst>
+              </p:cNvPr>
+              <p:cNvSpPr txBox="1"/>
+              <p:nvPr/>
+            </p:nvSpPr>
+            <p:spPr>
+              <a:xfrm>
+                <a:off x="5108902" y="2997047"/>
+                <a:ext cx="835741" cy="307736"/>
+              </a:xfrm>
+              <a:prstGeom prst="rect">
+                <a:avLst/>
+              </a:prstGeom>
+              <a:noFill/>
+              <a:ln>
+                <a:noFill/>
+              </a:ln>
+            </p:spPr>
+            <p:txBody>
+              <a:bodyPr spcFirstLastPara="1" wrap="square" lIns="91425" tIns="45700" rIns="91425" bIns="45700" anchor="t" anchorCtr="0">
+                <a:spAutoFit/>
+              </a:bodyPr>
+              <a:lstStyle/>
+              <a:p>
+                <a:pPr marL="0" marR="0" lvl="0" indent="0" algn="ctr" rtl="0">
+                  <a:lnSpc>
+                    <a:spcPct val="100000"/>
+                  </a:lnSpc>
+                  <a:spcBef>
+                    <a:spcPts val="0"/>
+                  </a:spcBef>
+                  <a:spcAft>
+                    <a:spcPts val="0"/>
+                  </a:spcAft>
+                  <a:buClr>
+                    <a:srgbClr val="000000"/>
+                  </a:buClr>
+                  <a:buSzPts val="1200"/>
+                  <a:buFont typeface="Arial"/>
+                  <a:buNone/>
+                </a:pPr>
+                <a:r>
+                  <a:rPr lang="en-US" sz="1400" b="0" i="0" u="none" strike="noStrike" cap="none" dirty="0">
+                    <a:solidFill>
+                      <a:srgbClr val="121C29"/>
+                    </a:solidFill>
+                    <a:latin typeface="Space Grotesk"/>
+                    <a:ea typeface="Space Grotesk"/>
+                    <a:cs typeface="Space Grotesk"/>
+                    <a:sym typeface="Space Grotesk"/>
+                  </a:rPr>
+                  <a:t>Kafka</a:t>
+                </a:r>
+                <a:endParaRPr sz="1400" b="0" i="0" u="none" strike="noStrike" cap="none" dirty="0">
+                  <a:solidFill>
+                    <a:srgbClr val="121C29"/>
+                  </a:solidFill>
+                  <a:latin typeface="Space Grotesk"/>
+                  <a:ea typeface="Space Grotesk"/>
+                  <a:cs typeface="Space Grotesk"/>
+                  <a:sym typeface="Space Grotesk"/>
+                </a:endParaRPr>
+              </a:p>
+            </p:txBody>
+          </p:sp>
+        </p:grpSp>
+      </p:grpSp>
       <p:grpSp>
         <p:nvGrpSpPr>
           <p:cNvPr id="41" name="Group 40">
@@ -13585,10 +13396,10 @@
         </p:nvGrpSpPr>
         <p:grpSpPr>
           <a:xfrm>
-            <a:off x="2435883" y="176651"/>
-            <a:ext cx="1562615" cy="944313"/>
-            <a:chOff x="3517336" y="1909198"/>
-            <a:chExt cx="1562615" cy="944313"/>
+            <a:off x="2435883" y="735660"/>
+            <a:ext cx="1562615" cy="385304"/>
+            <a:chOff x="3517336" y="2468207"/>
+            <a:chExt cx="1562615" cy="385304"/>
           </a:xfrm>
         </p:grpSpPr>
         <p:cxnSp>
@@ -13625,39 +13436,6 @@
             </a:ln>
           </p:spPr>
         </p:cxnSp>
-        <p:pic>
-          <p:nvPicPr>
-            <p:cNvPr id="43" name="Google Shape;448;p42">
-              <a:extLst>
-                <a:ext uri="{FF2B5EF4-FFF2-40B4-BE49-F238E27FC236}">
-                  <a16:creationId xmlns:a16="http://schemas.microsoft.com/office/drawing/2014/main" id="{63A71C75-4694-D396-83A2-E50B729FCED3}"/>
-                </a:ext>
-              </a:extLst>
-            </p:cNvPr>
-            <p:cNvPicPr preferRelativeResize="0"/>
-            <p:nvPr/>
-          </p:nvPicPr>
-          <p:blipFill rotWithShape="1">
-            <a:blip r:embed="rId3">
-              <a:alphaModFix/>
-            </a:blip>
-            <a:srcRect/>
-            <a:stretch/>
-          </p:blipFill>
-          <p:spPr>
-            <a:xfrm>
-              <a:off x="3999002" y="1909198"/>
-              <a:ext cx="540000" cy="540000"/>
-            </a:xfrm>
-            <a:prstGeom prst="rect">
-              <a:avLst/>
-            </a:prstGeom>
-            <a:noFill/>
-            <a:ln>
-              <a:noFill/>
-            </a:ln>
-          </p:spPr>
-        </p:pic>
         <p:sp>
           <p:nvSpPr>
             <p:cNvPr id="44" name="TextBox 43">
@@ -13749,8 +13527,8 @@
         </p:nvSpPr>
         <p:spPr>
           <a:xfrm>
-            <a:off x="8230101" y="1896452"/>
-            <a:ext cx="1754006" cy="276999"/>
+            <a:off x="8673070" y="2671789"/>
+            <a:ext cx="1343638" cy="276999"/>
           </a:xfrm>
           <a:prstGeom prst="rect">
             <a:avLst/>
@@ -13771,7 +13549,7 @@
                 <a:latin typeface="Space Grotesk" pitchFamily="2" charset="0"/>
                 <a:cs typeface="Space Grotesk" pitchFamily="2" charset="0"/>
               </a:rPr>
-              <a:t>GET</a:t>
+              <a:t>POST</a:t>
             </a:r>
             <a:r>
               <a:rPr lang="en-US" sz="1200" b="1" dirty="0">
@@ -13785,21 +13563,7 @@
                 <a:latin typeface="Space Grotesk" pitchFamily="2" charset="0"/>
                 <a:cs typeface="Space Grotesk" pitchFamily="2" charset="0"/>
               </a:rPr>
-              <a:t>/</a:t>
-            </a:r>
-            <a:r>
-              <a:rPr lang="en-US" sz="1200" dirty="0" err="1">
-                <a:latin typeface="Space Grotesk" pitchFamily="2" charset="0"/>
-                <a:cs typeface="Space Grotesk" pitchFamily="2" charset="0"/>
-              </a:rPr>
-              <a:t>dapr</a:t>
-            </a:r>
-            <a:r>
-              <a:rPr lang="en-US" sz="1200" dirty="0">
-                <a:latin typeface="Space Grotesk" pitchFamily="2" charset="0"/>
-                <a:cs typeface="Space Grotesk" pitchFamily="2" charset="0"/>
-              </a:rPr>
-              <a:t>/subscribe/</a:t>
+              <a:t>/endpoint</a:t>
             </a:r>
             <a:endParaRPr lang="en-NL" sz="1200" dirty="0">
               <a:latin typeface="Space Grotesk" pitchFamily="2" charset="0"/>
@@ -13822,7 +13586,7 @@
         </p:nvGrpSpPr>
         <p:grpSpPr>
           <a:xfrm>
-            <a:off x="7099931" y="2696142"/>
+            <a:off x="7456601" y="3314308"/>
             <a:ext cx="1855000" cy="1890000"/>
             <a:chOff x="7394266" y="1813369"/>
             <a:chExt cx="1855000" cy="1890000"/>
@@ -13841,7 +13605,7 @@
             <p:nvPr/>
           </p:nvPicPr>
           <p:blipFill rotWithShape="1">
-            <a:blip r:embed="rId9">
+            <a:blip r:embed="rId8">
               <a:alphaModFix/>
             </a:blip>
             <a:srcRect/>
@@ -13934,40 +13698,6 @@
           </p:txBody>
         </p:sp>
       </p:grpSp>
-      <p:cxnSp>
-        <p:nvCxnSpPr>
-          <p:cNvPr id="53" name="Google Shape;442;p42">
-            <a:extLst>
-              <a:ext uri="{FF2B5EF4-FFF2-40B4-BE49-F238E27FC236}">
-                <a16:creationId xmlns:a16="http://schemas.microsoft.com/office/drawing/2014/main" id="{B0E912AF-05CD-9CB3-84DB-A11DDA6D2FAF}"/>
-              </a:ext>
-            </a:extLst>
-          </p:cNvPr>
-          <p:cNvCxnSpPr>
-            <a:cxnSpLocks/>
-          </p:cNvCxnSpPr>
-          <p:nvPr/>
-        </p:nvCxnSpPr>
-        <p:spPr>
-          <a:xfrm>
-            <a:off x="8233045" y="1609936"/>
-            <a:ext cx="0" cy="947913"/>
-          </a:xfrm>
-          <a:prstGeom prst="straightConnector1">
-            <a:avLst/>
-          </a:prstGeom>
-          <a:noFill/>
-          <a:ln w="25400" cap="flat" cmpd="sng">
-            <a:solidFill>
-              <a:schemeClr val="dk1"/>
-            </a:solidFill>
-            <a:prstDash val="solid"/>
-            <a:miter lim="800000"/>
-            <a:headEnd type="none" w="sm" len="sm"/>
-            <a:tailEnd type="triangle" w="lg" len="lg"/>
-          </a:ln>
-        </p:spPr>
-      </p:cxnSp>
       <p:sp>
         <p:nvSpPr>
           <p:cNvPr id="50" name="TextBox 49">
@@ -13982,7 +13712,7 @@
         </p:nvSpPr>
         <p:spPr>
           <a:xfrm>
-            <a:off x="7044278" y="1876950"/>
+            <a:off x="8740771" y="2454624"/>
             <a:ext cx="1141659" cy="276999"/>
           </a:xfrm>
           <a:prstGeom prst="rect">
@@ -14029,7 +13759,7 @@
           <p:nvPr/>
         </p:nvPicPr>
         <p:blipFill rotWithShape="1">
-          <a:blip r:embed="rId7">
+          <a:blip r:embed="rId9">
             <a:alphaModFix/>
           </a:blip>
           <a:srcRect/>
@@ -14037,7 +13767,7 @@
         </p:blipFill>
         <p:spPr>
           <a:xfrm>
-            <a:off x="10705657" y="6083188"/>
+            <a:off x="11078397" y="6698905"/>
             <a:ext cx="746881" cy="941390"/>
           </a:xfrm>
           <a:prstGeom prst="rect">
@@ -14065,7 +13795,7 @@
         </p:nvCxnSpPr>
         <p:spPr>
           <a:xfrm flipH="1">
-            <a:off x="2831996" y="6451421"/>
+            <a:off x="3204736" y="7067138"/>
             <a:ext cx="1456337" cy="0"/>
           </a:xfrm>
           <a:prstGeom prst="straightConnector1">
@@ -14099,7 +13829,7 @@
         </p:nvCxnSpPr>
         <p:spPr>
           <a:xfrm flipH="1">
-            <a:off x="5945995" y="6407342"/>
+            <a:off x="6318735" y="7023059"/>
             <a:ext cx="1456337" cy="0"/>
           </a:xfrm>
           <a:prstGeom prst="straightConnector1">
@@ -14119,158 +13849,32 @@
       </p:cxnSp>
       <p:grpSp>
         <p:nvGrpSpPr>
-          <p:cNvPr id="68" name="Group 67">
+          <p:cNvPr id="17" name="Google Shape;1831;p5">
             <a:extLst>
               <a:ext uri="{FF2B5EF4-FFF2-40B4-BE49-F238E27FC236}">
-                <a16:creationId xmlns:a16="http://schemas.microsoft.com/office/drawing/2014/main" id="{98CF69B9-6FB6-8658-9B71-83234779467F}"/>
+                <a16:creationId xmlns:a16="http://schemas.microsoft.com/office/drawing/2014/main" id="{EFC98061-1422-6820-1FDD-B5BDE9D3E532}"/>
               </a:ext>
             </a:extLst>
           </p:cNvPr>
-          <p:cNvGrpSpPr/>
+          <p:cNvGrpSpPr>
+            <a:grpSpLocks noChangeAspect="1"/>
+          </p:cNvGrpSpPr>
           <p:nvPr/>
         </p:nvGrpSpPr>
         <p:grpSpPr>
           <a:xfrm>
-            <a:off x="442413" y="3923293"/>
-            <a:ext cx="2299030" cy="3698310"/>
-            <a:chOff x="1758175" y="2850174"/>
-            <a:chExt cx="2299030" cy="3698310"/>
+            <a:off x="1287280" y="6350850"/>
+            <a:ext cx="1766667" cy="1800000"/>
+            <a:chOff x="1008840" y="1539001"/>
+            <a:chExt cx="1855000" cy="1890000"/>
           </a:xfrm>
         </p:grpSpPr>
-        <p:grpSp>
-          <p:nvGrpSpPr>
-            <p:cNvPr id="17" name="Google Shape;1831;p5">
+        <p:pic>
+          <p:nvPicPr>
+            <p:cNvPr id="18" name="Google Shape;1832;p5">
               <a:extLst>
                 <a:ext uri="{FF2B5EF4-FFF2-40B4-BE49-F238E27FC236}">
-                  <a16:creationId xmlns:a16="http://schemas.microsoft.com/office/drawing/2014/main" id="{EFC98061-1422-6820-1FDD-B5BDE9D3E532}"/>
-                </a:ext>
-              </a:extLst>
-            </p:cNvPr>
-            <p:cNvGrpSpPr>
-              <a:grpSpLocks noChangeAspect="1"/>
-            </p:cNvGrpSpPr>
-            <p:nvPr/>
-          </p:nvGrpSpPr>
-          <p:grpSpPr>
-            <a:xfrm>
-              <a:off x="2290538" y="4748484"/>
-              <a:ext cx="1766667" cy="1800000"/>
-              <a:chOff x="1008840" y="1539001"/>
-              <a:chExt cx="1855000" cy="1890000"/>
-            </a:xfrm>
-          </p:grpSpPr>
-          <p:pic>
-            <p:nvPicPr>
-              <p:cNvPr id="18" name="Google Shape;1832;p5">
-                <a:extLst>
-                  <a:ext uri="{FF2B5EF4-FFF2-40B4-BE49-F238E27FC236}">
-                    <a16:creationId xmlns:a16="http://schemas.microsoft.com/office/drawing/2014/main" id="{8523E0E6-6F96-5FE0-1707-786AE5A70966}"/>
-                  </a:ext>
-                </a:extLst>
-              </p:cNvPr>
-              <p:cNvPicPr preferRelativeResize="0"/>
-              <p:nvPr/>
-            </p:nvPicPr>
-            <p:blipFill rotWithShape="1">
-              <a:blip r:embed="rId6">
-                <a:alphaModFix/>
-              </a:blip>
-              <a:srcRect/>
-              <a:stretch/>
-            </p:blipFill>
-            <p:spPr>
-              <a:xfrm>
-                <a:off x="1008840" y="1539001"/>
-                <a:ext cx="1855000" cy="1890000"/>
-              </a:xfrm>
-              <a:prstGeom prst="rect">
-                <a:avLst/>
-              </a:prstGeom>
-              <a:noFill/>
-              <a:ln>
-                <a:noFill/>
-              </a:ln>
-            </p:spPr>
-          </p:pic>
-          <p:sp>
-            <p:nvSpPr>
-              <p:cNvPr id="19" name="Google Shape;1833;p5">
-                <a:extLst>
-                  <a:ext uri="{FF2B5EF4-FFF2-40B4-BE49-F238E27FC236}">
-                    <a16:creationId xmlns:a16="http://schemas.microsoft.com/office/drawing/2014/main" id="{3173C257-3848-C75C-E159-D1548B04B719}"/>
-                  </a:ext>
-                </a:extLst>
-              </p:cNvPr>
-              <p:cNvSpPr txBox="1"/>
-              <p:nvPr/>
-            </p:nvSpPr>
-            <p:spPr>
-              <a:xfrm>
-                <a:off x="1498037" y="2099282"/>
-                <a:ext cx="1241317" cy="323123"/>
-              </a:xfrm>
-              <a:prstGeom prst="rect">
-                <a:avLst/>
-              </a:prstGeom>
-              <a:noFill/>
-              <a:ln>
-                <a:noFill/>
-              </a:ln>
-            </p:spPr>
-            <p:txBody>
-              <a:bodyPr spcFirstLastPara="1" wrap="square" lIns="91425" tIns="45700" rIns="91425" bIns="45700" anchor="t" anchorCtr="0">
-                <a:spAutoFit/>
-              </a:bodyPr>
-              <a:lstStyle/>
-              <a:p>
-                <a:pPr marL="0" marR="0" lvl="0" indent="0" algn="ctr" rtl="0">
-                  <a:lnSpc>
-                    <a:spcPct val="100000"/>
-                  </a:lnSpc>
-                  <a:spcBef>
-                    <a:spcPts val="0"/>
-                  </a:spcBef>
-                  <a:spcAft>
-                    <a:spcPts val="0"/>
-                  </a:spcAft>
-                  <a:buClr>
-                    <a:srgbClr val="000000"/>
-                  </a:buClr>
-                  <a:buSzPts val="1400"/>
-                  <a:buFont typeface="Arial"/>
-                  <a:buNone/>
-                </a:pPr>
-                <a:r>
-                  <a:rPr lang="en-CA" sz="1400" b="1" i="0" u="none" strike="noStrike" cap="none" dirty="0">
-                    <a:solidFill>
-                      <a:schemeClr val="lt1"/>
-                    </a:solidFill>
-                    <a:latin typeface="Space Grotesk"/>
-                    <a:ea typeface="Space Grotesk"/>
-                    <a:cs typeface="Space Grotesk"/>
-                    <a:sym typeface="Space Grotesk"/>
-                  </a:rPr>
-                  <a:t>Loyalty</a:t>
-                </a:r>
-                <a:endParaRPr sz="1400" b="1" i="0" u="none" strike="noStrike" cap="none" dirty="0">
-                  <a:solidFill>
-                    <a:schemeClr val="lt1"/>
-                  </a:solidFill>
-                  <a:latin typeface="Space Grotesk"/>
-                  <a:ea typeface="Space Grotesk"/>
-                  <a:cs typeface="Space Grotesk"/>
-                  <a:sym typeface="Space Grotesk"/>
-                </a:endParaRPr>
-              </a:p>
-            </p:txBody>
-          </p:sp>
-        </p:grpSp>
-        <p:pic>
-          <p:nvPicPr>
-            <p:cNvPr id="58" name="Google Shape;777;p58">
-              <a:extLst>
-                <a:ext uri="{FF2B5EF4-FFF2-40B4-BE49-F238E27FC236}">
-                  <a16:creationId xmlns:a16="http://schemas.microsoft.com/office/drawing/2014/main" id="{4331532D-E954-C13B-3522-1955656805CE}"/>
+                  <a16:creationId xmlns:a16="http://schemas.microsoft.com/office/drawing/2014/main" id="{8523E0E6-6F96-5FE0-1707-786AE5A70966}"/>
                 </a:ext>
               </a:extLst>
             </p:cNvPr>
@@ -14278,7 +13882,7 @@
             <p:nvPr/>
           </p:nvPicPr>
           <p:blipFill rotWithShape="1">
-            <a:blip r:embed="rId7">
+            <a:blip r:embed="rId5">
               <a:alphaModFix/>
             </a:blip>
             <a:srcRect/>
@@ -14286,41 +13890,8 @@
           </p:blipFill>
           <p:spPr>
             <a:xfrm>
-              <a:off x="2974104" y="2850174"/>
-              <a:ext cx="746881" cy="941390"/>
-            </a:xfrm>
-            <a:prstGeom prst="rect">
-              <a:avLst/>
-            </a:prstGeom>
-            <a:noFill/>
-            <a:ln>
-              <a:noFill/>
-            </a:ln>
-          </p:spPr>
-        </p:pic>
-        <p:pic>
-          <p:nvPicPr>
-            <p:cNvPr id="63" name="Google Shape;450;p42">
-              <a:extLst>
-                <a:ext uri="{FF2B5EF4-FFF2-40B4-BE49-F238E27FC236}">
-                  <a16:creationId xmlns:a16="http://schemas.microsoft.com/office/drawing/2014/main" id="{5AA6BD9D-340C-4B20-4358-CA1873B15B51}"/>
-                </a:ext>
-              </a:extLst>
-            </p:cNvPr>
-            <p:cNvPicPr preferRelativeResize="0"/>
-            <p:nvPr/>
-          </p:nvPicPr>
-          <p:blipFill rotWithShape="1">
-            <a:blip r:embed="rId10">
-              <a:alphaModFix/>
-            </a:blip>
-            <a:srcRect/>
-            <a:stretch/>
-          </p:blipFill>
-          <p:spPr>
-            <a:xfrm>
-              <a:off x="2213092" y="3895944"/>
-              <a:ext cx="540000" cy="540000"/>
+              <a:off x="1008840" y="1539001"/>
+              <a:ext cx="1855000" cy="1890000"/>
             </a:xfrm>
             <a:prstGeom prst="rect">
               <a:avLst/>
@@ -14333,10 +13904,10 @@
         </p:pic>
         <p:sp>
           <p:nvSpPr>
-            <p:cNvPr id="64" name="TextBox 63">
+            <p:cNvPr id="19" name="Google Shape;1833;p5">
               <a:extLst>
                 <a:ext uri="{FF2B5EF4-FFF2-40B4-BE49-F238E27FC236}">
-                  <a16:creationId xmlns:a16="http://schemas.microsoft.com/office/drawing/2014/main" id="{A92C2C9F-AA37-05AB-32F9-FC8DC211C114}"/>
+                  <a16:creationId xmlns:a16="http://schemas.microsoft.com/office/drawing/2014/main" id="{3173C257-3848-C75C-E159-D1548B04B719}"/>
                 </a:ext>
               </a:extLst>
             </p:cNvPr>
@@ -14345,247 +13916,65 @@
           </p:nvSpPr>
           <p:spPr>
             <a:xfrm>
-              <a:off x="1758175" y="4435944"/>
-              <a:ext cx="1463862" cy="276999"/>
+              <a:off x="1498037" y="2099282"/>
+              <a:ext cx="1241317" cy="323123"/>
             </a:xfrm>
             <a:prstGeom prst="rect">
               <a:avLst/>
             </a:prstGeom>
             <a:noFill/>
+            <a:ln>
+              <a:noFill/>
+            </a:ln>
           </p:spPr>
           <p:txBody>
-            <a:bodyPr wrap="none" rtlCol="0">
+            <a:bodyPr spcFirstLastPara="1" wrap="square" lIns="91425" tIns="45700" rIns="91425" bIns="45700" anchor="t" anchorCtr="0">
               <a:spAutoFit/>
             </a:bodyPr>
             <a:lstStyle/>
             <a:p>
+              <a:pPr marL="0" marR="0" lvl="0" indent="0" algn="ctr" rtl="0">
+                <a:lnSpc>
+                  <a:spcPct val="100000"/>
+                </a:lnSpc>
+                <a:spcBef>
+                  <a:spcPts val="0"/>
+                </a:spcBef>
+                <a:spcAft>
+                  <a:spcPts val="0"/>
+                </a:spcAft>
+                <a:buClr>
+                  <a:srgbClr val="000000"/>
+                </a:buClr>
+                <a:buSzPts val="1400"/>
+                <a:buFont typeface="Arial"/>
+                <a:buNone/>
+              </a:pPr>
               <a:r>
-                <a:rPr lang="en-US" sz="1200" b="1" dirty="0">
+                <a:rPr lang="en-CA" sz="1400" b="1" i="0" u="none" strike="noStrike" cap="none" dirty="0">
                   <a:solidFill>
-                    <a:schemeClr val="accent2"/>
+                    <a:schemeClr val="lt1"/>
                   </a:solidFill>
-                  <a:latin typeface="Space Grotesk" pitchFamily="2" charset="0"/>
-                  <a:cs typeface="Space Grotesk" pitchFamily="2" charset="0"/>
+                  <a:latin typeface="Space Grotesk"/>
+                  <a:ea typeface="Space Grotesk"/>
+                  <a:cs typeface="Space Grotesk"/>
+                  <a:sym typeface="Space Grotesk"/>
                 </a:rPr>
-                <a:t>POST</a:t>
+                <a:t>Loyalty</a:t>
               </a:r>
-              <a:r>
-                <a:rPr lang="en-US" sz="1200" b="1" dirty="0">
-                  <a:latin typeface="Space Grotesk" pitchFamily="2" charset="0"/>
-                  <a:cs typeface="Space Grotesk" pitchFamily="2" charset="0"/>
-                </a:rPr>
-                <a:t> </a:t>
-              </a:r>
-              <a:r>
-                <a:rPr lang="en-US" sz="1200" dirty="0">
-                  <a:latin typeface="Space Grotesk" pitchFamily="2" charset="0"/>
-                  <a:cs typeface="Space Grotesk" pitchFamily="2" charset="0"/>
-                </a:rPr>
-                <a:t>/v1.0/</a:t>
-              </a:r>
-              <a:r>
-                <a:rPr lang="en-US" sz="1200" b="1" dirty="0">
-                  <a:solidFill>
-                    <a:schemeClr val="accent6"/>
-                  </a:solidFill>
-                  <a:latin typeface="Space Grotesk" pitchFamily="2" charset="0"/>
-                  <a:cs typeface="Space Grotesk" pitchFamily="2" charset="0"/>
-                </a:rPr>
-                <a:t>state</a:t>
-              </a:r>
-              <a:r>
-                <a:rPr lang="en-US" sz="1200" dirty="0">
-                  <a:latin typeface="Space Grotesk" pitchFamily="2" charset="0"/>
-                  <a:cs typeface="Space Grotesk" pitchFamily="2" charset="0"/>
-                </a:rPr>
-                <a:t>/</a:t>
-              </a:r>
-              <a:endParaRPr lang="en-NL" sz="1200" dirty="0">
-                <a:latin typeface="Space Grotesk" pitchFamily="2" charset="0"/>
-                <a:cs typeface="Space Grotesk" pitchFamily="2" charset="0"/>
+              <a:endParaRPr sz="1400" b="1" i="0" u="none" strike="noStrike" cap="none" dirty="0">
+                <a:solidFill>
+                  <a:schemeClr val="lt1"/>
+                </a:solidFill>
+                <a:latin typeface="Space Grotesk"/>
+                <a:ea typeface="Space Grotesk"/>
+                <a:cs typeface="Space Grotesk"/>
+                <a:sym typeface="Space Grotesk"/>
               </a:endParaRPr>
             </a:p>
           </p:txBody>
         </p:sp>
-        <p:cxnSp>
-          <p:nvCxnSpPr>
-            <p:cNvPr id="65" name="Google Shape;442;p42">
-              <a:extLst>
-                <a:ext uri="{FF2B5EF4-FFF2-40B4-BE49-F238E27FC236}">
-                  <a16:creationId xmlns:a16="http://schemas.microsoft.com/office/drawing/2014/main" id="{C5008058-B280-E087-908A-DDB587EA21E9}"/>
-                </a:ext>
-              </a:extLst>
-            </p:cNvPr>
-            <p:cNvCxnSpPr>
-              <a:cxnSpLocks/>
-              <a:endCxn id="58" idx="2"/>
-            </p:cNvCxnSpPr>
-            <p:nvPr/>
-          </p:nvCxnSpPr>
-          <p:spPr>
-            <a:xfrm flipV="1">
-              <a:off x="3347545" y="3791564"/>
-              <a:ext cx="0" cy="726619"/>
-            </a:xfrm>
-            <a:prstGeom prst="straightConnector1">
-              <a:avLst/>
-            </a:prstGeom>
-            <a:noFill/>
-            <a:ln w="25400" cap="flat" cmpd="sng">
-              <a:solidFill>
-                <a:schemeClr val="dk1"/>
-              </a:solidFill>
-              <a:prstDash val="solid"/>
-              <a:miter lim="800000"/>
-              <a:headEnd type="none" w="sm" len="sm"/>
-              <a:tailEnd type="triangle" w="lg" len="lg"/>
-            </a:ln>
-          </p:spPr>
-        </p:cxnSp>
       </p:grpSp>
-      <p:pic>
-        <p:nvPicPr>
-          <p:cNvPr id="69" name="Google Shape;450;p42">
-            <a:extLst>
-              <a:ext uri="{FF2B5EF4-FFF2-40B4-BE49-F238E27FC236}">
-                <a16:creationId xmlns:a16="http://schemas.microsoft.com/office/drawing/2014/main" id="{A885673C-99E3-78D2-5CC9-9B54BEF77A2A}"/>
-              </a:ext>
-            </a:extLst>
-          </p:cNvPr>
-          <p:cNvPicPr preferRelativeResize="0"/>
-          <p:nvPr/>
-        </p:nvPicPr>
-        <p:blipFill rotWithShape="1">
-          <a:blip r:embed="rId10">
-            <a:alphaModFix/>
-          </a:blip>
-          <a:srcRect/>
-          <a:stretch/>
-        </p:blipFill>
-        <p:spPr>
-          <a:xfrm>
-            <a:off x="4005316" y="4964877"/>
-            <a:ext cx="540000" cy="540000"/>
-          </a:xfrm>
-          <a:prstGeom prst="rect">
-            <a:avLst/>
-          </a:prstGeom>
-          <a:noFill/>
-          <a:ln>
-            <a:noFill/>
-          </a:ln>
-        </p:spPr>
-      </p:pic>
-      <p:sp>
-        <p:nvSpPr>
-          <p:cNvPr id="70" name="TextBox 69">
-            <a:extLst>
-              <a:ext uri="{FF2B5EF4-FFF2-40B4-BE49-F238E27FC236}">
-                <a16:creationId xmlns:a16="http://schemas.microsoft.com/office/drawing/2014/main" id="{4A749EBA-73C6-616C-705B-F688ADE854CC}"/>
-              </a:ext>
-            </a:extLst>
-          </p:cNvPr>
-          <p:cNvSpPr txBox="1"/>
-          <p:nvPr/>
-        </p:nvSpPr>
-        <p:spPr>
-          <a:xfrm>
-            <a:off x="3581059" y="5460564"/>
-            <a:ext cx="1463862" cy="276999"/>
-          </a:xfrm>
-          <a:prstGeom prst="rect">
-            <a:avLst/>
-          </a:prstGeom>
-          <a:noFill/>
-        </p:spPr>
-        <p:txBody>
-          <a:bodyPr wrap="none" rtlCol="0">
-            <a:spAutoFit/>
-          </a:bodyPr>
-          <a:lstStyle/>
-          <a:p>
-            <a:r>
-              <a:rPr lang="en-US" sz="1200" b="1" dirty="0">
-                <a:solidFill>
-                  <a:schemeClr val="accent2"/>
-                </a:solidFill>
-                <a:latin typeface="Space Grotesk" pitchFamily="2" charset="0"/>
-                <a:cs typeface="Space Grotesk" pitchFamily="2" charset="0"/>
-              </a:rPr>
-              <a:t>POST</a:t>
-            </a:r>
-            <a:r>
-              <a:rPr lang="en-US" sz="1200" b="1" dirty="0">
-                <a:latin typeface="Space Grotesk" pitchFamily="2" charset="0"/>
-                <a:cs typeface="Space Grotesk" pitchFamily="2" charset="0"/>
-              </a:rPr>
-              <a:t> </a:t>
-            </a:r>
-            <a:r>
-              <a:rPr lang="en-US" sz="1200" dirty="0">
-                <a:latin typeface="Space Grotesk" pitchFamily="2" charset="0"/>
-                <a:cs typeface="Space Grotesk" pitchFamily="2" charset="0"/>
-              </a:rPr>
-              <a:t>/v1.0/</a:t>
-            </a:r>
-            <a:r>
-              <a:rPr lang="en-US" sz="1200" b="1" dirty="0">
-                <a:solidFill>
-                  <a:schemeClr val="accent6"/>
-                </a:solidFill>
-                <a:latin typeface="Space Grotesk" pitchFamily="2" charset="0"/>
-                <a:cs typeface="Space Grotesk" pitchFamily="2" charset="0"/>
-              </a:rPr>
-              <a:t>state</a:t>
-            </a:r>
-            <a:r>
-              <a:rPr lang="en-US" sz="1200" dirty="0">
-                <a:latin typeface="Space Grotesk" pitchFamily="2" charset="0"/>
-                <a:cs typeface="Space Grotesk" pitchFamily="2" charset="0"/>
-              </a:rPr>
-              <a:t>/</a:t>
-            </a:r>
-            <a:endParaRPr lang="en-NL" sz="1200" dirty="0">
-              <a:latin typeface="Space Grotesk" pitchFamily="2" charset="0"/>
-              <a:cs typeface="Space Grotesk" pitchFamily="2" charset="0"/>
-            </a:endParaRPr>
-          </a:p>
-        </p:txBody>
-      </p:sp>
-      <p:cxnSp>
-        <p:nvCxnSpPr>
-          <p:cNvPr id="71" name="Google Shape;442;p42">
-            <a:extLst>
-              <a:ext uri="{FF2B5EF4-FFF2-40B4-BE49-F238E27FC236}">
-                <a16:creationId xmlns:a16="http://schemas.microsoft.com/office/drawing/2014/main" id="{7A95C45C-E814-7A18-21E9-A0674ED504C3}"/>
-              </a:ext>
-            </a:extLst>
-          </p:cNvPr>
-          <p:cNvCxnSpPr>
-            <a:cxnSpLocks/>
-          </p:cNvCxnSpPr>
-          <p:nvPr/>
-        </p:nvCxnSpPr>
-        <p:spPr>
-          <a:xfrm flipV="1">
-            <a:off x="5127529" y="4875753"/>
-            <a:ext cx="0" cy="726619"/>
-          </a:xfrm>
-          <a:prstGeom prst="straightConnector1">
-            <a:avLst/>
-          </a:prstGeom>
-          <a:noFill/>
-          <a:ln w="25400" cap="flat" cmpd="sng">
-            <a:solidFill>
-              <a:schemeClr val="dk1"/>
-            </a:solidFill>
-            <a:prstDash val="solid"/>
-            <a:miter lim="800000"/>
-            <a:headEnd type="none" w="sm" len="sm"/>
-            <a:tailEnd type="triangle" w="lg" len="lg"/>
-          </a:ln>
-        </p:spPr>
-      </p:cxnSp>
       <p:cxnSp>
         <p:nvCxnSpPr>
           <p:cNvPr id="72" name="Google Shape;442;p42">
@@ -14602,7 +13991,7 @@
         </p:nvCxnSpPr>
         <p:spPr>
           <a:xfrm>
-            <a:off x="9089650" y="6463160"/>
+            <a:off x="9462390" y="7078877"/>
             <a:ext cx="1215885" cy="0"/>
           </a:xfrm>
           <a:prstGeom prst="straightConnector1">
@@ -14634,7 +14023,7 @@
         </p:nvSpPr>
         <p:spPr>
           <a:xfrm>
-            <a:off x="8977038" y="5983802"/>
+            <a:off x="9349778" y="6599519"/>
             <a:ext cx="1627369" cy="276999"/>
           </a:xfrm>
           <a:prstGeom prst="rect">
@@ -14711,7 +14100,7 @@
           <p:nvPr/>
         </p:nvPicPr>
         <p:blipFill rotWithShape="1">
-          <a:blip r:embed="rId11">
+          <a:blip r:embed="rId10">
             <a:alphaModFix/>
           </a:blip>
           <a:srcRect/>
@@ -14719,7 +14108,7 @@
         </p:blipFill>
         <p:spPr>
           <a:xfrm>
-            <a:off x="9427592" y="5451238"/>
+            <a:off x="9800332" y="6066955"/>
             <a:ext cx="540000" cy="540000"/>
           </a:xfrm>
           <a:prstGeom prst="rect">
@@ -14747,7 +14136,7 @@
         </p:nvCxnSpPr>
         <p:spPr>
           <a:xfrm flipH="1">
-            <a:off x="8230101" y="4335861"/>
+            <a:off x="8602841" y="4951578"/>
             <a:ext cx="1372" cy="1255441"/>
           </a:xfrm>
           <a:prstGeom prst="straightConnector1">
@@ -14765,148 +14154,316 @@
           </a:ln>
         </p:spPr>
       </p:cxnSp>
-      <p:sp>
-        <p:nvSpPr>
-          <p:cNvPr id="82" name="TextBox 81">
+      <p:grpSp>
+        <p:nvGrpSpPr>
+          <p:cNvPr id="115" name="Group 114">
             <a:extLst>
               <a:ext uri="{FF2B5EF4-FFF2-40B4-BE49-F238E27FC236}">
-                <a16:creationId xmlns:a16="http://schemas.microsoft.com/office/drawing/2014/main" id="{BA56FB17-BAC0-BAA5-7F65-4384D2F51030}"/>
+                <a16:creationId xmlns:a16="http://schemas.microsoft.com/office/drawing/2014/main" id="{0B812664-0DC9-E615-2E53-1B422CBA2C98}"/>
               </a:ext>
             </a:extLst>
           </p:cNvPr>
-          <p:cNvSpPr txBox="1"/>
+          <p:cNvGrpSpPr/>
           <p:nvPr/>
-        </p:nvSpPr>
-        <p:spPr>
+        </p:nvGrpSpPr>
+        <p:grpSpPr>
           <a:xfrm>
-            <a:off x="8291685" y="4890430"/>
-            <a:ext cx="1827744" cy="276999"/>
+            <a:off x="8673070" y="4976342"/>
+            <a:ext cx="1827744" cy="821050"/>
+            <a:chOff x="8808855" y="4989122"/>
+            <a:chExt cx="1827744" cy="821050"/>
           </a:xfrm>
-          <a:prstGeom prst="rect">
-            <a:avLst/>
-          </a:prstGeom>
-          <a:noFill/>
-        </p:spPr>
-        <p:txBody>
-          <a:bodyPr wrap="square" rtlCol="0">
-            <a:spAutoFit/>
-          </a:bodyPr>
-          <a:lstStyle/>
-          <a:p>
-            <a:r>
-              <a:rPr lang="en-US" sz="1200" b="1" dirty="0">
-                <a:solidFill>
-                  <a:schemeClr val="accent2"/>
-                </a:solidFill>
+        </p:grpSpPr>
+        <p:sp>
+          <p:nvSpPr>
+            <p:cNvPr id="82" name="TextBox 81">
+              <a:extLst>
+                <a:ext uri="{FF2B5EF4-FFF2-40B4-BE49-F238E27FC236}">
+                  <a16:creationId xmlns:a16="http://schemas.microsoft.com/office/drawing/2014/main" id="{BA56FB17-BAC0-BAA5-7F65-4384D2F51030}"/>
+                </a:ext>
+              </a:extLst>
+            </p:cNvPr>
+            <p:cNvSpPr txBox="1"/>
+            <p:nvPr/>
+          </p:nvSpPr>
+          <p:spPr>
+            <a:xfrm>
+              <a:off x="8808855" y="5533173"/>
+              <a:ext cx="1827744" cy="276999"/>
+            </a:xfrm>
+            <a:prstGeom prst="rect">
+              <a:avLst/>
+            </a:prstGeom>
+            <a:noFill/>
+          </p:spPr>
+          <p:txBody>
+            <a:bodyPr wrap="square" rtlCol="0">
+              <a:spAutoFit/>
+            </a:bodyPr>
+            <a:lstStyle/>
+            <a:p>
+              <a:r>
+                <a:rPr lang="en-US" sz="1200" b="1" dirty="0">
+                  <a:solidFill>
+                    <a:schemeClr val="accent2"/>
+                  </a:solidFill>
+                  <a:latin typeface="Space Grotesk" pitchFamily="2" charset="0"/>
+                  <a:cs typeface="Space Grotesk" pitchFamily="2" charset="0"/>
+                </a:rPr>
+                <a:t>POST</a:t>
+              </a:r>
+              <a:r>
+                <a:rPr lang="en-US" sz="1200" b="1" dirty="0">
+                  <a:latin typeface="Space Grotesk" pitchFamily="2" charset="0"/>
+                  <a:cs typeface="Space Grotesk" pitchFamily="2" charset="0"/>
+                </a:rPr>
+                <a:t> </a:t>
+              </a:r>
+              <a:r>
+                <a:rPr lang="en-US" sz="1200" dirty="0">
+                  <a:latin typeface="Space Grotesk" pitchFamily="2" charset="0"/>
+                  <a:cs typeface="Space Grotesk" pitchFamily="2" charset="0"/>
+                </a:rPr>
+                <a:t>/v1.0/</a:t>
+              </a:r>
+              <a:r>
+                <a:rPr lang="en-US" sz="1200" b="1" dirty="0">
+                  <a:solidFill>
+                    <a:schemeClr val="accent6"/>
+                  </a:solidFill>
+                  <a:latin typeface="Space Grotesk" pitchFamily="2" charset="0"/>
+                  <a:cs typeface="Space Grotesk" pitchFamily="2" charset="0"/>
+                </a:rPr>
+                <a:t>workflows</a:t>
+              </a:r>
+              <a:r>
+                <a:rPr lang="en-US" sz="1200" dirty="0">
+                  <a:latin typeface="Space Grotesk" pitchFamily="2" charset="0"/>
+                  <a:cs typeface="Space Grotesk" pitchFamily="2" charset="0"/>
+                </a:rPr>
+                <a:t>/</a:t>
+              </a:r>
+              <a:endParaRPr lang="en-NL" sz="1200" dirty="0">
                 <a:latin typeface="Space Grotesk" pitchFamily="2" charset="0"/>
                 <a:cs typeface="Space Grotesk" pitchFamily="2" charset="0"/>
-              </a:rPr>
-              <a:t>POST</a:t>
-            </a:r>
-            <a:r>
-              <a:rPr lang="en-US" sz="1200" b="1" dirty="0">
-                <a:latin typeface="Space Grotesk" pitchFamily="2" charset="0"/>
-                <a:cs typeface="Space Grotesk" pitchFamily="2" charset="0"/>
-              </a:rPr>
-              <a:t> </a:t>
-            </a:r>
-            <a:r>
-              <a:rPr lang="en-US" sz="1200" dirty="0">
-                <a:latin typeface="Space Grotesk" pitchFamily="2" charset="0"/>
-                <a:cs typeface="Space Grotesk" pitchFamily="2" charset="0"/>
-              </a:rPr>
-              <a:t>/v1.0/</a:t>
-            </a:r>
-            <a:r>
-              <a:rPr lang="en-US" sz="1200" b="1" dirty="0">
-                <a:solidFill>
-                  <a:schemeClr val="accent6"/>
-                </a:solidFill>
-                <a:latin typeface="Space Grotesk" pitchFamily="2" charset="0"/>
-                <a:cs typeface="Space Grotesk" pitchFamily="2" charset="0"/>
-              </a:rPr>
-              <a:t>workflows</a:t>
-            </a:r>
-            <a:r>
-              <a:rPr lang="en-US" sz="1200" dirty="0">
-                <a:latin typeface="Space Grotesk" pitchFamily="2" charset="0"/>
-                <a:cs typeface="Space Grotesk" pitchFamily="2" charset="0"/>
-              </a:rPr>
-              <a:t>/</a:t>
-            </a:r>
-            <a:endParaRPr lang="en-NL" sz="1200" dirty="0">
-              <a:latin typeface="Space Grotesk" pitchFamily="2" charset="0"/>
-              <a:cs typeface="Space Grotesk" pitchFamily="2" charset="0"/>
-            </a:endParaRPr>
-          </a:p>
-        </p:txBody>
-      </p:sp>
-      <p:pic>
-        <p:nvPicPr>
-          <p:cNvPr id="83" name="Google Shape;1779;p3">
+              </a:endParaRPr>
+            </a:p>
+          </p:txBody>
+        </p:sp>
+        <p:pic>
+          <p:nvPicPr>
+            <p:cNvPr id="83" name="Google Shape;1779;p3">
+              <a:extLst>
+                <a:ext uri="{FF2B5EF4-FFF2-40B4-BE49-F238E27FC236}">
+                  <a16:creationId xmlns:a16="http://schemas.microsoft.com/office/drawing/2014/main" id="{C42B597B-4E60-07D6-C0C1-CB32BB3EEAC2}"/>
+                </a:ext>
+              </a:extLst>
+            </p:cNvPr>
+            <p:cNvPicPr preferRelativeResize="0"/>
+            <p:nvPr/>
+          </p:nvPicPr>
+          <p:blipFill rotWithShape="1">
+            <a:blip r:embed="rId11">
+              <a:alphaModFix/>
+            </a:blip>
+            <a:srcRect/>
+            <a:stretch/>
+          </p:blipFill>
+          <p:spPr>
+            <a:xfrm>
+              <a:off x="9401236" y="4989122"/>
+              <a:ext cx="540000" cy="540000"/>
+            </a:xfrm>
+            <a:prstGeom prst="rect">
+              <a:avLst/>
+            </a:prstGeom>
+            <a:noFill/>
+            <a:ln>
+              <a:noFill/>
+            </a:ln>
+          </p:spPr>
+        </p:pic>
+      </p:grpSp>
+      <p:grpSp>
+        <p:nvGrpSpPr>
+          <p:cNvPr id="99" name="Group 98">
             <a:extLst>
               <a:ext uri="{FF2B5EF4-FFF2-40B4-BE49-F238E27FC236}">
-                <a16:creationId xmlns:a16="http://schemas.microsoft.com/office/drawing/2014/main" id="{C42B597B-4E60-07D6-C0C1-CB32BB3EEAC2}"/>
+                <a16:creationId xmlns:a16="http://schemas.microsoft.com/office/drawing/2014/main" id="{074A1898-39E8-B481-BB8D-9FCD4A95D9DF}"/>
               </a:ext>
             </a:extLst>
           </p:cNvPr>
-          <p:cNvPicPr preferRelativeResize="0"/>
+          <p:cNvGrpSpPr/>
           <p:nvPr/>
-        </p:nvPicPr>
-        <p:blipFill rotWithShape="1">
-          <a:blip r:embed="rId12">
-            <a:alphaModFix/>
-          </a:blip>
-          <a:srcRect/>
-          <a:stretch/>
-        </p:blipFill>
-        <p:spPr>
+        </p:nvGrpSpPr>
+        <p:grpSpPr>
           <a:xfrm>
-            <a:off x="8884066" y="4346379"/>
-            <a:ext cx="540000" cy="540000"/>
+            <a:off x="121414" y="3031595"/>
+            <a:ext cx="1467239" cy="1457444"/>
+            <a:chOff x="-347891" y="2230123"/>
+            <a:chExt cx="1467239" cy="1457444"/>
           </a:xfrm>
-          <a:prstGeom prst="rect">
-            <a:avLst/>
-          </a:prstGeom>
-          <a:noFill/>
-          <a:ln>
+        </p:grpSpPr>
+        <p:grpSp>
+          <p:nvGrpSpPr>
+            <p:cNvPr id="89" name="Google Shape;1470;p112">
+              <a:extLst>
+                <a:ext uri="{FF2B5EF4-FFF2-40B4-BE49-F238E27FC236}">
+                  <a16:creationId xmlns:a16="http://schemas.microsoft.com/office/drawing/2014/main" id="{4225ABA9-DAC7-AF21-6158-30ACAC064E8D}"/>
+                </a:ext>
+              </a:extLst>
+            </p:cNvPr>
+            <p:cNvGrpSpPr/>
+            <p:nvPr/>
+          </p:nvGrpSpPr>
+          <p:grpSpPr>
+            <a:xfrm>
+              <a:off x="-347891" y="2230123"/>
+              <a:ext cx="1467239" cy="1457444"/>
+              <a:chOff x="4285033" y="2530794"/>
+              <a:chExt cx="2433176" cy="2393305"/>
+            </a:xfrm>
+          </p:grpSpPr>
+          <p:pic>
+            <p:nvPicPr>
+              <p:cNvPr id="90" name="Google Shape;1471;p112">
+                <a:extLst>
+                  <a:ext uri="{FF2B5EF4-FFF2-40B4-BE49-F238E27FC236}">
+                    <a16:creationId xmlns:a16="http://schemas.microsoft.com/office/drawing/2014/main" id="{70203C35-2957-FE92-D4D3-2374AFD3CB12}"/>
+                  </a:ext>
+                </a:extLst>
+              </p:cNvPr>
+              <p:cNvPicPr preferRelativeResize="0"/>
+              <p:nvPr/>
+            </p:nvPicPr>
+            <p:blipFill rotWithShape="1">
+              <a:blip r:embed="rId12">
+                <a:alphaModFix/>
+              </a:blip>
+              <a:srcRect/>
+              <a:stretch/>
+            </p:blipFill>
+            <p:spPr>
+              <a:xfrm>
+                <a:off x="4781622" y="2530794"/>
+                <a:ext cx="1440000" cy="1440000"/>
+              </a:xfrm>
+              <a:prstGeom prst="rect">
+                <a:avLst/>
+              </a:prstGeom>
+              <a:noFill/>
+              <a:ln>
+                <a:noFill/>
+              </a:ln>
+            </p:spPr>
+          </p:pic>
+          <p:sp>
+            <p:nvSpPr>
+              <p:cNvPr id="91" name="Google Shape;1472;p112">
+                <a:extLst>
+                  <a:ext uri="{FF2B5EF4-FFF2-40B4-BE49-F238E27FC236}">
+                    <a16:creationId xmlns:a16="http://schemas.microsoft.com/office/drawing/2014/main" id="{4C8486C5-C129-911B-2F05-FCCAD6B84FA6}"/>
+                  </a:ext>
+                </a:extLst>
+              </p:cNvPr>
+              <p:cNvSpPr txBox="1"/>
+              <p:nvPr/>
+            </p:nvSpPr>
+            <p:spPr>
+              <a:xfrm>
+                <a:off x="4285033" y="4064972"/>
+                <a:ext cx="2433176" cy="859127"/>
+              </a:xfrm>
+              <a:prstGeom prst="rect">
+                <a:avLst/>
+              </a:prstGeom>
+              <a:noFill/>
+              <a:ln>
+                <a:noFill/>
+              </a:ln>
+            </p:spPr>
+            <p:txBody>
+              <a:bodyPr spcFirstLastPara="1" wrap="square" lIns="91425" tIns="45700" rIns="91425" bIns="45700" anchor="t" anchorCtr="0">
+                <a:spAutoFit/>
+              </a:bodyPr>
+              <a:lstStyle/>
+              <a:p>
+                <a:pPr marL="0" marR="0" lvl="0" indent="0" algn="ctr" rtl="0">
+                  <a:lnSpc>
+                    <a:spcPct val="100000"/>
+                  </a:lnSpc>
+                  <a:spcBef>
+                    <a:spcPts val="0"/>
+                  </a:spcBef>
+                  <a:spcAft>
+                    <a:spcPts val="0"/>
+                  </a:spcAft>
+                  <a:buClr>
+                    <a:srgbClr val="000000"/>
+                  </a:buClr>
+                  <a:buSzPts val="1400"/>
+                  <a:buFont typeface="Arial"/>
+                  <a:buNone/>
+                </a:pPr>
+                <a:r>
+                  <a:rPr lang="en-US" sz="1400" b="1" i="0" u="none" strike="noStrike" cap="none" dirty="0">
+                    <a:solidFill>
+                      <a:schemeClr val="dk1"/>
+                    </a:solidFill>
+                    <a:latin typeface="Space Grotesk"/>
+                    <a:ea typeface="Space Grotesk"/>
+                    <a:cs typeface="Space Grotesk"/>
+                    <a:sym typeface="Space Grotesk"/>
+                  </a:rPr>
+                  <a:t>Cron input binding</a:t>
+                </a:r>
+                <a:endParaRPr sz="1400" b="1" i="0" u="none" strike="noStrike" cap="none" dirty="0">
+                  <a:solidFill>
+                    <a:schemeClr val="dk1"/>
+                  </a:solidFill>
+                  <a:latin typeface="Space Grotesk"/>
+                  <a:ea typeface="Space Grotesk"/>
+                  <a:cs typeface="Space Grotesk"/>
+                  <a:sym typeface="Space Grotesk"/>
+                </a:endParaRPr>
+              </a:p>
+            </p:txBody>
+          </p:sp>
+        </p:grpSp>
+        <p:pic>
+          <p:nvPicPr>
+            <p:cNvPr id="86" name="Google Shape;1783;p3">
+              <a:extLst>
+                <a:ext uri="{FF2B5EF4-FFF2-40B4-BE49-F238E27FC236}">
+                  <a16:creationId xmlns:a16="http://schemas.microsoft.com/office/drawing/2014/main" id="{79D8A353-9B40-CE77-2759-50267CAFD81C}"/>
+                </a:ext>
+              </a:extLst>
+            </p:cNvPr>
+            <p:cNvPicPr preferRelativeResize="0"/>
+            <p:nvPr/>
+          </p:nvPicPr>
+          <p:blipFill rotWithShape="1">
+            <a:blip r:embed="rId10">
+              <a:alphaModFix/>
+            </a:blip>
+            <a:srcRect/>
+            <a:stretch/>
+          </p:blipFill>
+          <p:spPr>
+            <a:xfrm>
+              <a:off x="79549" y="2428543"/>
+              <a:ext cx="540000" cy="540000"/>
+            </a:xfrm>
+            <a:prstGeom prst="rect">
+              <a:avLst/>
+            </a:prstGeom>
             <a:noFill/>
-          </a:ln>
-        </p:spPr>
-      </p:pic>
-      <p:pic>
-        <p:nvPicPr>
-          <p:cNvPr id="86" name="Google Shape;1783;p3">
-            <a:extLst>
-              <a:ext uri="{FF2B5EF4-FFF2-40B4-BE49-F238E27FC236}">
-                <a16:creationId xmlns:a16="http://schemas.microsoft.com/office/drawing/2014/main" id="{79D8A353-9B40-CE77-2759-50267CAFD81C}"/>
-              </a:ext>
-            </a:extLst>
-          </p:cNvPr>
-          <p:cNvPicPr preferRelativeResize="0"/>
-          <p:nvPr/>
-        </p:nvPicPr>
-        <p:blipFill rotWithShape="1">
-          <a:blip r:embed="rId11">
-            <a:alphaModFix/>
-          </a:blip>
-          <a:srcRect/>
-          <a:stretch/>
-        </p:blipFill>
-        <p:spPr>
-          <a:xfrm>
-            <a:off x="10774928" y="712406"/>
-            <a:ext cx="540000" cy="540000"/>
-          </a:xfrm>
-          <a:prstGeom prst="rect">
-            <a:avLst/>
-          </a:prstGeom>
-          <a:noFill/>
-          <a:ln>
-            <a:noFill/>
-          </a:ln>
-        </p:spPr>
-      </p:pic>
+            <a:ln>
+              <a:noFill/>
+            </a:ln>
+          </p:spPr>
+        </p:pic>
+      </p:grpSp>
       <p:cxnSp>
         <p:nvCxnSpPr>
           <p:cNvPr id="92" name="Google Shape;442;p42">
@@ -14923,8 +14480,8 @@
         </p:nvCxnSpPr>
         <p:spPr>
           <a:xfrm>
-            <a:off x="11085931" y="1971430"/>
-            <a:ext cx="0" cy="947913"/>
+            <a:off x="1448571" y="3503319"/>
+            <a:ext cx="1353366" cy="0"/>
           </a:xfrm>
           <a:prstGeom prst="straightConnector1">
             <a:avLst/>
@@ -14943,10 +14500,10 @@
       </p:cxnSp>
       <p:pic>
         <p:nvPicPr>
-          <p:cNvPr id="93" name="Google Shape;450;p42">
+          <p:cNvPr id="96" name="Google Shape;777;p58">
             <a:extLst>
               <a:ext uri="{FF2B5EF4-FFF2-40B4-BE49-F238E27FC236}">
-                <a16:creationId xmlns:a16="http://schemas.microsoft.com/office/drawing/2014/main" id="{435B39FB-C8BD-28D6-BE72-C0B6D6517B2A}"/>
+                <a16:creationId xmlns:a16="http://schemas.microsoft.com/office/drawing/2014/main" id="{C0984A1C-4A98-55F5-799E-CD70CD728DFC}"/>
               </a:ext>
             </a:extLst>
           </p:cNvPr>
@@ -14954,7 +14511,7 @@
           <p:nvPr/>
         </p:nvPicPr>
         <p:blipFill rotWithShape="1">
-          <a:blip r:embed="rId10">
+          <a:blip r:embed="rId9">
             <a:alphaModFix/>
           </a:blip>
           <a:srcRect/>
@@ -14962,7 +14519,179 @@
         </p:blipFill>
         <p:spPr>
           <a:xfrm>
-            <a:off x="11716741" y="4726490"/>
+            <a:off x="1984699" y="8733205"/>
+            <a:ext cx="746881" cy="941390"/>
+          </a:xfrm>
+          <a:prstGeom prst="rect">
+            <a:avLst/>
+          </a:prstGeom>
+          <a:noFill/>
+          <a:ln>
+            <a:noFill/>
+          </a:ln>
+        </p:spPr>
+      </p:pic>
+      <p:cxnSp>
+        <p:nvCxnSpPr>
+          <p:cNvPr id="97" name="Google Shape;442;p42">
+            <a:extLst>
+              <a:ext uri="{FF2B5EF4-FFF2-40B4-BE49-F238E27FC236}">
+                <a16:creationId xmlns:a16="http://schemas.microsoft.com/office/drawing/2014/main" id="{CB9A69EF-9A80-1CBD-F8C5-9D528002AB29}"/>
+              </a:ext>
+            </a:extLst>
+          </p:cNvPr>
+          <p:cNvCxnSpPr>
+            <a:cxnSpLocks/>
+          </p:cNvCxnSpPr>
+          <p:nvPr/>
+        </p:nvCxnSpPr>
+        <p:spPr>
+          <a:xfrm rot="10800000" flipV="1">
+            <a:off x="2359157" y="7847102"/>
+            <a:ext cx="0" cy="726619"/>
+          </a:xfrm>
+          <a:prstGeom prst="straightConnector1">
+            <a:avLst/>
+          </a:prstGeom>
+          <a:noFill/>
+          <a:ln w="25400" cap="flat" cmpd="sng">
+            <a:solidFill>
+              <a:schemeClr val="dk1"/>
+            </a:solidFill>
+            <a:prstDash val="solid"/>
+            <a:miter lim="800000"/>
+            <a:headEnd type="none" w="sm" len="sm"/>
+            <a:tailEnd type="triangle" w="lg" len="lg"/>
+          </a:ln>
+        </p:spPr>
+      </p:cxnSp>
+      <p:cxnSp>
+        <p:nvCxnSpPr>
+          <p:cNvPr id="108" name="Elbow Connector 107">
+            <a:extLst>
+              <a:ext uri="{FF2B5EF4-FFF2-40B4-BE49-F238E27FC236}">
+                <a16:creationId xmlns:a16="http://schemas.microsoft.com/office/drawing/2014/main" id="{1BF90DD7-5D35-7A5F-D253-3AF0C064458A}"/>
+              </a:ext>
+            </a:extLst>
+          </p:cNvPr>
+          <p:cNvCxnSpPr>
+            <a:cxnSpLocks/>
+          </p:cNvCxnSpPr>
+          <p:nvPr/>
+        </p:nvCxnSpPr>
+        <p:spPr>
+          <a:xfrm>
+            <a:off x="5659587" y="1101954"/>
+            <a:ext cx="984999" cy="748013"/>
+          </a:xfrm>
+          <a:prstGeom prst="bentConnector3">
+            <a:avLst>
+              <a:gd name="adj1" fmla="val 100636"/>
+            </a:avLst>
+          </a:prstGeom>
+          <a:noFill/>
+          <a:ln w="25400" cap="flat" cmpd="sng">
+            <a:solidFill>
+              <a:schemeClr val="dk1"/>
+            </a:solidFill>
+            <a:prstDash val="solid"/>
+            <a:miter lim="800000"/>
+            <a:headEnd type="none" w="sm" len="sm"/>
+            <a:tailEnd type="triangle" w="lg" len="lg"/>
+          </a:ln>
+        </p:spPr>
+      </p:cxnSp>
+      <p:cxnSp>
+        <p:nvCxnSpPr>
+          <p:cNvPr id="112" name="Elbow Connector 111">
+            <a:extLst>
+              <a:ext uri="{FF2B5EF4-FFF2-40B4-BE49-F238E27FC236}">
+                <a16:creationId xmlns:a16="http://schemas.microsoft.com/office/drawing/2014/main" id="{27718948-6915-8461-275C-408182C832CC}"/>
+              </a:ext>
+            </a:extLst>
+          </p:cNvPr>
+          <p:cNvCxnSpPr>
+            <a:cxnSpLocks/>
+          </p:cNvCxnSpPr>
+          <p:nvPr/>
+        </p:nvCxnSpPr>
+        <p:spPr>
+          <a:xfrm>
+            <a:off x="7589727" y="2351703"/>
+            <a:ext cx="984999" cy="748013"/>
+          </a:xfrm>
+          <a:prstGeom prst="bentConnector3">
+            <a:avLst>
+              <a:gd name="adj1" fmla="val 100636"/>
+            </a:avLst>
+          </a:prstGeom>
+          <a:noFill/>
+          <a:ln w="25400" cap="flat" cmpd="sng">
+            <a:solidFill>
+              <a:schemeClr val="dk1"/>
+            </a:solidFill>
+            <a:prstDash val="solid"/>
+            <a:miter lim="800000"/>
+            <a:headEnd type="none" w="sm" len="sm"/>
+            <a:tailEnd type="triangle" w="lg" len="lg"/>
+          </a:ln>
+        </p:spPr>
+      </p:cxnSp>
+      <p:pic>
+        <p:nvPicPr>
+          <p:cNvPr id="113" name="Google Shape;1777;p3">
+            <a:extLst>
+              <a:ext uri="{FF2B5EF4-FFF2-40B4-BE49-F238E27FC236}">
+                <a16:creationId xmlns:a16="http://schemas.microsoft.com/office/drawing/2014/main" id="{EC803FE4-CC5F-A1D3-35D0-0A6B02C75BAD}"/>
+              </a:ext>
+            </a:extLst>
+          </p:cNvPr>
+          <p:cNvPicPr preferRelativeResize="0"/>
+          <p:nvPr/>
+        </p:nvPicPr>
+        <p:blipFill rotWithShape="1">
+          <a:blip r:embed="rId13">
+            <a:alphaModFix/>
+          </a:blip>
+          <a:srcRect/>
+          <a:stretch/>
+        </p:blipFill>
+        <p:spPr>
+          <a:xfrm>
+            <a:off x="2904552" y="238510"/>
+            <a:ext cx="518284" cy="525525"/>
+          </a:xfrm>
+          <a:prstGeom prst="rect">
+            <a:avLst/>
+          </a:prstGeom>
+          <a:noFill/>
+          <a:ln>
+            <a:noFill/>
+          </a:ln>
+        </p:spPr>
+      </p:pic>
+      <p:pic>
+        <p:nvPicPr>
+          <p:cNvPr id="114" name="Google Shape;448;p42">
+            <a:extLst>
+              <a:ext uri="{FF2B5EF4-FFF2-40B4-BE49-F238E27FC236}">
+                <a16:creationId xmlns:a16="http://schemas.microsoft.com/office/drawing/2014/main" id="{28EA4DE1-915E-7E2B-FE04-3B435C6895E1}"/>
+              </a:ext>
+            </a:extLst>
+          </p:cNvPr>
+          <p:cNvPicPr preferRelativeResize="0"/>
+          <p:nvPr/>
+        </p:nvPicPr>
+        <p:blipFill rotWithShape="1">
+          <a:blip r:embed="rId3">
+            <a:alphaModFix/>
+          </a:blip>
+          <a:srcRect/>
+          <a:stretch/>
+        </p:blipFill>
+        <p:spPr>
+          <a:xfrm>
+            <a:off x="9041600" y="1937373"/>
             <a:ext cx="540000" cy="540000"/>
           </a:xfrm>
           <a:prstGeom prst="rect">
@@ -14974,12 +14703,541 @@
           </a:ln>
         </p:spPr>
       </p:pic>
+      <p:grpSp>
+        <p:nvGrpSpPr>
+          <p:cNvPr id="121" name="Group 120">
+            <a:extLst>
+              <a:ext uri="{FF2B5EF4-FFF2-40B4-BE49-F238E27FC236}">
+                <a16:creationId xmlns:a16="http://schemas.microsoft.com/office/drawing/2014/main" id="{18368129-0DD4-1DD2-0CE5-E4899109CC03}"/>
+              </a:ext>
+            </a:extLst>
+          </p:cNvPr>
+          <p:cNvGrpSpPr/>
+          <p:nvPr/>
+        </p:nvGrpSpPr>
+        <p:grpSpPr>
+          <a:xfrm>
+            <a:off x="5718084" y="4708166"/>
+            <a:ext cx="1609736" cy="836008"/>
+            <a:chOff x="5099285" y="3971467"/>
+            <a:chExt cx="1609736" cy="836008"/>
+          </a:xfrm>
+        </p:grpSpPr>
+        <p:pic>
+          <p:nvPicPr>
+            <p:cNvPr id="116" name="Google Shape;448;p42">
+              <a:extLst>
+                <a:ext uri="{FF2B5EF4-FFF2-40B4-BE49-F238E27FC236}">
+                  <a16:creationId xmlns:a16="http://schemas.microsoft.com/office/drawing/2014/main" id="{07BDAE06-BE72-4589-1279-7BA299A06999}"/>
+                </a:ext>
+              </a:extLst>
+            </p:cNvPr>
+            <p:cNvPicPr preferRelativeResize="0"/>
+            <p:nvPr/>
+          </p:nvPicPr>
+          <p:blipFill rotWithShape="1">
+            <a:blip r:embed="rId3">
+              <a:alphaModFix/>
+            </a:blip>
+            <a:srcRect/>
+            <a:stretch/>
+          </p:blipFill>
+          <p:spPr>
+            <a:xfrm>
+              <a:off x="5580951" y="3971467"/>
+              <a:ext cx="540000" cy="540000"/>
+            </a:xfrm>
+            <a:prstGeom prst="rect">
+              <a:avLst/>
+            </a:prstGeom>
+            <a:noFill/>
+            <a:ln>
+              <a:noFill/>
+            </a:ln>
+          </p:spPr>
+        </p:pic>
+        <p:sp>
+          <p:nvSpPr>
+            <p:cNvPr id="117" name="TextBox 116">
+              <a:extLst>
+                <a:ext uri="{FF2B5EF4-FFF2-40B4-BE49-F238E27FC236}">
+                  <a16:creationId xmlns:a16="http://schemas.microsoft.com/office/drawing/2014/main" id="{99C2B302-0CFD-150E-0327-D6925B058488}"/>
+                </a:ext>
+              </a:extLst>
+            </p:cNvPr>
+            <p:cNvSpPr txBox="1"/>
+            <p:nvPr/>
+          </p:nvSpPr>
+          <p:spPr>
+            <a:xfrm>
+              <a:off x="5099285" y="4530476"/>
+              <a:ext cx="1609736" cy="276999"/>
+            </a:xfrm>
+            <a:prstGeom prst="rect">
+              <a:avLst/>
+            </a:prstGeom>
+            <a:noFill/>
+          </p:spPr>
+          <p:txBody>
+            <a:bodyPr wrap="none" rtlCol="0">
+              <a:spAutoFit/>
+            </a:bodyPr>
+            <a:lstStyle/>
+            <a:p>
+              <a:r>
+                <a:rPr lang="en-US" sz="1200" b="1" dirty="0">
+                  <a:solidFill>
+                    <a:schemeClr val="accent2"/>
+                  </a:solidFill>
+                  <a:latin typeface="Space Grotesk" pitchFamily="2" charset="0"/>
+                  <a:cs typeface="Space Grotesk" pitchFamily="2" charset="0"/>
+                </a:rPr>
+                <a:t>POST</a:t>
+              </a:r>
+              <a:r>
+                <a:rPr lang="en-US" sz="1200" b="1" dirty="0">
+                  <a:latin typeface="Space Grotesk" pitchFamily="2" charset="0"/>
+                  <a:cs typeface="Space Grotesk" pitchFamily="2" charset="0"/>
+                </a:rPr>
+                <a:t> </a:t>
+              </a:r>
+              <a:r>
+                <a:rPr lang="en-US" sz="1200" dirty="0">
+                  <a:latin typeface="Space Grotesk" pitchFamily="2" charset="0"/>
+                  <a:cs typeface="Space Grotesk" pitchFamily="2" charset="0"/>
+                </a:rPr>
+                <a:t>/v1.0/</a:t>
+              </a:r>
+              <a:r>
+                <a:rPr lang="en-US" sz="1200" b="1" dirty="0">
+                  <a:solidFill>
+                    <a:schemeClr val="accent6"/>
+                  </a:solidFill>
+                  <a:latin typeface="Space Grotesk" pitchFamily="2" charset="0"/>
+                  <a:cs typeface="Space Grotesk" pitchFamily="2" charset="0"/>
+                </a:rPr>
+                <a:t>publish</a:t>
+              </a:r>
+              <a:r>
+                <a:rPr lang="en-US" sz="1200" dirty="0">
+                  <a:latin typeface="Space Grotesk" pitchFamily="2" charset="0"/>
+                  <a:cs typeface="Space Grotesk" pitchFamily="2" charset="0"/>
+                </a:rPr>
+                <a:t>/</a:t>
+              </a:r>
+              <a:endParaRPr lang="en-NL" sz="1200" dirty="0">
+                <a:latin typeface="Space Grotesk" pitchFamily="2" charset="0"/>
+                <a:cs typeface="Space Grotesk" pitchFamily="2" charset="0"/>
+              </a:endParaRPr>
+            </a:p>
+          </p:txBody>
+        </p:sp>
+      </p:grpSp>
+      <p:cxnSp>
+        <p:nvCxnSpPr>
+          <p:cNvPr id="118" name="Elbow Connector 117">
+            <a:extLst>
+              <a:ext uri="{FF2B5EF4-FFF2-40B4-BE49-F238E27FC236}">
+                <a16:creationId xmlns:a16="http://schemas.microsoft.com/office/drawing/2014/main" id="{45B2BBF7-814E-D193-065E-0F544247870C}"/>
+              </a:ext>
+            </a:extLst>
+          </p:cNvPr>
+          <p:cNvCxnSpPr>
+            <a:cxnSpLocks/>
+          </p:cNvCxnSpPr>
+          <p:nvPr/>
+        </p:nvCxnSpPr>
+        <p:spPr>
+          <a:xfrm rot="5400000" flipH="1" flipV="1">
+            <a:off x="4347092" y="4129874"/>
+            <a:ext cx="3453746" cy="782159"/>
+          </a:xfrm>
+          <a:prstGeom prst="bentConnector3">
+            <a:avLst>
+              <a:gd name="adj1" fmla="val 50000"/>
+            </a:avLst>
+          </a:prstGeom>
+          <a:noFill/>
+          <a:ln w="25400" cap="flat" cmpd="sng">
+            <a:solidFill>
+              <a:schemeClr val="dk1"/>
+            </a:solidFill>
+            <a:prstDash val="solid"/>
+            <a:miter lim="800000"/>
+            <a:headEnd type="none" w="sm" len="sm"/>
+            <a:tailEnd type="triangle" w="lg" len="lg"/>
+          </a:ln>
+        </p:spPr>
+      </p:cxnSp>
+      <p:grpSp>
+        <p:nvGrpSpPr>
+          <p:cNvPr id="131" name="Group 130">
+            <a:extLst>
+              <a:ext uri="{FF2B5EF4-FFF2-40B4-BE49-F238E27FC236}">
+                <a16:creationId xmlns:a16="http://schemas.microsoft.com/office/drawing/2014/main" id="{B68EC2DC-5A18-207D-9527-2800F83DA829}"/>
+              </a:ext>
+            </a:extLst>
+          </p:cNvPr>
+          <p:cNvGrpSpPr/>
+          <p:nvPr/>
+        </p:nvGrpSpPr>
+        <p:grpSpPr>
+          <a:xfrm>
+            <a:off x="2473918" y="7765815"/>
+            <a:ext cx="1463862" cy="864366"/>
+            <a:chOff x="5647227" y="7809722"/>
+            <a:chExt cx="1463862" cy="864366"/>
+          </a:xfrm>
+        </p:grpSpPr>
+        <p:pic>
+          <p:nvPicPr>
+            <p:cNvPr id="132" name="Google Shape;450;p42">
+              <a:extLst>
+                <a:ext uri="{FF2B5EF4-FFF2-40B4-BE49-F238E27FC236}">
+                  <a16:creationId xmlns:a16="http://schemas.microsoft.com/office/drawing/2014/main" id="{2E22A764-E51A-5F62-3854-AA1F118D95E3}"/>
+                </a:ext>
+              </a:extLst>
+            </p:cNvPr>
+            <p:cNvPicPr preferRelativeResize="0"/>
+            <p:nvPr/>
+          </p:nvPicPr>
+          <p:blipFill rotWithShape="1">
+            <a:blip r:embed="rId14">
+              <a:alphaModFix/>
+            </a:blip>
+            <a:srcRect/>
+            <a:stretch/>
+          </p:blipFill>
+          <p:spPr>
+            <a:xfrm>
+              <a:off x="6046768" y="7809722"/>
+              <a:ext cx="540000" cy="540000"/>
+            </a:xfrm>
+            <a:prstGeom prst="rect">
+              <a:avLst/>
+            </a:prstGeom>
+            <a:noFill/>
+            <a:ln>
+              <a:noFill/>
+            </a:ln>
+          </p:spPr>
+        </p:pic>
+        <p:sp>
+          <p:nvSpPr>
+            <p:cNvPr id="133" name="TextBox 132">
+              <a:extLst>
+                <a:ext uri="{FF2B5EF4-FFF2-40B4-BE49-F238E27FC236}">
+                  <a16:creationId xmlns:a16="http://schemas.microsoft.com/office/drawing/2014/main" id="{AC16656F-F399-4AE1-EA82-803AE22843E3}"/>
+                </a:ext>
+              </a:extLst>
+            </p:cNvPr>
+            <p:cNvSpPr txBox="1"/>
+            <p:nvPr/>
+          </p:nvSpPr>
+          <p:spPr>
+            <a:xfrm>
+              <a:off x="5647227" y="8397089"/>
+              <a:ext cx="1463862" cy="276999"/>
+            </a:xfrm>
+            <a:prstGeom prst="rect">
+              <a:avLst/>
+            </a:prstGeom>
+            <a:noFill/>
+          </p:spPr>
+          <p:txBody>
+            <a:bodyPr wrap="none" rtlCol="0">
+              <a:spAutoFit/>
+            </a:bodyPr>
+            <a:lstStyle/>
+            <a:p>
+              <a:r>
+                <a:rPr lang="en-US" sz="1200" b="1" dirty="0">
+                  <a:solidFill>
+                    <a:schemeClr val="accent2"/>
+                  </a:solidFill>
+                  <a:latin typeface="Space Grotesk" pitchFamily="2" charset="0"/>
+                  <a:cs typeface="Space Grotesk" pitchFamily="2" charset="0"/>
+                </a:rPr>
+                <a:t>POST</a:t>
+              </a:r>
+              <a:r>
+                <a:rPr lang="en-US" sz="1200" b="1" dirty="0">
+                  <a:latin typeface="Space Grotesk" pitchFamily="2" charset="0"/>
+                  <a:cs typeface="Space Grotesk" pitchFamily="2" charset="0"/>
+                </a:rPr>
+                <a:t> </a:t>
+              </a:r>
+              <a:r>
+                <a:rPr lang="en-US" sz="1200" dirty="0">
+                  <a:latin typeface="Space Grotesk" pitchFamily="2" charset="0"/>
+                  <a:cs typeface="Space Grotesk" pitchFamily="2" charset="0"/>
+                </a:rPr>
+                <a:t>/v1.0/</a:t>
+              </a:r>
+              <a:r>
+                <a:rPr lang="en-US" sz="1200" b="1" dirty="0">
+                  <a:solidFill>
+                    <a:schemeClr val="accent6"/>
+                  </a:solidFill>
+                  <a:latin typeface="Space Grotesk" pitchFamily="2" charset="0"/>
+                  <a:cs typeface="Space Grotesk" pitchFamily="2" charset="0"/>
+                </a:rPr>
+                <a:t>state</a:t>
+              </a:r>
+              <a:r>
+                <a:rPr lang="en-US" sz="1200" dirty="0">
+                  <a:latin typeface="Space Grotesk" pitchFamily="2" charset="0"/>
+                  <a:cs typeface="Space Grotesk" pitchFamily="2" charset="0"/>
+                </a:rPr>
+                <a:t>/</a:t>
+              </a:r>
+              <a:endParaRPr lang="en-NL" sz="1200" dirty="0">
+                <a:latin typeface="Space Grotesk" pitchFamily="2" charset="0"/>
+                <a:cs typeface="Space Grotesk" pitchFamily="2" charset="0"/>
+              </a:endParaRPr>
+            </a:p>
+          </p:txBody>
+        </p:sp>
+      </p:grpSp>
+      <p:pic>
+        <p:nvPicPr>
+          <p:cNvPr id="134" name="Google Shape;777;p58">
+            <a:extLst>
+              <a:ext uri="{FF2B5EF4-FFF2-40B4-BE49-F238E27FC236}">
+                <a16:creationId xmlns:a16="http://schemas.microsoft.com/office/drawing/2014/main" id="{725563AB-9D77-D64D-FB3B-DCF71877F15C}"/>
+              </a:ext>
+            </a:extLst>
+          </p:cNvPr>
+          <p:cNvPicPr preferRelativeResize="0"/>
+          <p:nvPr/>
+        </p:nvPicPr>
+        <p:blipFill rotWithShape="1">
+          <a:blip r:embed="rId9">
+            <a:alphaModFix/>
+          </a:blip>
+          <a:srcRect/>
+          <a:stretch/>
+        </p:blipFill>
+        <p:spPr>
+          <a:xfrm>
+            <a:off x="5163157" y="8725405"/>
+            <a:ext cx="746881" cy="941390"/>
+          </a:xfrm>
+          <a:prstGeom prst="rect">
+            <a:avLst/>
+          </a:prstGeom>
+          <a:noFill/>
+          <a:ln>
+            <a:noFill/>
+          </a:ln>
+        </p:spPr>
+      </p:pic>
+      <p:cxnSp>
+        <p:nvCxnSpPr>
+          <p:cNvPr id="135" name="Google Shape;442;p42">
+            <a:extLst>
+              <a:ext uri="{FF2B5EF4-FFF2-40B4-BE49-F238E27FC236}">
+                <a16:creationId xmlns:a16="http://schemas.microsoft.com/office/drawing/2014/main" id="{8B70674B-30AE-DCB5-9691-C7B3B25818C5}"/>
+              </a:ext>
+            </a:extLst>
+          </p:cNvPr>
+          <p:cNvCxnSpPr>
+            <a:cxnSpLocks/>
+          </p:cNvCxnSpPr>
+          <p:nvPr/>
+        </p:nvCxnSpPr>
+        <p:spPr>
+          <a:xfrm rot="10800000" flipV="1">
+            <a:off x="5537615" y="7839302"/>
+            <a:ext cx="0" cy="726619"/>
+          </a:xfrm>
+          <a:prstGeom prst="straightConnector1">
+            <a:avLst/>
+          </a:prstGeom>
+          <a:noFill/>
+          <a:ln w="25400" cap="flat" cmpd="sng">
+            <a:solidFill>
+              <a:schemeClr val="dk1"/>
+            </a:solidFill>
+            <a:prstDash val="solid"/>
+            <a:miter lim="800000"/>
+            <a:headEnd type="none" w="sm" len="sm"/>
+            <a:tailEnd type="triangle" w="lg" len="lg"/>
+          </a:ln>
+        </p:spPr>
+      </p:cxnSp>
+      <p:grpSp>
+        <p:nvGrpSpPr>
+          <p:cNvPr id="136" name="Group 135">
+            <a:extLst>
+              <a:ext uri="{FF2B5EF4-FFF2-40B4-BE49-F238E27FC236}">
+                <a16:creationId xmlns:a16="http://schemas.microsoft.com/office/drawing/2014/main" id="{305E5205-356A-3989-B325-71638A0903BB}"/>
+              </a:ext>
+            </a:extLst>
+          </p:cNvPr>
+          <p:cNvGrpSpPr/>
+          <p:nvPr/>
+        </p:nvGrpSpPr>
+        <p:grpSpPr>
+          <a:xfrm>
+            <a:off x="5652376" y="7758015"/>
+            <a:ext cx="1463862" cy="864366"/>
+            <a:chOff x="5647227" y="7809722"/>
+            <a:chExt cx="1463862" cy="864366"/>
+          </a:xfrm>
+        </p:grpSpPr>
+        <p:pic>
+          <p:nvPicPr>
+            <p:cNvPr id="137" name="Google Shape;450;p42">
+              <a:extLst>
+                <a:ext uri="{FF2B5EF4-FFF2-40B4-BE49-F238E27FC236}">
+                  <a16:creationId xmlns:a16="http://schemas.microsoft.com/office/drawing/2014/main" id="{A63B7499-4A5B-D9C1-B3B6-BBC7C99F5C2B}"/>
+                </a:ext>
+              </a:extLst>
+            </p:cNvPr>
+            <p:cNvPicPr preferRelativeResize="0"/>
+            <p:nvPr/>
+          </p:nvPicPr>
+          <p:blipFill rotWithShape="1">
+            <a:blip r:embed="rId14">
+              <a:alphaModFix/>
+            </a:blip>
+            <a:srcRect/>
+            <a:stretch/>
+          </p:blipFill>
+          <p:spPr>
+            <a:xfrm>
+              <a:off x="6046768" y="7809722"/>
+              <a:ext cx="540000" cy="540000"/>
+            </a:xfrm>
+            <a:prstGeom prst="rect">
+              <a:avLst/>
+            </a:prstGeom>
+            <a:noFill/>
+            <a:ln>
+              <a:noFill/>
+            </a:ln>
+          </p:spPr>
+        </p:pic>
+        <p:sp>
+          <p:nvSpPr>
+            <p:cNvPr id="138" name="TextBox 137">
+              <a:extLst>
+                <a:ext uri="{FF2B5EF4-FFF2-40B4-BE49-F238E27FC236}">
+                  <a16:creationId xmlns:a16="http://schemas.microsoft.com/office/drawing/2014/main" id="{D12A1813-C5E5-F237-5EAA-F943F97AC4C6}"/>
+                </a:ext>
+              </a:extLst>
+            </p:cNvPr>
+            <p:cNvSpPr txBox="1"/>
+            <p:nvPr/>
+          </p:nvSpPr>
+          <p:spPr>
+            <a:xfrm>
+              <a:off x="5647227" y="8397089"/>
+              <a:ext cx="1463862" cy="276999"/>
+            </a:xfrm>
+            <a:prstGeom prst="rect">
+              <a:avLst/>
+            </a:prstGeom>
+            <a:noFill/>
+          </p:spPr>
+          <p:txBody>
+            <a:bodyPr wrap="none" rtlCol="0">
+              <a:spAutoFit/>
+            </a:bodyPr>
+            <a:lstStyle/>
+            <a:p>
+              <a:r>
+                <a:rPr lang="en-US" sz="1200" b="1" dirty="0">
+                  <a:solidFill>
+                    <a:schemeClr val="accent2"/>
+                  </a:solidFill>
+                  <a:latin typeface="Space Grotesk" pitchFamily="2" charset="0"/>
+                  <a:cs typeface="Space Grotesk" pitchFamily="2" charset="0"/>
+                </a:rPr>
+                <a:t>POST</a:t>
+              </a:r>
+              <a:r>
+                <a:rPr lang="en-US" sz="1200" b="1" dirty="0">
+                  <a:latin typeface="Space Grotesk" pitchFamily="2" charset="0"/>
+                  <a:cs typeface="Space Grotesk" pitchFamily="2" charset="0"/>
+                </a:rPr>
+                <a:t> </a:t>
+              </a:r>
+              <a:r>
+                <a:rPr lang="en-US" sz="1200" dirty="0">
+                  <a:latin typeface="Space Grotesk" pitchFamily="2" charset="0"/>
+                  <a:cs typeface="Space Grotesk" pitchFamily="2" charset="0"/>
+                </a:rPr>
+                <a:t>/v1.0/</a:t>
+              </a:r>
+              <a:r>
+                <a:rPr lang="en-US" sz="1200" b="1" dirty="0">
+                  <a:solidFill>
+                    <a:schemeClr val="accent6"/>
+                  </a:solidFill>
+                  <a:latin typeface="Space Grotesk" pitchFamily="2" charset="0"/>
+                  <a:cs typeface="Space Grotesk" pitchFamily="2" charset="0"/>
+                </a:rPr>
+                <a:t>state</a:t>
+              </a:r>
+              <a:r>
+                <a:rPr lang="en-US" sz="1200" dirty="0">
+                  <a:latin typeface="Space Grotesk" pitchFamily="2" charset="0"/>
+                  <a:cs typeface="Space Grotesk" pitchFamily="2" charset="0"/>
+                </a:rPr>
+                <a:t>/</a:t>
+              </a:r>
+              <a:endParaRPr lang="en-NL" sz="1200" dirty="0">
+                <a:latin typeface="Space Grotesk" pitchFamily="2" charset="0"/>
+                <a:cs typeface="Space Grotesk" pitchFamily="2" charset="0"/>
+              </a:endParaRPr>
+            </a:p>
+          </p:txBody>
+        </p:sp>
+      </p:grpSp>
+      <p:cxnSp>
+        <p:nvCxnSpPr>
+          <p:cNvPr id="139" name="Elbow Connector 138">
+            <a:extLst>
+              <a:ext uri="{FF2B5EF4-FFF2-40B4-BE49-F238E27FC236}">
+                <a16:creationId xmlns:a16="http://schemas.microsoft.com/office/drawing/2014/main" id="{39746E91-BDB0-0D9F-3DB0-A0F3256795F8}"/>
+              </a:ext>
+            </a:extLst>
+          </p:cNvPr>
+          <p:cNvCxnSpPr>
+            <a:cxnSpLocks/>
+          </p:cNvCxnSpPr>
+          <p:nvPr/>
+        </p:nvCxnSpPr>
+        <p:spPr>
+          <a:xfrm rot="16200000" flipH="1">
+            <a:off x="3526163" y="4400725"/>
+            <a:ext cx="1887026" cy="1725565"/>
+          </a:xfrm>
+          <a:prstGeom prst="bentConnector3">
+            <a:avLst>
+              <a:gd name="adj1" fmla="val 50000"/>
+            </a:avLst>
+          </a:prstGeom>
+          <a:noFill/>
+          <a:ln w="25400" cap="flat" cmpd="sng">
+            <a:solidFill>
+              <a:schemeClr val="dk1"/>
+            </a:solidFill>
+            <a:prstDash val="solid"/>
+            <a:miter lim="800000"/>
+            <a:headEnd type="none" w="sm" len="sm"/>
+            <a:tailEnd type="triangle" w="lg" len="lg"/>
+          </a:ln>
+        </p:spPr>
+      </p:cxnSp>
       <p:sp>
         <p:nvSpPr>
-          <p:cNvPr id="94" name="TextBox 93">
+          <p:cNvPr id="146" name="TextBox 145">
             <a:extLst>
               <a:ext uri="{FF2B5EF4-FFF2-40B4-BE49-F238E27FC236}">
-                <a16:creationId xmlns:a16="http://schemas.microsoft.com/office/drawing/2014/main" id="{53861A6D-5BBB-4FA2-F89F-940C19A81010}"/>
+                <a16:creationId xmlns:a16="http://schemas.microsoft.com/office/drawing/2014/main" id="{13503811-EF31-C79F-B8A7-BE6ACB32A59A}"/>
               </a:ext>
             </a:extLst>
           </p:cNvPr>
@@ -14988,8 +15246,8 @@
         </p:nvSpPr>
         <p:spPr>
           <a:xfrm>
-            <a:off x="11292484" y="5222177"/>
-            <a:ext cx="1463862" cy="276999"/>
+            <a:off x="3610906" y="5789388"/>
+            <a:ext cx="1552028" cy="276999"/>
           </a:xfrm>
           <a:prstGeom prst="rect">
             <a:avLst/>
@@ -15034,7 +15292,7 @@
                 <a:latin typeface="Space Grotesk" pitchFamily="2" charset="0"/>
                 <a:cs typeface="Space Grotesk" pitchFamily="2" charset="0"/>
               </a:rPr>
-              <a:t>state</a:t>
+              <a:t>invoke</a:t>
             </a:r>
             <a:r>
               <a:rPr lang="en-US" sz="1200" dirty="0">
@@ -15050,40 +15308,39 @@
           </a:p>
         </p:txBody>
       </p:sp>
-      <p:cxnSp>
-        <p:nvCxnSpPr>
-          <p:cNvPr id="95" name="Google Shape;442;p42">
+      <p:pic>
+        <p:nvPicPr>
+          <p:cNvPr id="147" name="Google Shape;1777;p3">
             <a:extLst>
               <a:ext uri="{FF2B5EF4-FFF2-40B4-BE49-F238E27FC236}">
-                <a16:creationId xmlns:a16="http://schemas.microsoft.com/office/drawing/2014/main" id="{CFDBC914-8D8A-3FBD-558D-C380DEBE37F0}"/>
+                <a16:creationId xmlns:a16="http://schemas.microsoft.com/office/drawing/2014/main" id="{31002267-C9B3-7335-803A-F5269301E85A}"/>
               </a:ext>
             </a:extLst>
           </p:cNvPr>
-          <p:cNvCxnSpPr>
-            <a:cxnSpLocks/>
-          </p:cNvCxnSpPr>
+          <p:cNvPicPr preferRelativeResize="0"/>
           <p:nvPr/>
-        </p:nvCxnSpPr>
+        </p:nvPicPr>
+        <p:blipFill rotWithShape="1">
+          <a:blip r:embed="rId13">
+            <a:alphaModFix/>
+          </a:blip>
+          <a:srcRect/>
+          <a:stretch/>
+        </p:blipFill>
         <p:spPr>
-          <a:xfrm flipH="1">
-            <a:off x="11090797" y="4586142"/>
-            <a:ext cx="1372" cy="1255441"/>
+          <a:xfrm>
+            <a:off x="4079575" y="5292238"/>
+            <a:ext cx="518284" cy="525525"/>
           </a:xfrm>
-          <a:prstGeom prst="straightConnector1">
+          <a:prstGeom prst="rect">
             <a:avLst/>
           </a:prstGeom>
           <a:noFill/>
-          <a:ln w="25400" cap="flat" cmpd="sng">
-            <a:solidFill>
-              <a:schemeClr val="dk1"/>
-            </a:solidFill>
-            <a:prstDash val="solid"/>
-            <a:miter lim="800000"/>
-            <a:headEnd type="none" w="sm" len="sm"/>
-            <a:tailEnd type="triangle" w="lg" len="lg"/>
+          <a:ln>
+            <a:noFill/>
           </a:ln>
         </p:spPr>
-      </p:cxnSp>
+      </p:pic>
     </p:spTree>
     <p:extLst>
       <p:ext uri="{BB962C8B-B14F-4D97-AF65-F5344CB8AC3E}">
@@ -15123,51 +15380,6 @@
                                     <p:set>
                                       <p:cBhvr>
                                         <p:cTn id="6" dur="1" fill="hold">
-                                          <p:stCondLst>
-                                            <p:cond delay="0"/>
-                                          </p:stCondLst>
-                                        </p:cTn>
-                                        <p:tgtEl>
-                                          <p:spTgt spid="34"/>
-                                        </p:tgtEl>
-                                        <p:attrNameLst>
-                                          <p:attrName>style.visibility</p:attrName>
-                                        </p:attrNameLst>
-                                      </p:cBhvr>
-                                      <p:to>
-                                        <p:strVal val="visible"/>
-                                      </p:to>
-                                    </p:set>
-                                  </p:childTnLst>
-                                </p:cTn>
-                              </p:par>
-                            </p:childTnLst>
-                          </p:cTn>
-                        </p:par>
-                      </p:childTnLst>
-                    </p:cTn>
-                  </p:par>
-                  <p:par>
-                    <p:cTn id="7" fill="hold">
-                      <p:stCondLst>
-                        <p:cond delay="indefinite"/>
-                      </p:stCondLst>
-                      <p:childTnLst>
-                        <p:par>
-                          <p:cTn id="8" fill="hold">
-                            <p:stCondLst>
-                              <p:cond delay="0"/>
-                            </p:stCondLst>
-                            <p:childTnLst>
-                              <p:par>
-                                <p:cTn id="9" presetID="1" presetClass="entr" presetSubtype="0" fill="hold" nodeType="clickEffect">
-                                  <p:stCondLst>
-                                    <p:cond delay="0"/>
-                                  </p:stCondLst>
-                                  <p:childTnLst>
-                                    <p:set>
-                                      <p:cBhvr>
-                                        <p:cTn id="10" dur="1" fill="hold">
                                           <p:stCondLst>
                                             <p:cond delay="0"/>
                                           </p:stCondLst>

--- a/assets/demo-slide.pptx
+++ b/assets/demo-slide.pptx
@@ -21,7 +21,7 @@
     <p:embeddedFont>
       <p:font typeface="Space Grotesk Medium" pitchFamily="2" charset="77"/>
       <p:regular r:id="rId6"/>
-      <p:bold r:id=""/>
+      <p:bold r:id="rId7"/>
     </p:embeddedFont>
   </p:embeddedFontLst>
   <p:defaultTextStyle>
@@ -258,7 +258,7 @@
       <p15:sldGuideLst xmlns:p15="http://schemas.microsoft.com/office/powerpoint/2012/main"/>
     </p:ext>
     <p:ext uri="GoogleSlidesCustomDataVersion2">
-      <go:slidesCustomData xmlns:go="http://customooxmlschemas.google.com/" xmlns:ahyp="http://schemas.microsoft.com/office/drawing/2018/hyperlinkcolor" xmlns:p15="http://schemas.microsoft.com/office/powerpoint/2012/main" xmlns:p14="http://schemas.microsoft.com/office/powerpoint/2010/main" xmlns:com="http://schemas.openxmlformats.org/drawingml/2006/compatibility" xmlns:pvml="urn:schemas-microsoft-com:office:powerpoint" xmlns:v="urn:schemas-microsoft-com:vml" xmlns:o="urn:schemas-microsoft-com:office:office" xmlns:dgm="http://schemas.openxmlformats.org/drawingml/2006/diagram" xmlns:c="http://schemas.openxmlformats.org/drawingml/2006/chart" xmlns:mv="urn:schemas-microsoft-com:mac:vml" xmlns:mc="http://schemas.openxmlformats.org/markup-compatibility/2006" xmlns="" r:id="rId158" roundtripDataSignature="AMtx7mhuAUSRUHXfBEQMryvGwGYUe/XPsg=="/>
+      <go:slidesCustomData xmlns="" xmlns:mc="http://schemas.openxmlformats.org/markup-compatibility/2006" xmlns:mv="urn:schemas-microsoft-com:mac:vml" xmlns:c="http://schemas.openxmlformats.org/drawingml/2006/chart" xmlns:dgm="http://schemas.openxmlformats.org/drawingml/2006/diagram" xmlns:o="urn:schemas-microsoft-com:office:office" xmlns:v="urn:schemas-microsoft-com:vml" xmlns:pvml="urn:schemas-microsoft-com:office:powerpoint" xmlns:com="http://schemas.openxmlformats.org/drawingml/2006/compatibility" xmlns:p14="http://schemas.microsoft.com/office/powerpoint/2010/main" xmlns:p15="http://schemas.microsoft.com/office/powerpoint/2012/main" xmlns:ahyp="http://schemas.microsoft.com/office/drawing/2018/hyperlinkcolor" xmlns:go="http://customooxmlschemas.google.com/" r:id="rId158" roundtripDataSignature="AMtx7mhuAUSRUHXfBEQMryvGwGYUe/XPsg=="/>
     </p:ext>
   </p:extLst>
 </p:presentation>
@@ -13767,7 +13767,7 @@
         </p:blipFill>
         <p:spPr>
           <a:xfrm>
-            <a:off x="11078397" y="6698905"/>
+            <a:off x="11054260" y="6592824"/>
             <a:ext cx="746881" cy="941390"/>
           </a:xfrm>
           <a:prstGeom prst="rect">
@@ -15341,6 +15341,92 @@
           </a:ln>
         </p:spPr>
       </p:pic>
+      <p:sp>
+        <p:nvSpPr>
+          <p:cNvPr id="2" name="Rounded Rectangle 1">
+            <a:extLst>
+              <a:ext uri="{FF2B5EF4-FFF2-40B4-BE49-F238E27FC236}">
+                <a16:creationId xmlns:a16="http://schemas.microsoft.com/office/drawing/2014/main" id="{53167B3B-EE2B-907D-B728-3945EFD98A3D}"/>
+              </a:ext>
+            </a:extLst>
+          </p:cNvPr>
+          <p:cNvSpPr/>
+          <p:nvPr/>
+        </p:nvSpPr>
+        <p:spPr>
+          <a:xfrm>
+            <a:off x="1210167" y="6239038"/>
+            <a:ext cx="8214180" cy="2003320"/>
+          </a:xfrm>
+          <a:prstGeom prst="roundRect">
+            <a:avLst/>
+          </a:prstGeom>
+          <a:noFill/>
+          <a:ln w="44450">
+            <a:solidFill>
+              <a:schemeClr val="accent2"/>
+            </a:solidFill>
+            <a:prstDash val="sysDot"/>
+          </a:ln>
+        </p:spPr>
+        <p:style>
+          <a:lnRef idx="2">
+            <a:schemeClr val="accent1">
+              <a:shade val="15000"/>
+            </a:schemeClr>
+          </a:lnRef>
+          <a:fillRef idx="1">
+            <a:schemeClr val="accent1"/>
+          </a:fillRef>
+          <a:effectRef idx="0">
+            <a:schemeClr val="accent1"/>
+          </a:effectRef>
+          <a:fontRef idx="minor">
+            <a:schemeClr val="lt1"/>
+          </a:fontRef>
+        </p:style>
+        <p:txBody>
+          <a:bodyPr rtlCol="0" anchor="ctr"/>
+          <a:lstStyle/>
+          <a:p>
+            <a:pPr algn="ctr"/>
+            <a:endParaRPr lang="en-US"/>
+          </a:p>
+        </p:txBody>
+      </p:sp>
+      <p:pic>
+        <p:nvPicPr>
+          <p:cNvPr id="3" name="Google Shape;881;p64">
+            <a:extLst>
+              <a:ext uri="{FF2B5EF4-FFF2-40B4-BE49-F238E27FC236}">
+                <a16:creationId xmlns:a16="http://schemas.microsoft.com/office/drawing/2014/main" id="{28AB1D81-1F20-662A-38B8-6B596ECB3724}"/>
+              </a:ext>
+            </a:extLst>
+          </p:cNvPr>
+          <p:cNvPicPr preferRelativeResize="0"/>
+          <p:nvPr/>
+        </p:nvPicPr>
+        <p:blipFill rotWithShape="1">
+          <a:blip r:embed="rId15">
+            <a:alphaModFix/>
+          </a:blip>
+          <a:srcRect/>
+          <a:stretch/>
+        </p:blipFill>
+        <p:spPr>
+          <a:xfrm>
+            <a:off x="872510" y="5866192"/>
+            <a:ext cx="825528" cy="837918"/>
+          </a:xfrm>
+          <a:prstGeom prst="rect">
+            <a:avLst/>
+          </a:prstGeom>
+          <a:noFill/>
+          <a:ln>
+            <a:noFill/>
+          </a:ln>
+        </p:spPr>
+      </p:pic>
     </p:spTree>
     <p:extLst>
       <p:ext uri="{BB962C8B-B14F-4D97-AF65-F5344CB8AC3E}">

--- a/assets/demo-slide.pptx
+++ b/assets/demo-slide.pptx
@@ -258,7 +258,7 @@
       <p15:sldGuideLst xmlns:p15="http://schemas.microsoft.com/office/powerpoint/2012/main"/>
     </p:ext>
     <p:ext uri="GoogleSlidesCustomDataVersion2">
-      <go:slidesCustomData xmlns="" xmlns:mc="http://schemas.openxmlformats.org/markup-compatibility/2006" xmlns:mv="urn:schemas-microsoft-com:mac:vml" xmlns:c="http://schemas.openxmlformats.org/drawingml/2006/chart" xmlns:dgm="http://schemas.openxmlformats.org/drawingml/2006/diagram" xmlns:o="urn:schemas-microsoft-com:office:office" xmlns:v="urn:schemas-microsoft-com:vml" xmlns:pvml="urn:schemas-microsoft-com:office:powerpoint" xmlns:com="http://schemas.openxmlformats.org/drawingml/2006/compatibility" xmlns:p14="http://schemas.microsoft.com/office/powerpoint/2010/main" xmlns:p15="http://schemas.microsoft.com/office/powerpoint/2012/main" xmlns:ahyp="http://schemas.microsoft.com/office/drawing/2018/hyperlinkcolor" xmlns:go="http://customooxmlschemas.google.com/" r:id="rId158" roundtripDataSignature="AMtx7mhuAUSRUHXfBEQMryvGwGYUe/XPsg=="/>
+      <go:slidesCustomData xmlns:go="http://customooxmlschemas.google.com/" xmlns:ahyp="http://schemas.microsoft.com/office/drawing/2018/hyperlinkcolor" xmlns:p15="http://schemas.microsoft.com/office/powerpoint/2012/main" xmlns:p14="http://schemas.microsoft.com/office/powerpoint/2010/main" xmlns:com="http://schemas.openxmlformats.org/drawingml/2006/compatibility" xmlns:pvml="urn:schemas-microsoft-com:office:powerpoint" xmlns:v="urn:schemas-microsoft-com:vml" xmlns:o="urn:schemas-microsoft-com:office:office" xmlns:dgm="http://schemas.openxmlformats.org/drawingml/2006/diagram" xmlns:c="http://schemas.openxmlformats.org/drawingml/2006/chart" xmlns:mv="urn:schemas-microsoft-com:mac:vml" xmlns:mc="http://schemas.openxmlformats.org/markup-compatibility/2006" xmlns="" r:id="rId158" roundtripDataSignature="AMtx7mhuAUSRUHXfBEQMryvGwGYUe/XPsg=="/>
     </p:ext>
   </p:extLst>
 </p:presentation>
@@ -12483,7 +12483,7 @@
         </p:blipFill>
         <p:spPr>
           <a:xfrm>
-            <a:off x="7221383" y="831737"/>
+            <a:off x="3809575" y="2190009"/>
             <a:ext cx="540000" cy="540000"/>
           </a:xfrm>
           <a:prstGeom prst="rect">
@@ -12509,7 +12509,7 @@
         </p:nvSpPr>
         <p:spPr>
           <a:xfrm>
-            <a:off x="6739717" y="1390746"/>
+            <a:off x="3327909" y="2749018"/>
             <a:ext cx="1609736" cy="276999"/>
           </a:xfrm>
           <a:prstGeom prst="rect">
@@ -12715,7 +12715,7 @@
         </p:nvGrpSpPr>
         <p:grpSpPr>
           <a:xfrm>
-            <a:off x="2904552" y="2845995"/>
+            <a:off x="-1365769" y="6350850"/>
             <a:ext cx="1766667" cy="1800000"/>
             <a:chOff x="3071990" y="1647687"/>
             <a:chExt cx="1855000" cy="1890000"/>
@@ -12769,7 +12769,7 @@
           <p:spPr>
             <a:xfrm>
               <a:off x="3218830" y="2101719"/>
-              <a:ext cx="1149446" cy="523180"/>
+              <a:ext cx="1149446" cy="549339"/>
             </a:xfrm>
             <a:prstGeom prst="rect">
               <a:avLst/>
@@ -12812,7 +12812,7 @@
                   <a:cs typeface="Space Grotesk"/>
                   <a:sym typeface="Space Grotesk"/>
                 </a:rPr>
-                <a:t>Virtual Worker</a:t>
+                <a:t>Worker Actor</a:t>
               </a:r>
               <a:endParaRPr sz="1400" b="1" i="0" u="none" strike="noStrike" cap="none" dirty="0">
                 <a:solidFill>
@@ -13025,7 +13025,7 @@
           <p:spPr>
             <a:xfrm>
               <a:off x="1556960" y="2090951"/>
-              <a:ext cx="1149446" cy="307736"/>
+              <a:ext cx="1149446" cy="323123"/>
             </a:xfrm>
             <a:prstGeom prst="rect">
               <a:avLst/>
@@ -13041,22 +13041,8 @@
             </a:bodyPr>
             <a:lstStyle/>
             <a:p>
-              <a:pPr marL="0" marR="0" lvl="0" indent="0" algn="ctr" rtl="0">
-                <a:lnSpc>
-                  <a:spcPct val="100000"/>
-                </a:lnSpc>
-                <a:spcBef>
-                  <a:spcPts val="0"/>
-                </a:spcBef>
-                <a:spcAft>
-                  <a:spcPts val="0"/>
-                </a:spcAft>
-                <a:buClr>
-                  <a:srgbClr val="000000"/>
-                </a:buClr>
+              <a:pPr algn="ctr">
                 <a:buSzPts val="1400"/>
-                <a:buFont typeface="Arial"/>
-                <a:buNone/>
               </a:pPr>
               <a:r>
                 <a:rPr lang="en-US" sz="1400" b="1" i="0" u="none" strike="noStrike" cap="none" dirty="0">
@@ -13070,15 +13056,6 @@
                 </a:rPr>
                 <a:t>Make-Line</a:t>
               </a:r>
-              <a:endParaRPr sz="1400" b="1" i="0" u="none" strike="noStrike" cap="none" dirty="0">
-                <a:solidFill>
-                  <a:schemeClr val="lt1"/>
-                </a:solidFill>
-                <a:latin typeface="Space Grotesk"/>
-                <a:ea typeface="Space Grotesk"/>
-                <a:cs typeface="Space Grotesk"/>
-                <a:sym typeface="Space Grotesk"/>
-              </a:endParaRPr>
             </a:p>
           </p:txBody>
         </p:sp>
@@ -13153,7 +13130,7 @@
           <p:spPr>
             <a:xfrm>
               <a:off x="1490564" y="1956159"/>
-              <a:ext cx="1305998" cy="549339"/>
+              <a:ext cx="1305998" cy="323123"/>
             </a:xfrm>
             <a:prstGeom prst="rect">
               <a:avLst/>
@@ -13186,18 +13163,15 @@
                 <a:buFont typeface="Arial"/>
                 <a:buNone/>
               </a:pPr>
-              <a:r>
-                <a:rPr lang="en-US" sz="1400" b="1" i="0" u="none" strike="noStrike" cap="none" dirty="0">
-                  <a:solidFill>
-                    <a:schemeClr val="lt1"/>
-                  </a:solidFill>
-                  <a:latin typeface="Space Grotesk"/>
-                  <a:ea typeface="Space Grotesk"/>
-                  <a:cs typeface="Space Grotesk"/>
-                  <a:sym typeface="Space Grotesk"/>
-                </a:rPr>
-                <a:t>Receipt Generation</a:t>
-              </a:r>
+              <a:endParaRPr lang="en-US" sz="1400" b="1" i="0" u="none" strike="noStrike" cap="none" dirty="0">
+                <a:solidFill>
+                  <a:schemeClr val="lt1"/>
+                </a:solidFill>
+                <a:latin typeface="Space Grotesk"/>
+                <a:ea typeface="Space Grotesk"/>
+                <a:cs typeface="Space Grotesk"/>
+                <a:sym typeface="Space Grotesk"/>
+              </a:endParaRPr>
             </a:p>
           </p:txBody>
         </p:sp>
@@ -13216,7 +13190,7 @@
         </p:nvGrpSpPr>
         <p:grpSpPr>
           <a:xfrm>
-            <a:off x="5691383" y="1966082"/>
+            <a:off x="4083574" y="3295362"/>
             <a:ext cx="1800000" cy="776676"/>
             <a:chOff x="5049258" y="2735488"/>
             <a:chExt cx="1800000" cy="776676"/>
@@ -13527,7 +13501,7 @@
         </p:nvSpPr>
         <p:spPr>
           <a:xfrm>
-            <a:off x="8673070" y="2671789"/>
+            <a:off x="6128085" y="3291496"/>
             <a:ext cx="1343638" cy="276999"/>
           </a:xfrm>
           <a:prstGeom prst="rect">
@@ -13586,7 +13560,7 @@
         </p:nvGrpSpPr>
         <p:grpSpPr>
           <a:xfrm>
-            <a:off x="7456601" y="3314308"/>
+            <a:off x="7243288" y="2989559"/>
             <a:ext cx="1855000" cy="1890000"/>
             <a:chOff x="7394266" y="1813369"/>
             <a:chExt cx="1855000" cy="1890000"/>
@@ -13712,7 +13686,7 @@
         </p:nvSpPr>
         <p:spPr>
           <a:xfrm>
-            <a:off x="8740771" y="2454624"/>
+            <a:off x="6195786" y="3074331"/>
             <a:ext cx="1141659" cy="276999"/>
           </a:xfrm>
           <a:prstGeom prst="rect">
@@ -13795,7 +13769,7 @@
         </p:nvCxnSpPr>
         <p:spPr>
           <a:xfrm flipH="1">
-            <a:off x="3204736" y="7067138"/>
+            <a:off x="3205849" y="7049137"/>
             <a:ext cx="1456337" cy="0"/>
           </a:xfrm>
           <a:prstGeom prst="straightConnector1">
@@ -13847,122 +13821,89 @@
           </a:ln>
         </p:spPr>
       </p:cxnSp>
-      <p:grpSp>
-        <p:nvGrpSpPr>
-          <p:cNvPr id="17" name="Google Shape;1831;p5">
+      <p:pic>
+        <p:nvPicPr>
+          <p:cNvPr id="18" name="Google Shape;1832;p5">
             <a:extLst>
               <a:ext uri="{FF2B5EF4-FFF2-40B4-BE49-F238E27FC236}">
-                <a16:creationId xmlns:a16="http://schemas.microsoft.com/office/drawing/2014/main" id="{EFC98061-1422-6820-1FDD-B5BDE9D3E532}"/>
+                <a16:creationId xmlns:a16="http://schemas.microsoft.com/office/drawing/2014/main" id="{8523E0E6-6F96-5FE0-1707-786AE5A70966}"/>
               </a:ext>
             </a:extLst>
           </p:cNvPr>
-          <p:cNvGrpSpPr>
-            <a:grpSpLocks noChangeAspect="1"/>
-          </p:cNvGrpSpPr>
+          <p:cNvPicPr preferRelativeResize="0"/>
           <p:nvPr/>
-        </p:nvGrpSpPr>
-        <p:grpSpPr>
+        </p:nvPicPr>
+        <p:blipFill rotWithShape="1">
+          <a:blip r:embed="rId5">
+            <a:alphaModFix/>
+          </a:blip>
+          <a:srcRect/>
+          <a:stretch/>
+        </p:blipFill>
+        <p:spPr>
           <a:xfrm>
-            <a:off x="1287280" y="6350850"/>
+            <a:off x="1378176" y="6336955"/>
             <a:ext cx="1766667" cy="1800000"/>
-            <a:chOff x="1008840" y="1539001"/>
-            <a:chExt cx="1855000" cy="1890000"/>
           </a:xfrm>
-        </p:grpSpPr>
-        <p:pic>
-          <p:nvPicPr>
-            <p:cNvPr id="18" name="Google Shape;1832;p5">
-              <a:extLst>
-                <a:ext uri="{FF2B5EF4-FFF2-40B4-BE49-F238E27FC236}">
-                  <a16:creationId xmlns:a16="http://schemas.microsoft.com/office/drawing/2014/main" id="{8523E0E6-6F96-5FE0-1707-786AE5A70966}"/>
-                </a:ext>
-              </a:extLst>
-            </p:cNvPr>
-            <p:cNvPicPr preferRelativeResize="0"/>
-            <p:nvPr/>
-          </p:nvPicPr>
-          <p:blipFill rotWithShape="1">
-            <a:blip r:embed="rId5">
-              <a:alphaModFix/>
-            </a:blip>
-            <a:srcRect/>
-            <a:stretch/>
-          </p:blipFill>
-          <p:spPr>
-            <a:xfrm>
-              <a:off x="1008840" y="1539001"/>
-              <a:ext cx="1855000" cy="1890000"/>
-            </a:xfrm>
-            <a:prstGeom prst="rect">
-              <a:avLst/>
-            </a:prstGeom>
+          <a:prstGeom prst="rect">
+            <a:avLst/>
+          </a:prstGeom>
+          <a:noFill/>
+          <a:ln>
             <a:noFill/>
-            <a:ln>
-              <a:noFill/>
-            </a:ln>
-          </p:spPr>
-        </p:pic>
-        <p:sp>
-          <p:nvSpPr>
-            <p:cNvPr id="19" name="Google Shape;1833;p5">
-              <a:extLst>
-                <a:ext uri="{FF2B5EF4-FFF2-40B4-BE49-F238E27FC236}">
-                  <a16:creationId xmlns:a16="http://schemas.microsoft.com/office/drawing/2014/main" id="{3173C257-3848-C75C-E159-D1548B04B719}"/>
-                </a:ext>
-              </a:extLst>
-            </p:cNvPr>
-            <p:cNvSpPr txBox="1"/>
-            <p:nvPr/>
-          </p:nvSpPr>
-          <p:spPr>
-            <a:xfrm>
-              <a:off x="1498037" y="2099282"/>
-              <a:ext cx="1241317" cy="323123"/>
-            </a:xfrm>
-            <a:prstGeom prst="rect">
-              <a:avLst/>
-            </a:prstGeom>
+          </a:ln>
+        </p:spPr>
+      </p:pic>
+      <p:sp>
+        <p:nvSpPr>
+          <p:cNvPr id="19" name="Google Shape;1833;p5">
+            <a:extLst>
+              <a:ext uri="{FF2B5EF4-FFF2-40B4-BE49-F238E27FC236}">
+                <a16:creationId xmlns:a16="http://schemas.microsoft.com/office/drawing/2014/main" id="{3173C257-3848-C75C-E159-D1548B04B719}"/>
+              </a:ext>
+            </a:extLst>
+          </p:cNvPr>
+          <p:cNvSpPr txBox="1"/>
+          <p:nvPr/>
+        </p:nvSpPr>
+        <p:spPr>
+          <a:xfrm>
+            <a:off x="8034518" y="6884967"/>
+            <a:ext cx="1182207" cy="307736"/>
+          </a:xfrm>
+          <a:prstGeom prst="rect">
+            <a:avLst/>
+          </a:prstGeom>
+          <a:noFill/>
+          <a:ln>
             <a:noFill/>
-            <a:ln>
-              <a:noFill/>
-            </a:ln>
-          </p:spPr>
-          <p:txBody>
-            <a:bodyPr spcFirstLastPara="1" wrap="square" lIns="91425" tIns="45700" rIns="91425" bIns="45700" anchor="t" anchorCtr="0">
-              <a:spAutoFit/>
-            </a:bodyPr>
-            <a:lstStyle/>
-            <a:p>
-              <a:pPr marL="0" marR="0" lvl="0" indent="0" algn="ctr" rtl="0">
-                <a:lnSpc>
-                  <a:spcPct val="100000"/>
-                </a:lnSpc>
-                <a:spcBef>
-                  <a:spcPts val="0"/>
-                </a:spcBef>
-                <a:spcAft>
-                  <a:spcPts val="0"/>
-                </a:spcAft>
-                <a:buClr>
-                  <a:srgbClr val="000000"/>
-                </a:buClr>
-                <a:buSzPts val="1400"/>
-                <a:buFont typeface="Arial"/>
-                <a:buNone/>
-              </a:pPr>
-              <a:r>
-                <a:rPr lang="en-CA" sz="1400" b="1" i="0" u="none" strike="noStrike" cap="none" dirty="0">
-                  <a:solidFill>
-                    <a:schemeClr val="lt1"/>
-                  </a:solidFill>
-                  <a:latin typeface="Space Grotesk"/>
-                  <a:ea typeface="Space Grotesk"/>
-                  <a:cs typeface="Space Grotesk"/>
-                  <a:sym typeface="Space Grotesk"/>
-                </a:rPr>
-                <a:t>Loyalty</a:t>
-              </a:r>
-              <a:endParaRPr sz="1400" b="1" i="0" u="none" strike="noStrike" cap="none" dirty="0">
+          </a:ln>
+        </p:spPr>
+        <p:txBody>
+          <a:bodyPr spcFirstLastPara="1" wrap="square" lIns="91425" tIns="45700" rIns="91425" bIns="45700" anchor="t" anchorCtr="0">
+            <a:spAutoFit/>
+          </a:bodyPr>
+          <a:lstStyle/>
+          <a:p>
+            <a:pPr marL="0" marR="0" lvl="0" indent="0" algn="ctr" rtl="0">
+              <a:lnSpc>
+                <a:spcPct val="100000"/>
+              </a:lnSpc>
+              <a:spcBef>
+                <a:spcPts val="0"/>
+              </a:spcBef>
+              <a:spcAft>
+                <a:spcPts val="0"/>
+              </a:spcAft>
+              <a:buClr>
+                <a:srgbClr val="000000"/>
+              </a:buClr>
+              <a:buSzPts val="1400"/>
+              <a:buFont typeface="Arial"/>
+              <a:buNone/>
+            </a:pPr>
+            <a:r>
+              <a:rPr lang="en-CA" sz="1400" b="1" i="0" u="none" strike="noStrike" cap="none" dirty="0">
                 <a:solidFill>
                   <a:schemeClr val="lt1"/>
                 </a:solidFill>
@@ -13970,11 +13911,21 @@
                 <a:ea typeface="Space Grotesk"/>
                 <a:cs typeface="Space Grotesk"/>
                 <a:sym typeface="Space Grotesk"/>
-              </a:endParaRPr>
-            </a:p>
-          </p:txBody>
-        </p:sp>
-      </p:grpSp>
+              </a:rPr>
+              <a:t>Loyalty</a:t>
+            </a:r>
+            <a:endParaRPr lang="en-US" sz="1400" b="1" i="0" u="none" strike="noStrike" cap="none" dirty="0">
+              <a:solidFill>
+                <a:schemeClr val="lt1"/>
+              </a:solidFill>
+              <a:latin typeface="Space Grotesk"/>
+              <a:ea typeface="Space Grotesk"/>
+              <a:cs typeface="Space Grotesk"/>
+              <a:sym typeface="Space Grotesk"/>
+            </a:endParaRPr>
+          </a:p>
+        </p:txBody>
+      </p:sp>
       <p:cxnSp>
         <p:nvCxnSpPr>
           <p:cNvPr id="72" name="Google Shape;442;p42">
@@ -14135,12 +14086,14 @@
           <p:nvPr/>
         </p:nvCxnSpPr>
         <p:spPr>
-          <a:xfrm flipH="1">
-            <a:off x="8602841" y="4951578"/>
-            <a:ext cx="1372" cy="1255441"/>
+          <a:xfrm rot="16200000" flipH="1">
+            <a:off x="7622661" y="5312063"/>
+            <a:ext cx="1659857" cy="163621"/>
           </a:xfrm>
-          <a:prstGeom prst="straightConnector1">
-            <a:avLst/>
+          <a:prstGeom prst="bentConnector3">
+            <a:avLst>
+              <a:gd name="adj1" fmla="val 50000"/>
+            </a:avLst>
           </a:prstGeom>
           <a:noFill/>
           <a:ln w="25400" cap="flat" cmpd="sng">
@@ -14168,7 +14121,7 @@
         </p:nvGrpSpPr>
         <p:grpSpPr>
           <a:xfrm>
-            <a:off x="8673070" y="4976342"/>
+            <a:off x="8431017" y="4455803"/>
             <a:ext cx="1827744" cy="821050"/>
             <a:chOff x="8808855" y="4989122"/>
             <a:chExt cx="1827744" cy="821050"/>
@@ -14284,220 +14237,6 @@
           </p:spPr>
         </p:pic>
       </p:grpSp>
-      <p:grpSp>
-        <p:nvGrpSpPr>
-          <p:cNvPr id="99" name="Group 98">
-            <a:extLst>
-              <a:ext uri="{FF2B5EF4-FFF2-40B4-BE49-F238E27FC236}">
-                <a16:creationId xmlns:a16="http://schemas.microsoft.com/office/drawing/2014/main" id="{074A1898-39E8-B481-BB8D-9FCD4A95D9DF}"/>
-              </a:ext>
-            </a:extLst>
-          </p:cNvPr>
-          <p:cNvGrpSpPr/>
-          <p:nvPr/>
-        </p:nvGrpSpPr>
-        <p:grpSpPr>
-          <a:xfrm>
-            <a:off x="121414" y="3031595"/>
-            <a:ext cx="1467239" cy="1457444"/>
-            <a:chOff x="-347891" y="2230123"/>
-            <a:chExt cx="1467239" cy="1457444"/>
-          </a:xfrm>
-        </p:grpSpPr>
-        <p:grpSp>
-          <p:nvGrpSpPr>
-            <p:cNvPr id="89" name="Google Shape;1470;p112">
-              <a:extLst>
-                <a:ext uri="{FF2B5EF4-FFF2-40B4-BE49-F238E27FC236}">
-                  <a16:creationId xmlns:a16="http://schemas.microsoft.com/office/drawing/2014/main" id="{4225ABA9-DAC7-AF21-6158-30ACAC064E8D}"/>
-                </a:ext>
-              </a:extLst>
-            </p:cNvPr>
-            <p:cNvGrpSpPr/>
-            <p:nvPr/>
-          </p:nvGrpSpPr>
-          <p:grpSpPr>
-            <a:xfrm>
-              <a:off x="-347891" y="2230123"/>
-              <a:ext cx="1467239" cy="1457444"/>
-              <a:chOff x="4285033" y="2530794"/>
-              <a:chExt cx="2433176" cy="2393305"/>
-            </a:xfrm>
-          </p:grpSpPr>
-          <p:pic>
-            <p:nvPicPr>
-              <p:cNvPr id="90" name="Google Shape;1471;p112">
-                <a:extLst>
-                  <a:ext uri="{FF2B5EF4-FFF2-40B4-BE49-F238E27FC236}">
-                    <a16:creationId xmlns:a16="http://schemas.microsoft.com/office/drawing/2014/main" id="{70203C35-2957-FE92-D4D3-2374AFD3CB12}"/>
-                  </a:ext>
-                </a:extLst>
-              </p:cNvPr>
-              <p:cNvPicPr preferRelativeResize="0"/>
-              <p:nvPr/>
-            </p:nvPicPr>
-            <p:blipFill rotWithShape="1">
-              <a:blip r:embed="rId12">
-                <a:alphaModFix/>
-              </a:blip>
-              <a:srcRect/>
-              <a:stretch/>
-            </p:blipFill>
-            <p:spPr>
-              <a:xfrm>
-                <a:off x="4781622" y="2530794"/>
-                <a:ext cx="1440000" cy="1440000"/>
-              </a:xfrm>
-              <a:prstGeom prst="rect">
-                <a:avLst/>
-              </a:prstGeom>
-              <a:noFill/>
-              <a:ln>
-                <a:noFill/>
-              </a:ln>
-            </p:spPr>
-          </p:pic>
-          <p:sp>
-            <p:nvSpPr>
-              <p:cNvPr id="91" name="Google Shape;1472;p112">
-                <a:extLst>
-                  <a:ext uri="{FF2B5EF4-FFF2-40B4-BE49-F238E27FC236}">
-                    <a16:creationId xmlns:a16="http://schemas.microsoft.com/office/drawing/2014/main" id="{4C8486C5-C129-911B-2F05-FCCAD6B84FA6}"/>
-                  </a:ext>
-                </a:extLst>
-              </p:cNvPr>
-              <p:cNvSpPr txBox="1"/>
-              <p:nvPr/>
-            </p:nvSpPr>
-            <p:spPr>
-              <a:xfrm>
-                <a:off x="4285033" y="4064972"/>
-                <a:ext cx="2433176" cy="859127"/>
-              </a:xfrm>
-              <a:prstGeom prst="rect">
-                <a:avLst/>
-              </a:prstGeom>
-              <a:noFill/>
-              <a:ln>
-                <a:noFill/>
-              </a:ln>
-            </p:spPr>
-            <p:txBody>
-              <a:bodyPr spcFirstLastPara="1" wrap="square" lIns="91425" tIns="45700" rIns="91425" bIns="45700" anchor="t" anchorCtr="0">
-                <a:spAutoFit/>
-              </a:bodyPr>
-              <a:lstStyle/>
-              <a:p>
-                <a:pPr marL="0" marR="0" lvl="0" indent="0" algn="ctr" rtl="0">
-                  <a:lnSpc>
-                    <a:spcPct val="100000"/>
-                  </a:lnSpc>
-                  <a:spcBef>
-                    <a:spcPts val="0"/>
-                  </a:spcBef>
-                  <a:spcAft>
-                    <a:spcPts val="0"/>
-                  </a:spcAft>
-                  <a:buClr>
-                    <a:srgbClr val="000000"/>
-                  </a:buClr>
-                  <a:buSzPts val="1400"/>
-                  <a:buFont typeface="Arial"/>
-                  <a:buNone/>
-                </a:pPr>
-                <a:r>
-                  <a:rPr lang="en-US" sz="1400" b="1" i="0" u="none" strike="noStrike" cap="none" dirty="0">
-                    <a:solidFill>
-                      <a:schemeClr val="dk1"/>
-                    </a:solidFill>
-                    <a:latin typeface="Space Grotesk"/>
-                    <a:ea typeface="Space Grotesk"/>
-                    <a:cs typeface="Space Grotesk"/>
-                    <a:sym typeface="Space Grotesk"/>
-                  </a:rPr>
-                  <a:t>Cron input binding</a:t>
-                </a:r>
-                <a:endParaRPr sz="1400" b="1" i="0" u="none" strike="noStrike" cap="none" dirty="0">
-                  <a:solidFill>
-                    <a:schemeClr val="dk1"/>
-                  </a:solidFill>
-                  <a:latin typeface="Space Grotesk"/>
-                  <a:ea typeface="Space Grotesk"/>
-                  <a:cs typeface="Space Grotesk"/>
-                  <a:sym typeface="Space Grotesk"/>
-                </a:endParaRPr>
-              </a:p>
-            </p:txBody>
-          </p:sp>
-        </p:grpSp>
-        <p:pic>
-          <p:nvPicPr>
-            <p:cNvPr id="86" name="Google Shape;1783;p3">
-              <a:extLst>
-                <a:ext uri="{FF2B5EF4-FFF2-40B4-BE49-F238E27FC236}">
-                  <a16:creationId xmlns:a16="http://schemas.microsoft.com/office/drawing/2014/main" id="{79D8A353-9B40-CE77-2759-50267CAFD81C}"/>
-                </a:ext>
-              </a:extLst>
-            </p:cNvPr>
-            <p:cNvPicPr preferRelativeResize="0"/>
-            <p:nvPr/>
-          </p:nvPicPr>
-          <p:blipFill rotWithShape="1">
-            <a:blip r:embed="rId10">
-              <a:alphaModFix/>
-            </a:blip>
-            <a:srcRect/>
-            <a:stretch/>
-          </p:blipFill>
-          <p:spPr>
-            <a:xfrm>
-              <a:off x="79549" y="2428543"/>
-              <a:ext cx="540000" cy="540000"/>
-            </a:xfrm>
-            <a:prstGeom prst="rect">
-              <a:avLst/>
-            </a:prstGeom>
-            <a:noFill/>
-            <a:ln>
-              <a:noFill/>
-            </a:ln>
-          </p:spPr>
-        </p:pic>
-      </p:grpSp>
-      <p:cxnSp>
-        <p:nvCxnSpPr>
-          <p:cNvPr id="92" name="Google Shape;442;p42">
-            <a:extLst>
-              <a:ext uri="{FF2B5EF4-FFF2-40B4-BE49-F238E27FC236}">
-                <a16:creationId xmlns:a16="http://schemas.microsoft.com/office/drawing/2014/main" id="{7B57FB8E-ADA4-6546-7EC2-E35521EC7026}"/>
-              </a:ext>
-            </a:extLst>
-          </p:cNvPr>
-          <p:cNvCxnSpPr>
-            <a:cxnSpLocks/>
-          </p:cNvCxnSpPr>
-          <p:nvPr/>
-        </p:nvCxnSpPr>
-        <p:spPr>
-          <a:xfrm>
-            <a:off x="1448571" y="3503319"/>
-            <a:ext cx="1353366" cy="0"/>
-          </a:xfrm>
-          <a:prstGeom prst="straightConnector1">
-            <a:avLst/>
-          </a:prstGeom>
-          <a:noFill/>
-          <a:ln w="25400" cap="flat" cmpd="sng">
-            <a:solidFill>
-              <a:schemeClr val="dk1"/>
-            </a:solidFill>
-            <a:prstDash val="solid"/>
-            <a:miter lim="800000"/>
-            <a:headEnd type="none" w="sm" len="sm"/>
-            <a:tailEnd type="triangle" w="lg" len="lg"/>
-          </a:ln>
-        </p:spPr>
-      </p:cxnSp>
       <p:pic>
         <p:nvPicPr>
           <p:cNvPr id="96" name="Google Shape;777;p58">
@@ -14519,7 +14258,7 @@
         </p:blipFill>
         <p:spPr>
           <a:xfrm>
-            <a:off x="1984699" y="8733205"/>
+            <a:off x="2085154" y="8717093"/>
             <a:ext cx="746881" cy="941390"/>
           </a:xfrm>
           <a:prstGeom prst="rect">
@@ -14547,83 +14286,11 @@
         </p:nvCxnSpPr>
         <p:spPr>
           <a:xfrm rot="10800000" flipV="1">
-            <a:off x="2359157" y="7847102"/>
+            <a:off x="2459612" y="7830990"/>
             <a:ext cx="0" cy="726619"/>
           </a:xfrm>
           <a:prstGeom prst="straightConnector1">
             <a:avLst/>
-          </a:prstGeom>
-          <a:noFill/>
-          <a:ln w="25400" cap="flat" cmpd="sng">
-            <a:solidFill>
-              <a:schemeClr val="dk1"/>
-            </a:solidFill>
-            <a:prstDash val="solid"/>
-            <a:miter lim="800000"/>
-            <a:headEnd type="none" w="sm" len="sm"/>
-            <a:tailEnd type="triangle" w="lg" len="lg"/>
-          </a:ln>
-        </p:spPr>
-      </p:cxnSp>
-      <p:cxnSp>
-        <p:nvCxnSpPr>
-          <p:cNvPr id="108" name="Elbow Connector 107">
-            <a:extLst>
-              <a:ext uri="{FF2B5EF4-FFF2-40B4-BE49-F238E27FC236}">
-                <a16:creationId xmlns:a16="http://schemas.microsoft.com/office/drawing/2014/main" id="{1BF90DD7-5D35-7A5F-D253-3AF0C064458A}"/>
-              </a:ext>
-            </a:extLst>
-          </p:cNvPr>
-          <p:cNvCxnSpPr>
-            <a:cxnSpLocks/>
-          </p:cNvCxnSpPr>
-          <p:nvPr/>
-        </p:nvCxnSpPr>
-        <p:spPr>
-          <a:xfrm>
-            <a:off x="5659587" y="1101954"/>
-            <a:ext cx="984999" cy="748013"/>
-          </a:xfrm>
-          <a:prstGeom prst="bentConnector3">
-            <a:avLst>
-              <a:gd name="adj1" fmla="val 100636"/>
-            </a:avLst>
-          </a:prstGeom>
-          <a:noFill/>
-          <a:ln w="25400" cap="flat" cmpd="sng">
-            <a:solidFill>
-              <a:schemeClr val="dk1"/>
-            </a:solidFill>
-            <a:prstDash val="solid"/>
-            <a:miter lim="800000"/>
-            <a:headEnd type="none" w="sm" len="sm"/>
-            <a:tailEnd type="triangle" w="lg" len="lg"/>
-          </a:ln>
-        </p:spPr>
-      </p:cxnSp>
-      <p:cxnSp>
-        <p:nvCxnSpPr>
-          <p:cNvPr id="112" name="Elbow Connector 111">
-            <a:extLst>
-              <a:ext uri="{FF2B5EF4-FFF2-40B4-BE49-F238E27FC236}">
-                <a16:creationId xmlns:a16="http://schemas.microsoft.com/office/drawing/2014/main" id="{27718948-6915-8461-275C-408182C832CC}"/>
-              </a:ext>
-            </a:extLst>
-          </p:cNvPr>
-          <p:cNvCxnSpPr>
-            <a:cxnSpLocks/>
-          </p:cNvCxnSpPr>
-          <p:nvPr/>
-        </p:nvCxnSpPr>
-        <p:spPr>
-          <a:xfrm>
-            <a:off x="7589727" y="2351703"/>
-            <a:ext cx="984999" cy="748013"/>
-          </a:xfrm>
-          <a:prstGeom prst="bentConnector3">
-            <a:avLst>
-              <a:gd name="adj1" fmla="val 100636"/>
-            </a:avLst>
           </a:prstGeom>
           <a:noFill/>
           <a:ln w="25400" cap="flat" cmpd="sng">
@@ -14650,7 +14317,7 @@
           <p:nvPr/>
         </p:nvPicPr>
         <p:blipFill rotWithShape="1">
-          <a:blip r:embed="rId13">
+          <a:blip r:embed="rId12">
             <a:alphaModFix/>
           </a:blip>
           <a:srcRect/>
@@ -14691,7 +14358,7 @@
         </p:blipFill>
         <p:spPr>
           <a:xfrm>
-            <a:off x="9041600" y="1937373"/>
+            <a:off x="6496615" y="2557080"/>
             <a:ext cx="540000" cy="540000"/>
           </a:xfrm>
           <a:prstGeom prst="rect">
@@ -14848,9 +14515,9 @@
           <p:nvPr/>
         </p:nvCxnSpPr>
         <p:spPr>
-          <a:xfrm rot="5400000" flipH="1" flipV="1">
-            <a:off x="4347092" y="4129874"/>
-            <a:ext cx="3453746" cy="782159"/>
+          <a:xfrm rot="16200000" flipV="1">
+            <a:off x="4186271" y="4903166"/>
+            <a:ext cx="2072765" cy="616555"/>
           </a:xfrm>
           <a:prstGeom prst="bentConnector3">
             <a:avLst>
@@ -14883,7 +14550,7 @@
         </p:nvGrpSpPr>
         <p:grpSpPr>
           <a:xfrm>
-            <a:off x="2473918" y="7765815"/>
+            <a:off x="2574373" y="7749703"/>
             <a:ext cx="1463862" cy="864366"/>
             <a:chOff x="5647227" y="7809722"/>
             <a:chExt cx="1463862" cy="864366"/>
@@ -14902,7 +14569,7 @@
             <p:nvPr/>
           </p:nvPicPr>
           <p:blipFill rotWithShape="1">
-            <a:blip r:embed="rId14">
+            <a:blip r:embed="rId13">
               <a:alphaModFix/>
             </a:blip>
             <a:srcRect/>
@@ -15099,7 +14766,7 @@
             <p:nvPr/>
           </p:nvPicPr>
           <p:blipFill rotWithShape="1">
-            <a:blip r:embed="rId14">
+            <a:blip r:embed="rId13">
               <a:alphaModFix/>
             </a:blip>
             <a:srcRect/>
@@ -15196,151 +14863,6 @@
           </p:txBody>
         </p:sp>
       </p:grpSp>
-      <p:cxnSp>
-        <p:nvCxnSpPr>
-          <p:cNvPr id="139" name="Elbow Connector 138">
-            <a:extLst>
-              <a:ext uri="{FF2B5EF4-FFF2-40B4-BE49-F238E27FC236}">
-                <a16:creationId xmlns:a16="http://schemas.microsoft.com/office/drawing/2014/main" id="{39746E91-BDB0-0D9F-3DB0-A0F3256795F8}"/>
-              </a:ext>
-            </a:extLst>
-          </p:cNvPr>
-          <p:cNvCxnSpPr>
-            <a:cxnSpLocks/>
-          </p:cNvCxnSpPr>
-          <p:nvPr/>
-        </p:nvCxnSpPr>
-        <p:spPr>
-          <a:xfrm rot="16200000" flipH="1">
-            <a:off x="3526163" y="4400725"/>
-            <a:ext cx="1887026" cy="1725565"/>
-          </a:xfrm>
-          <a:prstGeom prst="bentConnector3">
-            <a:avLst>
-              <a:gd name="adj1" fmla="val 50000"/>
-            </a:avLst>
-          </a:prstGeom>
-          <a:noFill/>
-          <a:ln w="25400" cap="flat" cmpd="sng">
-            <a:solidFill>
-              <a:schemeClr val="dk1"/>
-            </a:solidFill>
-            <a:prstDash val="solid"/>
-            <a:miter lim="800000"/>
-            <a:headEnd type="none" w="sm" len="sm"/>
-            <a:tailEnd type="triangle" w="lg" len="lg"/>
-          </a:ln>
-        </p:spPr>
-      </p:cxnSp>
-      <p:sp>
-        <p:nvSpPr>
-          <p:cNvPr id="146" name="TextBox 145">
-            <a:extLst>
-              <a:ext uri="{FF2B5EF4-FFF2-40B4-BE49-F238E27FC236}">
-                <a16:creationId xmlns:a16="http://schemas.microsoft.com/office/drawing/2014/main" id="{13503811-EF31-C79F-B8A7-BE6ACB32A59A}"/>
-              </a:ext>
-            </a:extLst>
-          </p:cNvPr>
-          <p:cNvSpPr txBox="1"/>
-          <p:nvPr/>
-        </p:nvSpPr>
-        <p:spPr>
-          <a:xfrm>
-            <a:off x="3610906" y="5789388"/>
-            <a:ext cx="1552028" cy="276999"/>
-          </a:xfrm>
-          <a:prstGeom prst="rect">
-            <a:avLst/>
-          </a:prstGeom>
-          <a:noFill/>
-        </p:spPr>
-        <p:txBody>
-          <a:bodyPr wrap="none" rtlCol="0">
-            <a:spAutoFit/>
-          </a:bodyPr>
-          <a:lstStyle/>
-          <a:p>
-            <a:r>
-              <a:rPr lang="en-US" sz="1200" b="1" dirty="0">
-                <a:solidFill>
-                  <a:schemeClr val="accent2"/>
-                </a:solidFill>
-                <a:latin typeface="Space Grotesk" pitchFamily="2" charset="0"/>
-                <a:cs typeface="Space Grotesk" pitchFamily="2" charset="0"/>
-              </a:rPr>
-              <a:t>POST</a:t>
-            </a:r>
-            <a:r>
-              <a:rPr lang="en-US" sz="1200" b="1" dirty="0">
-                <a:latin typeface="Space Grotesk" pitchFamily="2" charset="0"/>
-                <a:cs typeface="Space Grotesk" pitchFamily="2" charset="0"/>
-              </a:rPr>
-              <a:t> </a:t>
-            </a:r>
-            <a:r>
-              <a:rPr lang="en-US" sz="1200" dirty="0">
-                <a:latin typeface="Space Grotesk" pitchFamily="2" charset="0"/>
-                <a:cs typeface="Space Grotesk" pitchFamily="2" charset="0"/>
-              </a:rPr>
-              <a:t>/v1.0/</a:t>
-            </a:r>
-            <a:r>
-              <a:rPr lang="en-US" sz="1200" b="1" dirty="0">
-                <a:solidFill>
-                  <a:schemeClr val="accent6"/>
-                </a:solidFill>
-                <a:latin typeface="Space Grotesk" pitchFamily="2" charset="0"/>
-                <a:cs typeface="Space Grotesk" pitchFamily="2" charset="0"/>
-              </a:rPr>
-              <a:t>invoke</a:t>
-            </a:r>
-            <a:r>
-              <a:rPr lang="en-US" sz="1200" dirty="0">
-                <a:latin typeface="Space Grotesk" pitchFamily="2" charset="0"/>
-                <a:cs typeface="Space Grotesk" pitchFamily="2" charset="0"/>
-              </a:rPr>
-              <a:t>/</a:t>
-            </a:r>
-            <a:endParaRPr lang="en-NL" sz="1200" dirty="0">
-              <a:latin typeface="Space Grotesk" pitchFamily="2" charset="0"/>
-              <a:cs typeface="Space Grotesk" pitchFamily="2" charset="0"/>
-            </a:endParaRPr>
-          </a:p>
-        </p:txBody>
-      </p:sp>
-      <p:pic>
-        <p:nvPicPr>
-          <p:cNvPr id="147" name="Google Shape;1777;p3">
-            <a:extLst>
-              <a:ext uri="{FF2B5EF4-FFF2-40B4-BE49-F238E27FC236}">
-                <a16:creationId xmlns:a16="http://schemas.microsoft.com/office/drawing/2014/main" id="{31002267-C9B3-7335-803A-F5269301E85A}"/>
-              </a:ext>
-            </a:extLst>
-          </p:cNvPr>
-          <p:cNvPicPr preferRelativeResize="0"/>
-          <p:nvPr/>
-        </p:nvPicPr>
-        <p:blipFill rotWithShape="1">
-          <a:blip r:embed="rId13">
-            <a:alphaModFix/>
-          </a:blip>
-          <a:srcRect/>
-          <a:stretch/>
-        </p:blipFill>
-        <p:spPr>
-          <a:xfrm>
-            <a:off x="4079575" y="5292238"/>
-            <a:ext cx="518284" cy="525525"/>
-          </a:xfrm>
-          <a:prstGeom prst="rect">
-            <a:avLst/>
-          </a:prstGeom>
-          <a:noFill/>
-          <a:ln>
-            <a:noFill/>
-          </a:ln>
-        </p:spPr>
-      </p:pic>
       <p:sp>
         <p:nvSpPr>
           <p:cNvPr id="2" name="Rounded Rectangle 1">
@@ -15355,8 +14877,8 @@
         </p:nvSpPr>
         <p:spPr>
           <a:xfrm>
-            <a:off x="1210167" y="6239038"/>
-            <a:ext cx="8214180" cy="2003320"/>
+            <a:off x="-1717036" y="6247827"/>
+            <a:ext cx="11210803" cy="2003320"/>
           </a:xfrm>
           <a:prstGeom prst="roundRect">
             <a:avLst/>
@@ -15407,7 +14929,7 @@
           <p:nvPr/>
         </p:nvPicPr>
         <p:blipFill rotWithShape="1">
-          <a:blip r:embed="rId15">
+          <a:blip r:embed="rId14">
             <a:alphaModFix/>
           </a:blip>
           <a:srcRect/>
@@ -15415,7 +14937,7 @@
         </p:blipFill>
         <p:spPr>
           <a:xfrm>
-            <a:off x="872510" y="5866192"/>
+            <a:off x="8759322" y="7845496"/>
             <a:ext cx="825528" cy="837918"/>
           </a:xfrm>
           <a:prstGeom prst="rect">
@@ -15427,6 +14949,269 @@
           </a:ln>
         </p:spPr>
       </p:pic>
+      <p:sp>
+        <p:nvSpPr>
+          <p:cNvPr id="26" name="Google Shape;1833;p5">
+            <a:extLst>
+              <a:ext uri="{FF2B5EF4-FFF2-40B4-BE49-F238E27FC236}">
+                <a16:creationId xmlns:a16="http://schemas.microsoft.com/office/drawing/2014/main" id="{ED86A091-81D8-9673-791A-813BD122C60D}"/>
+              </a:ext>
+            </a:extLst>
+          </p:cNvPr>
+          <p:cNvSpPr txBox="1"/>
+          <p:nvPr/>
+        </p:nvSpPr>
+        <p:spPr>
+          <a:xfrm>
+            <a:off x="1785688" y="6868133"/>
+            <a:ext cx="1094711" cy="307736"/>
+          </a:xfrm>
+          <a:prstGeom prst="rect">
+            <a:avLst/>
+          </a:prstGeom>
+          <a:noFill/>
+          <a:ln>
+            <a:noFill/>
+          </a:ln>
+        </p:spPr>
+        <p:txBody>
+          <a:bodyPr spcFirstLastPara="1" wrap="square" lIns="91425" tIns="45700" rIns="91425" bIns="45700" anchor="t" anchorCtr="0">
+            <a:spAutoFit/>
+          </a:bodyPr>
+          <a:lstStyle/>
+          <a:p>
+            <a:pPr algn="ctr">
+              <a:buSzPts val="1400"/>
+            </a:pPr>
+            <a:r>
+              <a:rPr lang="en-CA" sz="1400" b="1" i="0" u="none" strike="noStrike" cap="none" dirty="0">
+                <a:solidFill>
+                  <a:schemeClr val="lt1"/>
+                </a:solidFill>
+                <a:latin typeface="Space Grotesk"/>
+                <a:ea typeface="Space Grotesk"/>
+                <a:cs typeface="Space Grotesk"/>
+                <a:sym typeface="Space Grotesk"/>
+              </a:rPr>
+              <a:t>Receipt</a:t>
+            </a:r>
+          </a:p>
+        </p:txBody>
+      </p:sp>
+      <p:cxnSp>
+        <p:nvCxnSpPr>
+          <p:cNvPr id="27" name="Google Shape;442;p42">
+            <a:extLst>
+              <a:ext uri="{FF2B5EF4-FFF2-40B4-BE49-F238E27FC236}">
+                <a16:creationId xmlns:a16="http://schemas.microsoft.com/office/drawing/2014/main" id="{F6FABCE4-EACC-C327-D4C8-FAE41215FD2E}"/>
+              </a:ext>
+            </a:extLst>
+          </p:cNvPr>
+          <p:cNvCxnSpPr>
+            <a:cxnSpLocks/>
+          </p:cNvCxnSpPr>
+          <p:nvPr/>
+        </p:nvCxnSpPr>
+        <p:spPr>
+          <a:xfrm flipH="1">
+            <a:off x="84011" y="7049137"/>
+            <a:ext cx="1456337" cy="0"/>
+          </a:xfrm>
+          <a:prstGeom prst="straightConnector1">
+            <a:avLst/>
+          </a:prstGeom>
+          <a:noFill/>
+          <a:ln w="25400" cap="flat" cmpd="sng">
+            <a:solidFill>
+              <a:schemeClr val="dk1"/>
+            </a:solidFill>
+            <a:prstDash val="solid"/>
+            <a:miter lim="800000"/>
+            <a:headEnd type="none" w="sm" len="sm"/>
+            <a:tailEnd type="triangle" w="lg" len="lg"/>
+          </a:ln>
+        </p:spPr>
+      </p:cxnSp>
+      <p:cxnSp>
+        <p:nvCxnSpPr>
+          <p:cNvPr id="32" name="Elbow Connector 31">
+            <a:extLst>
+              <a:ext uri="{FF2B5EF4-FFF2-40B4-BE49-F238E27FC236}">
+                <a16:creationId xmlns:a16="http://schemas.microsoft.com/office/drawing/2014/main" id="{8507B967-69D4-F047-F562-D7C6021B9C1F}"/>
+              </a:ext>
+            </a:extLst>
+          </p:cNvPr>
+          <p:cNvCxnSpPr>
+            <a:cxnSpLocks/>
+          </p:cNvCxnSpPr>
+          <p:nvPr/>
+        </p:nvCxnSpPr>
+        <p:spPr>
+          <a:xfrm rot="5400000">
+            <a:off x="4274508" y="2540898"/>
+            <a:ext cx="1346226" cy="2185"/>
+          </a:xfrm>
+          <a:prstGeom prst="bentConnector3">
+            <a:avLst>
+              <a:gd name="adj1" fmla="val 50000"/>
+            </a:avLst>
+          </a:prstGeom>
+          <a:noFill/>
+          <a:ln w="25400" cap="flat" cmpd="sng">
+            <a:solidFill>
+              <a:schemeClr val="dk1"/>
+            </a:solidFill>
+            <a:prstDash val="solid"/>
+            <a:miter lim="800000"/>
+            <a:headEnd type="none" w="sm" len="sm"/>
+            <a:tailEnd type="triangle" w="lg" len="lg"/>
+          </a:ln>
+        </p:spPr>
+      </p:cxnSp>
+      <p:cxnSp>
+        <p:nvCxnSpPr>
+          <p:cNvPr id="40" name="Google Shape;442;p42">
+            <a:extLst>
+              <a:ext uri="{FF2B5EF4-FFF2-40B4-BE49-F238E27FC236}">
+                <a16:creationId xmlns:a16="http://schemas.microsoft.com/office/drawing/2014/main" id="{22126371-96AE-9FC9-FE7C-1CA2447E9672}"/>
+              </a:ext>
+            </a:extLst>
+          </p:cNvPr>
+          <p:cNvCxnSpPr>
+            <a:cxnSpLocks/>
+          </p:cNvCxnSpPr>
+          <p:nvPr/>
+        </p:nvCxnSpPr>
+        <p:spPr>
+          <a:xfrm>
+            <a:off x="6005850" y="3659907"/>
+            <a:ext cx="1538735" cy="0"/>
+          </a:xfrm>
+          <a:prstGeom prst="straightConnector1">
+            <a:avLst/>
+          </a:prstGeom>
+          <a:noFill/>
+          <a:ln w="25400" cap="flat" cmpd="sng">
+            <a:solidFill>
+              <a:schemeClr val="dk1"/>
+            </a:solidFill>
+            <a:prstDash val="solid"/>
+            <a:miter lim="800000"/>
+            <a:headEnd type="none" w="sm" len="sm"/>
+            <a:tailEnd type="triangle" w="lg" len="lg"/>
+          </a:ln>
+        </p:spPr>
+      </p:cxnSp>
+      <p:pic>
+        <p:nvPicPr>
+          <p:cNvPr id="47" name="Google Shape;1780;p3">
+            <a:extLst>
+              <a:ext uri="{FF2B5EF4-FFF2-40B4-BE49-F238E27FC236}">
+                <a16:creationId xmlns:a16="http://schemas.microsoft.com/office/drawing/2014/main" id="{1389E160-62D3-178C-3684-A0C066D1159C}"/>
+              </a:ext>
+            </a:extLst>
+          </p:cNvPr>
+          <p:cNvPicPr preferRelativeResize="0"/>
+          <p:nvPr/>
+        </p:nvPicPr>
+        <p:blipFill rotWithShape="1">
+          <a:blip r:embed="rId15">
+            <a:alphaModFix/>
+          </a:blip>
+          <a:srcRect/>
+          <a:stretch/>
+        </p:blipFill>
+        <p:spPr>
+          <a:xfrm>
+            <a:off x="549379" y="6285819"/>
+            <a:ext cx="525600" cy="525600"/>
+          </a:xfrm>
+          <a:prstGeom prst="rect">
+            <a:avLst/>
+          </a:prstGeom>
+          <a:noFill/>
+          <a:ln>
+            <a:noFill/>
+          </a:ln>
+        </p:spPr>
+      </p:pic>
+      <p:sp>
+        <p:nvSpPr>
+          <p:cNvPr id="49" name="TextBox 48">
+            <a:extLst>
+              <a:ext uri="{FF2B5EF4-FFF2-40B4-BE49-F238E27FC236}">
+                <a16:creationId xmlns:a16="http://schemas.microsoft.com/office/drawing/2014/main" id="{E15E6C7D-ADD2-93CD-8DE1-15EE8BA7B071}"/>
+              </a:ext>
+            </a:extLst>
+          </p:cNvPr>
+          <p:cNvSpPr txBox="1"/>
+          <p:nvPr/>
+        </p:nvSpPr>
+        <p:spPr>
+          <a:xfrm>
+            <a:off x="-490593" y="6747909"/>
+            <a:ext cx="2820215" cy="276999"/>
+          </a:xfrm>
+          <a:prstGeom prst="rect">
+            <a:avLst/>
+          </a:prstGeom>
+          <a:noFill/>
+        </p:spPr>
+        <p:txBody>
+          <a:bodyPr wrap="square">
+            <a:spAutoFit/>
+          </a:bodyPr>
+          <a:lstStyle/>
+          <a:p>
+            <a:pPr algn="ctr"/>
+            <a:r>
+              <a:rPr lang="en-US" sz="1200" b="1" dirty="0">
+                <a:solidFill>
+                  <a:schemeClr val="accent2"/>
+                </a:solidFill>
+                <a:latin typeface="Space Grotesk" pitchFamily="2" charset="0"/>
+                <a:cs typeface="Space Grotesk" pitchFamily="2" charset="0"/>
+              </a:rPr>
+              <a:t>POST</a:t>
+            </a:r>
+            <a:r>
+              <a:rPr lang="en-US" sz="1200" b="1" dirty="0">
+                <a:latin typeface="Space Grotesk" pitchFamily="2" charset="0"/>
+                <a:cs typeface="Space Grotesk" pitchFamily="2" charset="0"/>
+              </a:rPr>
+              <a:t> </a:t>
+            </a:r>
+            <a:r>
+              <a:rPr lang="en-US" sz="1200" dirty="0">
+                <a:latin typeface="Space Grotesk" pitchFamily="2" charset="0"/>
+                <a:cs typeface="Space Grotesk" pitchFamily="2" charset="0"/>
+              </a:rPr>
+              <a:t>/v1.0/</a:t>
+            </a:r>
+            <a:r>
+              <a:rPr lang="en-US" sz="1200" b="1" dirty="0">
+                <a:solidFill>
+                  <a:schemeClr val="accent6"/>
+                </a:solidFill>
+                <a:latin typeface="Space Grotesk" pitchFamily="2" charset="0"/>
+                <a:cs typeface="Space Grotesk" pitchFamily="2" charset="0"/>
+              </a:rPr>
+              <a:t>actors</a:t>
+            </a:r>
+            <a:r>
+              <a:rPr lang="en-US" sz="1200" dirty="0">
+                <a:latin typeface="Space Grotesk" pitchFamily="2" charset="0"/>
+                <a:cs typeface="Space Grotesk" pitchFamily="2" charset="0"/>
+              </a:rPr>
+              <a:t>/</a:t>
+            </a:r>
+            <a:endParaRPr lang="en-NL" sz="1200" dirty="0">
+              <a:latin typeface="Space Grotesk" pitchFamily="2" charset="0"/>
+              <a:cs typeface="Space Grotesk" pitchFamily="2" charset="0"/>
+            </a:endParaRPr>
+          </a:p>
+        </p:txBody>
+      </p:sp>
     </p:spTree>
     <p:extLst>
       <p:ext uri="{BB962C8B-B14F-4D97-AF65-F5344CB8AC3E}">

--- a/assets/demo-slide.pptx
+++ b/assets/demo-slide.pptx
@@ -258,7 +258,7 @@
       <p15:sldGuideLst xmlns:p15="http://schemas.microsoft.com/office/powerpoint/2012/main"/>
     </p:ext>
     <p:ext uri="GoogleSlidesCustomDataVersion2">
-      <go:slidesCustomData xmlns:go="http://customooxmlschemas.google.com/" xmlns:ahyp="http://schemas.microsoft.com/office/drawing/2018/hyperlinkcolor" xmlns:p15="http://schemas.microsoft.com/office/powerpoint/2012/main" xmlns:p14="http://schemas.microsoft.com/office/powerpoint/2010/main" xmlns:com="http://schemas.openxmlformats.org/drawingml/2006/compatibility" xmlns:pvml="urn:schemas-microsoft-com:office:powerpoint" xmlns:v="urn:schemas-microsoft-com:vml" xmlns:o="urn:schemas-microsoft-com:office:office" xmlns:dgm="http://schemas.openxmlformats.org/drawingml/2006/diagram" xmlns:c="http://schemas.openxmlformats.org/drawingml/2006/chart" xmlns:mv="urn:schemas-microsoft-com:mac:vml" xmlns:mc="http://schemas.openxmlformats.org/markup-compatibility/2006" xmlns="" r:id="rId158" roundtripDataSignature="AMtx7mhuAUSRUHXfBEQMryvGwGYUe/XPsg=="/>
+      <go:slidesCustomData xmlns="" xmlns:mc="http://schemas.openxmlformats.org/markup-compatibility/2006" xmlns:mv="urn:schemas-microsoft-com:mac:vml" xmlns:c="http://schemas.openxmlformats.org/drawingml/2006/chart" xmlns:dgm="http://schemas.openxmlformats.org/drawingml/2006/diagram" xmlns:o="urn:schemas-microsoft-com:office:office" xmlns:v="urn:schemas-microsoft-com:vml" xmlns:pvml="urn:schemas-microsoft-com:office:powerpoint" xmlns:com="http://schemas.openxmlformats.org/drawingml/2006/compatibility" xmlns:p14="http://schemas.microsoft.com/office/powerpoint/2010/main" xmlns:p15="http://schemas.microsoft.com/office/powerpoint/2012/main" xmlns:ahyp="http://schemas.microsoft.com/office/drawing/2018/hyperlinkcolor" xmlns:go="http://customooxmlschemas.google.com/" r:id="rId158" roundtripDataSignature="AMtx7mhuAUSRUHXfBEQMryvGwGYUe/XPsg=="/>
     </p:ext>
   </p:extLst>
 </p:presentation>
@@ -12699,122 +12699,89 @@
           </p:txBody>
         </p:sp>
       </p:grpSp>
-      <p:grpSp>
-        <p:nvGrpSpPr>
-          <p:cNvPr id="8" name="Google Shape;1814;p4">
+      <p:pic>
+        <p:nvPicPr>
+          <p:cNvPr id="4" name="Google Shape;1815;p4">
             <a:extLst>
               <a:ext uri="{FF2B5EF4-FFF2-40B4-BE49-F238E27FC236}">
-                <a16:creationId xmlns:a16="http://schemas.microsoft.com/office/drawing/2014/main" id="{0EE91193-F515-CF7C-883B-A8F4BD307F04}"/>
+                <a16:creationId xmlns:a16="http://schemas.microsoft.com/office/drawing/2014/main" id="{7DF0742C-3BF8-6E5F-DAEC-1A97FB3DEC49}"/>
               </a:ext>
             </a:extLst>
           </p:cNvPr>
-          <p:cNvGrpSpPr>
-            <a:grpSpLocks noChangeAspect="1"/>
-          </p:cNvGrpSpPr>
+          <p:cNvPicPr preferRelativeResize="0"/>
           <p:nvPr/>
-        </p:nvGrpSpPr>
-        <p:grpSpPr>
+        </p:nvPicPr>
+        <p:blipFill rotWithShape="1">
+          <a:blip r:embed="rId4">
+            <a:alphaModFix/>
+          </a:blip>
+          <a:srcRect/>
+          <a:stretch/>
+        </p:blipFill>
+        <p:spPr>
           <a:xfrm>
-            <a:off x="-1365769" y="6350850"/>
+            <a:off x="1793156" y="3671619"/>
             <a:ext cx="1766667" cy="1800000"/>
-            <a:chOff x="3071990" y="1647687"/>
-            <a:chExt cx="1855000" cy="1890000"/>
           </a:xfrm>
-        </p:grpSpPr>
-        <p:pic>
-          <p:nvPicPr>
-            <p:cNvPr id="9" name="Google Shape;1815;p4">
-              <a:extLst>
-                <a:ext uri="{FF2B5EF4-FFF2-40B4-BE49-F238E27FC236}">
-                  <a16:creationId xmlns:a16="http://schemas.microsoft.com/office/drawing/2014/main" id="{E479ECE4-A529-DE1A-D17F-8168EE7F5096}"/>
-                </a:ext>
-              </a:extLst>
-            </p:cNvPr>
-            <p:cNvPicPr preferRelativeResize="0"/>
-            <p:nvPr/>
-          </p:nvPicPr>
-          <p:blipFill rotWithShape="1">
-            <a:blip r:embed="rId4">
-              <a:alphaModFix/>
-            </a:blip>
-            <a:srcRect/>
-            <a:stretch/>
-          </p:blipFill>
-          <p:spPr>
-            <a:xfrm>
-              <a:off x="3071990" y="1647687"/>
-              <a:ext cx="1855000" cy="1890000"/>
-            </a:xfrm>
-            <a:prstGeom prst="rect">
-              <a:avLst/>
-            </a:prstGeom>
+          <a:prstGeom prst="rect">
+            <a:avLst/>
+          </a:prstGeom>
+          <a:noFill/>
+          <a:ln>
             <a:noFill/>
-            <a:ln>
-              <a:noFill/>
-            </a:ln>
-          </p:spPr>
-        </p:pic>
-        <p:sp>
-          <p:nvSpPr>
-            <p:cNvPr id="10" name="Google Shape;1816;p4">
-              <a:extLst>
-                <a:ext uri="{FF2B5EF4-FFF2-40B4-BE49-F238E27FC236}">
-                  <a16:creationId xmlns:a16="http://schemas.microsoft.com/office/drawing/2014/main" id="{5C1D1D94-EC1B-9F7D-527D-6B6ED996AEE5}"/>
-                </a:ext>
-              </a:extLst>
-            </p:cNvPr>
-            <p:cNvSpPr txBox="1"/>
-            <p:nvPr/>
-          </p:nvSpPr>
-          <p:spPr>
-            <a:xfrm>
-              <a:off x="3218830" y="2101719"/>
-              <a:ext cx="1149446" cy="549339"/>
-            </a:xfrm>
-            <a:prstGeom prst="rect">
-              <a:avLst/>
-            </a:prstGeom>
+          </a:ln>
+        </p:spPr>
+      </p:pic>
+      <p:sp>
+        <p:nvSpPr>
+          <p:cNvPr id="17" name="Google Shape;1816;p4">
+            <a:extLst>
+              <a:ext uri="{FF2B5EF4-FFF2-40B4-BE49-F238E27FC236}">
+                <a16:creationId xmlns:a16="http://schemas.microsoft.com/office/drawing/2014/main" id="{D9369A45-5F83-5EFC-9890-5B1C0B00ADA2}"/>
+              </a:ext>
+            </a:extLst>
+          </p:cNvPr>
+          <p:cNvSpPr txBox="1"/>
+          <p:nvPr/>
+        </p:nvSpPr>
+        <p:spPr>
+          <a:xfrm>
+            <a:off x="1933004" y="4104031"/>
+            <a:ext cx="1094711" cy="523180"/>
+          </a:xfrm>
+          <a:prstGeom prst="rect">
+            <a:avLst/>
+          </a:prstGeom>
+          <a:noFill/>
+          <a:ln>
             <a:noFill/>
-            <a:ln>
-              <a:noFill/>
-            </a:ln>
-          </p:spPr>
-          <p:txBody>
-            <a:bodyPr spcFirstLastPara="1" wrap="square" lIns="91425" tIns="45700" rIns="91425" bIns="45700" anchor="t" anchorCtr="0">
-              <a:spAutoFit/>
-            </a:bodyPr>
-            <a:lstStyle/>
-            <a:p>
-              <a:pPr marL="0" marR="0" lvl="0" indent="0" algn="ctr" rtl="0">
-                <a:lnSpc>
-                  <a:spcPct val="100000"/>
-                </a:lnSpc>
-                <a:spcBef>
-                  <a:spcPts val="0"/>
-                </a:spcBef>
-                <a:spcAft>
-                  <a:spcPts val="0"/>
-                </a:spcAft>
-                <a:buClr>
-                  <a:srgbClr val="000000"/>
-                </a:buClr>
-                <a:buSzPts val="1400"/>
-                <a:buFont typeface="Arial"/>
-                <a:buNone/>
-              </a:pPr>
-              <a:r>
-                <a:rPr lang="en-US" sz="1400" b="1" i="0" u="none" strike="noStrike" cap="none" dirty="0">
-                  <a:solidFill>
-                    <a:schemeClr val="dk1"/>
-                  </a:solidFill>
-                  <a:latin typeface="Space Grotesk"/>
-                  <a:ea typeface="Space Grotesk"/>
-                  <a:cs typeface="Space Grotesk"/>
-                  <a:sym typeface="Space Grotesk"/>
-                </a:rPr>
-                <a:t>Worker Actor</a:t>
-              </a:r>
-              <a:endParaRPr sz="1400" b="1" i="0" u="none" strike="noStrike" cap="none" dirty="0">
+          </a:ln>
+        </p:spPr>
+        <p:txBody>
+          <a:bodyPr spcFirstLastPara="1" wrap="square" lIns="91425" tIns="45700" rIns="91425" bIns="45700" anchor="t" anchorCtr="0">
+            <a:spAutoFit/>
+          </a:bodyPr>
+          <a:lstStyle/>
+          <a:p>
+            <a:pPr marL="0" marR="0" lvl="0" indent="0" algn="ctr" rtl="0">
+              <a:lnSpc>
+                <a:spcPct val="100000"/>
+              </a:lnSpc>
+              <a:spcBef>
+                <a:spcPts val="0"/>
+              </a:spcBef>
+              <a:spcAft>
+                <a:spcPts val="0"/>
+              </a:spcAft>
+              <a:buClr>
+                <a:srgbClr val="000000"/>
+              </a:buClr>
+              <a:buSzPts val="1400"/>
+              <a:buFont typeface="Arial"/>
+              <a:buNone/>
+            </a:pPr>
+            <a:r>
+              <a:rPr lang="en-US" sz="1400" b="1" i="0" u="none" strike="noStrike" cap="none" dirty="0">
                 <a:solidFill>
                   <a:schemeClr val="dk1"/>
                 </a:solidFill>
@@ -12822,11 +12789,21 @@
                 <a:ea typeface="Space Grotesk"/>
                 <a:cs typeface="Space Grotesk"/>
                 <a:sym typeface="Space Grotesk"/>
-              </a:endParaRPr>
-            </a:p>
-          </p:txBody>
-        </p:sp>
-      </p:grpSp>
+              </a:rPr>
+              <a:t>Worker Actor</a:t>
+            </a:r>
+            <a:endParaRPr sz="1400" b="1" i="0" u="none" strike="noStrike" cap="none" dirty="0">
+              <a:solidFill>
+                <a:schemeClr val="dk1"/>
+              </a:solidFill>
+              <a:latin typeface="Space Grotesk"/>
+              <a:ea typeface="Space Grotesk"/>
+              <a:cs typeface="Space Grotesk"/>
+              <a:sym typeface="Space Grotesk"/>
+            </a:endParaRPr>
+          </a:p>
+        </p:txBody>
+      </p:sp>
       <p:grpSp>
         <p:nvGrpSpPr>
           <p:cNvPr id="11" name="Google Shape;1831;p5">
@@ -13054,7 +13031,7 @@
                   <a:cs typeface="Space Grotesk"/>
                   <a:sym typeface="Space Grotesk"/>
                 </a:rPr>
-                <a:t>Make-Line</a:t>
+                <a:t>Loyalty</a:t>
               </a:r>
             </a:p>
           </p:txBody>
@@ -13755,40 +13732,6 @@
       </p:pic>
       <p:cxnSp>
         <p:nvCxnSpPr>
-          <p:cNvPr id="60" name="Google Shape;442;p42">
-            <a:extLst>
-              <a:ext uri="{FF2B5EF4-FFF2-40B4-BE49-F238E27FC236}">
-                <a16:creationId xmlns:a16="http://schemas.microsoft.com/office/drawing/2014/main" id="{6073AC84-DE65-A96A-DA6B-2EFECB9712B7}"/>
-              </a:ext>
-            </a:extLst>
-          </p:cNvPr>
-          <p:cNvCxnSpPr>
-            <a:cxnSpLocks/>
-          </p:cNvCxnSpPr>
-          <p:nvPr/>
-        </p:nvCxnSpPr>
-        <p:spPr>
-          <a:xfrm flipH="1">
-            <a:off x="3205849" y="7049137"/>
-            <a:ext cx="1456337" cy="0"/>
-          </a:xfrm>
-          <a:prstGeom prst="straightConnector1">
-            <a:avLst/>
-          </a:prstGeom>
-          <a:noFill/>
-          <a:ln w="25400" cap="flat" cmpd="sng">
-            <a:solidFill>
-              <a:schemeClr val="dk1"/>
-            </a:solidFill>
-            <a:prstDash val="solid"/>
-            <a:miter lim="800000"/>
-            <a:headEnd type="none" w="sm" len="sm"/>
-            <a:tailEnd type="triangle" w="lg" len="lg"/>
-          </a:ln>
-        </p:spPr>
-      </p:cxnSp>
-      <p:cxnSp>
-        <p:nvCxnSpPr>
           <p:cNvPr id="62" name="Google Shape;442;p42">
             <a:extLst>
               <a:ext uri="{FF2B5EF4-FFF2-40B4-BE49-F238E27FC236}">
@@ -13821,39 +13764,6 @@
           </a:ln>
         </p:spPr>
       </p:cxnSp>
-      <p:pic>
-        <p:nvPicPr>
-          <p:cNvPr id="18" name="Google Shape;1832;p5">
-            <a:extLst>
-              <a:ext uri="{FF2B5EF4-FFF2-40B4-BE49-F238E27FC236}">
-                <a16:creationId xmlns:a16="http://schemas.microsoft.com/office/drawing/2014/main" id="{8523E0E6-6F96-5FE0-1707-786AE5A70966}"/>
-              </a:ext>
-            </a:extLst>
-          </p:cNvPr>
-          <p:cNvPicPr preferRelativeResize="0"/>
-          <p:nvPr/>
-        </p:nvPicPr>
-        <p:blipFill rotWithShape="1">
-          <a:blip r:embed="rId5">
-            <a:alphaModFix/>
-          </a:blip>
-          <a:srcRect/>
-          <a:stretch/>
-        </p:blipFill>
-        <p:spPr>
-          <a:xfrm>
-            <a:off x="1378176" y="6336955"/>
-            <a:ext cx="1766667" cy="1800000"/>
-          </a:xfrm>
-          <a:prstGeom prst="rect">
-            <a:avLst/>
-          </a:prstGeom>
-          <a:noFill/>
-          <a:ln>
-            <a:noFill/>
-          </a:ln>
-        </p:spPr>
-      </p:pic>
       <p:sp>
         <p:nvSpPr>
           <p:cNvPr id="19" name="Google Shape;1833;p5">
@@ -13912,7 +13822,7 @@
                 <a:cs typeface="Space Grotesk"/>
                 <a:sym typeface="Space Grotesk"/>
               </a:rPr>
-              <a:t>Loyalty</a:t>
+              <a:t>Receipt</a:t>
             </a:r>
             <a:endParaRPr lang="en-US" sz="1400" b="1" i="0" u="none" strike="noStrike" cap="none" dirty="0">
               <a:solidFill>
@@ -13980,7 +13890,9 @@
           <a:prstGeom prst="rect">
             <a:avLst/>
           </a:prstGeom>
-          <a:noFill/>
+          <a:solidFill>
+            <a:schemeClr val="lt1"/>
+          </a:solidFill>
         </p:spPr>
         <p:txBody>
           <a:bodyPr wrap="none" rtlCol="0">
@@ -14270,40 +14182,6 @@
           </a:ln>
         </p:spPr>
       </p:pic>
-      <p:cxnSp>
-        <p:nvCxnSpPr>
-          <p:cNvPr id="97" name="Google Shape;442;p42">
-            <a:extLst>
-              <a:ext uri="{FF2B5EF4-FFF2-40B4-BE49-F238E27FC236}">
-                <a16:creationId xmlns:a16="http://schemas.microsoft.com/office/drawing/2014/main" id="{CB9A69EF-9A80-1CBD-F8C5-9D528002AB29}"/>
-              </a:ext>
-            </a:extLst>
-          </p:cNvPr>
-          <p:cNvCxnSpPr>
-            <a:cxnSpLocks/>
-          </p:cNvCxnSpPr>
-          <p:nvPr/>
-        </p:nvCxnSpPr>
-        <p:spPr>
-          <a:xfrm rot="10800000" flipV="1">
-            <a:off x="2459612" y="7830990"/>
-            <a:ext cx="0" cy="726619"/>
-          </a:xfrm>
-          <a:prstGeom prst="straightConnector1">
-            <a:avLst/>
-          </a:prstGeom>
-          <a:noFill/>
-          <a:ln w="25400" cap="flat" cmpd="sng">
-            <a:solidFill>
-              <a:schemeClr val="dk1"/>
-            </a:solidFill>
-            <a:prstDash val="solid"/>
-            <a:miter lim="800000"/>
-            <a:headEnd type="none" w="sm" len="sm"/>
-            <a:tailEnd type="triangle" w="lg" len="lg"/>
-          </a:ln>
-        </p:spPr>
-      </p:cxnSp>
       <p:pic>
         <p:nvPicPr>
           <p:cNvPr id="113" name="Google Shape;1777;p3">
@@ -14536,136 +14414,82 @@
           </a:ln>
         </p:spPr>
       </p:cxnSp>
-      <p:grpSp>
-        <p:nvGrpSpPr>
-          <p:cNvPr id="131" name="Group 130">
+      <p:sp>
+        <p:nvSpPr>
+          <p:cNvPr id="133" name="TextBox 132">
             <a:extLst>
               <a:ext uri="{FF2B5EF4-FFF2-40B4-BE49-F238E27FC236}">
-                <a16:creationId xmlns:a16="http://schemas.microsoft.com/office/drawing/2014/main" id="{B68EC2DC-5A18-207D-9527-2800F83DA829}"/>
+                <a16:creationId xmlns:a16="http://schemas.microsoft.com/office/drawing/2014/main" id="{AC16656F-F399-4AE1-EA82-803AE22843E3}"/>
               </a:ext>
             </a:extLst>
           </p:cNvPr>
-          <p:cNvGrpSpPr/>
+          <p:cNvSpPr txBox="1"/>
           <p:nvPr/>
-        </p:nvGrpSpPr>
-        <p:grpSpPr>
+        </p:nvSpPr>
+        <p:spPr>
           <a:xfrm>
-            <a:off x="2574373" y="7749703"/>
-            <a:ext cx="1463862" cy="864366"/>
-            <a:chOff x="5647227" y="7809722"/>
-            <a:chExt cx="1463862" cy="864366"/>
+            <a:off x="2574373" y="8337070"/>
+            <a:ext cx="1463862" cy="276999"/>
           </a:xfrm>
-        </p:grpSpPr>
-        <p:pic>
-          <p:nvPicPr>
-            <p:cNvPr id="132" name="Google Shape;450;p42">
-              <a:extLst>
-                <a:ext uri="{FF2B5EF4-FFF2-40B4-BE49-F238E27FC236}">
-                  <a16:creationId xmlns:a16="http://schemas.microsoft.com/office/drawing/2014/main" id="{2E22A764-E51A-5F62-3854-AA1F118D95E3}"/>
-                </a:ext>
-              </a:extLst>
-            </p:cNvPr>
-            <p:cNvPicPr preferRelativeResize="0"/>
-            <p:nvPr/>
-          </p:nvPicPr>
-          <p:blipFill rotWithShape="1">
-            <a:blip r:embed="rId13">
-              <a:alphaModFix/>
-            </a:blip>
-            <a:srcRect/>
-            <a:stretch/>
-          </p:blipFill>
-          <p:spPr>
-            <a:xfrm>
-              <a:off x="6046768" y="7809722"/>
-              <a:ext cx="540000" cy="540000"/>
-            </a:xfrm>
-            <a:prstGeom prst="rect">
-              <a:avLst/>
-            </a:prstGeom>
-            <a:noFill/>
-            <a:ln>
-              <a:noFill/>
-            </a:ln>
-          </p:spPr>
-        </p:pic>
-        <p:sp>
-          <p:nvSpPr>
-            <p:cNvPr id="133" name="TextBox 132">
-              <a:extLst>
-                <a:ext uri="{FF2B5EF4-FFF2-40B4-BE49-F238E27FC236}">
-                  <a16:creationId xmlns:a16="http://schemas.microsoft.com/office/drawing/2014/main" id="{AC16656F-F399-4AE1-EA82-803AE22843E3}"/>
-                </a:ext>
-              </a:extLst>
-            </p:cNvPr>
-            <p:cNvSpPr txBox="1"/>
-            <p:nvPr/>
-          </p:nvSpPr>
-          <p:spPr>
-            <a:xfrm>
-              <a:off x="5647227" y="8397089"/>
-              <a:ext cx="1463862" cy="276999"/>
-            </a:xfrm>
-            <a:prstGeom prst="rect">
-              <a:avLst/>
-            </a:prstGeom>
-            <a:noFill/>
-          </p:spPr>
-          <p:txBody>
-            <a:bodyPr wrap="none" rtlCol="0">
-              <a:spAutoFit/>
-            </a:bodyPr>
-            <a:lstStyle/>
-            <a:p>
-              <a:r>
-                <a:rPr lang="en-US" sz="1200" b="1" dirty="0">
-                  <a:solidFill>
-                    <a:schemeClr val="accent2"/>
-                  </a:solidFill>
-                  <a:latin typeface="Space Grotesk" pitchFamily="2" charset="0"/>
-                  <a:cs typeface="Space Grotesk" pitchFamily="2" charset="0"/>
-                </a:rPr>
-                <a:t>POST</a:t>
-              </a:r>
-              <a:r>
-                <a:rPr lang="en-US" sz="1200" b="1" dirty="0">
-                  <a:latin typeface="Space Grotesk" pitchFamily="2" charset="0"/>
-                  <a:cs typeface="Space Grotesk" pitchFamily="2" charset="0"/>
-                </a:rPr>
-                <a:t> </a:t>
-              </a:r>
-              <a:r>
-                <a:rPr lang="en-US" sz="1200" dirty="0">
-                  <a:latin typeface="Space Grotesk" pitchFamily="2" charset="0"/>
-                  <a:cs typeface="Space Grotesk" pitchFamily="2" charset="0"/>
-                </a:rPr>
-                <a:t>/v1.0/</a:t>
-              </a:r>
-              <a:r>
-                <a:rPr lang="en-US" sz="1200" b="1" dirty="0">
-                  <a:solidFill>
-                    <a:schemeClr val="accent6"/>
-                  </a:solidFill>
-                  <a:latin typeface="Space Grotesk" pitchFamily="2" charset="0"/>
-                  <a:cs typeface="Space Grotesk" pitchFamily="2" charset="0"/>
-                </a:rPr>
-                <a:t>state</a:t>
-              </a:r>
-              <a:r>
-                <a:rPr lang="en-US" sz="1200" dirty="0">
-                  <a:latin typeface="Space Grotesk" pitchFamily="2" charset="0"/>
-                  <a:cs typeface="Space Grotesk" pitchFamily="2" charset="0"/>
-                </a:rPr>
-                <a:t>/</a:t>
-              </a:r>
-              <a:endParaRPr lang="en-NL" sz="1200" dirty="0">
+          <a:prstGeom prst="rect">
+            <a:avLst/>
+          </a:prstGeom>
+          <a:noFill/>
+        </p:spPr>
+        <p:txBody>
+          <a:bodyPr wrap="none" rtlCol="0">
+            <a:spAutoFit/>
+          </a:bodyPr>
+          <a:lstStyle/>
+          <a:p>
+            <a:r>
+              <a:rPr lang="en-US" sz="1200" b="1" dirty="0">
+                <a:solidFill>
+                  <a:schemeClr val="accent2"/>
+                </a:solidFill>
                 <a:latin typeface="Space Grotesk" pitchFamily="2" charset="0"/>
                 <a:cs typeface="Space Grotesk" pitchFamily="2" charset="0"/>
-              </a:endParaRPr>
-            </a:p>
-          </p:txBody>
-        </p:sp>
-      </p:grpSp>
+              </a:rPr>
+              <a:t>POST</a:t>
+            </a:r>
+            <a:r>
+              <a:rPr lang="en-US" sz="1200" b="1" dirty="0">
+                <a:latin typeface="Space Grotesk" pitchFamily="2" charset="0"/>
+                <a:cs typeface="Space Grotesk" pitchFamily="2" charset="0"/>
+              </a:rPr>
+              <a:t> </a:t>
+            </a:r>
+            <a:r>
+              <a:rPr lang="en-US" sz="1200" dirty="0">
+                <a:latin typeface="Space Grotesk" pitchFamily="2" charset="0"/>
+                <a:cs typeface="Space Grotesk" pitchFamily="2" charset="0"/>
+              </a:rPr>
+              <a:t>/v1.0/</a:t>
+            </a:r>
+            <a:r>
+              <a:rPr lang="en-US" sz="1200" b="1" dirty="0">
+                <a:solidFill>
+                  <a:schemeClr val="accent6"/>
+                </a:solidFill>
+                <a:latin typeface="Space Grotesk" pitchFamily="2" charset="0"/>
+                <a:cs typeface="Space Grotesk" pitchFamily="2" charset="0"/>
+              </a:rPr>
+              <a:t>state</a:t>
+            </a:r>
+            <a:r>
+              <a:rPr lang="en-US" sz="1200" dirty="0">
+                <a:latin typeface="Space Grotesk" pitchFamily="2" charset="0"/>
+                <a:cs typeface="Space Grotesk" pitchFamily="2" charset="0"/>
+              </a:rPr>
+              <a:t>/</a:t>
+            </a:r>
+            <a:endParaRPr lang="en-NL" sz="1200" dirty="0">
+              <a:latin typeface="Space Grotesk" pitchFamily="2" charset="0"/>
+              <a:cs typeface="Space Grotesk" pitchFamily="2" charset="0"/>
+            </a:endParaRPr>
+          </a:p>
+        </p:txBody>
+      </p:sp>
       <p:pic>
         <p:nvPicPr>
           <p:cNvPr id="134" name="Google Shape;777;p58">
@@ -14863,175 +14687,6 @@
           </p:txBody>
         </p:sp>
       </p:grpSp>
-      <p:sp>
-        <p:nvSpPr>
-          <p:cNvPr id="2" name="Rounded Rectangle 1">
-            <a:extLst>
-              <a:ext uri="{FF2B5EF4-FFF2-40B4-BE49-F238E27FC236}">
-                <a16:creationId xmlns:a16="http://schemas.microsoft.com/office/drawing/2014/main" id="{53167B3B-EE2B-907D-B728-3945EFD98A3D}"/>
-              </a:ext>
-            </a:extLst>
-          </p:cNvPr>
-          <p:cNvSpPr/>
-          <p:nvPr/>
-        </p:nvSpPr>
-        <p:spPr>
-          <a:xfrm>
-            <a:off x="-1717036" y="6247827"/>
-            <a:ext cx="11210803" cy="2003320"/>
-          </a:xfrm>
-          <a:prstGeom prst="roundRect">
-            <a:avLst/>
-          </a:prstGeom>
-          <a:noFill/>
-          <a:ln w="44450">
-            <a:solidFill>
-              <a:schemeClr val="accent2"/>
-            </a:solidFill>
-            <a:prstDash val="sysDot"/>
-          </a:ln>
-        </p:spPr>
-        <p:style>
-          <a:lnRef idx="2">
-            <a:schemeClr val="accent1">
-              <a:shade val="15000"/>
-            </a:schemeClr>
-          </a:lnRef>
-          <a:fillRef idx="1">
-            <a:schemeClr val="accent1"/>
-          </a:fillRef>
-          <a:effectRef idx="0">
-            <a:schemeClr val="accent1"/>
-          </a:effectRef>
-          <a:fontRef idx="minor">
-            <a:schemeClr val="lt1"/>
-          </a:fontRef>
-        </p:style>
-        <p:txBody>
-          <a:bodyPr rtlCol="0" anchor="ctr"/>
-          <a:lstStyle/>
-          <a:p>
-            <a:pPr algn="ctr"/>
-            <a:endParaRPr lang="en-US"/>
-          </a:p>
-        </p:txBody>
-      </p:sp>
-      <p:pic>
-        <p:nvPicPr>
-          <p:cNvPr id="3" name="Google Shape;881;p64">
-            <a:extLst>
-              <a:ext uri="{FF2B5EF4-FFF2-40B4-BE49-F238E27FC236}">
-                <a16:creationId xmlns:a16="http://schemas.microsoft.com/office/drawing/2014/main" id="{28AB1D81-1F20-662A-38B8-6B596ECB3724}"/>
-              </a:ext>
-            </a:extLst>
-          </p:cNvPr>
-          <p:cNvPicPr preferRelativeResize="0"/>
-          <p:nvPr/>
-        </p:nvPicPr>
-        <p:blipFill rotWithShape="1">
-          <a:blip r:embed="rId14">
-            <a:alphaModFix/>
-          </a:blip>
-          <a:srcRect/>
-          <a:stretch/>
-        </p:blipFill>
-        <p:spPr>
-          <a:xfrm>
-            <a:off x="8759322" y="7845496"/>
-            <a:ext cx="825528" cy="837918"/>
-          </a:xfrm>
-          <a:prstGeom prst="rect">
-            <a:avLst/>
-          </a:prstGeom>
-          <a:noFill/>
-          <a:ln>
-            <a:noFill/>
-          </a:ln>
-        </p:spPr>
-      </p:pic>
-      <p:sp>
-        <p:nvSpPr>
-          <p:cNvPr id="26" name="Google Shape;1833;p5">
-            <a:extLst>
-              <a:ext uri="{FF2B5EF4-FFF2-40B4-BE49-F238E27FC236}">
-                <a16:creationId xmlns:a16="http://schemas.microsoft.com/office/drawing/2014/main" id="{ED86A091-81D8-9673-791A-813BD122C60D}"/>
-              </a:ext>
-            </a:extLst>
-          </p:cNvPr>
-          <p:cNvSpPr txBox="1"/>
-          <p:nvPr/>
-        </p:nvSpPr>
-        <p:spPr>
-          <a:xfrm>
-            <a:off x="1785688" y="6868133"/>
-            <a:ext cx="1094711" cy="307736"/>
-          </a:xfrm>
-          <a:prstGeom prst="rect">
-            <a:avLst/>
-          </a:prstGeom>
-          <a:noFill/>
-          <a:ln>
-            <a:noFill/>
-          </a:ln>
-        </p:spPr>
-        <p:txBody>
-          <a:bodyPr spcFirstLastPara="1" wrap="square" lIns="91425" tIns="45700" rIns="91425" bIns="45700" anchor="t" anchorCtr="0">
-            <a:spAutoFit/>
-          </a:bodyPr>
-          <a:lstStyle/>
-          <a:p>
-            <a:pPr algn="ctr">
-              <a:buSzPts val="1400"/>
-            </a:pPr>
-            <a:r>
-              <a:rPr lang="en-CA" sz="1400" b="1" i="0" u="none" strike="noStrike" cap="none" dirty="0">
-                <a:solidFill>
-                  <a:schemeClr val="lt1"/>
-                </a:solidFill>
-                <a:latin typeface="Space Grotesk"/>
-                <a:ea typeface="Space Grotesk"/>
-                <a:cs typeface="Space Grotesk"/>
-                <a:sym typeface="Space Grotesk"/>
-              </a:rPr>
-              <a:t>Receipt</a:t>
-            </a:r>
-          </a:p>
-        </p:txBody>
-      </p:sp>
-      <p:cxnSp>
-        <p:nvCxnSpPr>
-          <p:cNvPr id="27" name="Google Shape;442;p42">
-            <a:extLst>
-              <a:ext uri="{FF2B5EF4-FFF2-40B4-BE49-F238E27FC236}">
-                <a16:creationId xmlns:a16="http://schemas.microsoft.com/office/drawing/2014/main" id="{F6FABCE4-EACC-C327-D4C8-FAE41215FD2E}"/>
-              </a:ext>
-            </a:extLst>
-          </p:cNvPr>
-          <p:cNvCxnSpPr>
-            <a:cxnSpLocks/>
-          </p:cNvCxnSpPr>
-          <p:nvPr/>
-        </p:nvCxnSpPr>
-        <p:spPr>
-          <a:xfrm flipH="1">
-            <a:off x="84011" y="7049137"/>
-            <a:ext cx="1456337" cy="0"/>
-          </a:xfrm>
-          <a:prstGeom prst="straightConnector1">
-            <a:avLst/>
-          </a:prstGeom>
-          <a:noFill/>
-          <a:ln w="25400" cap="flat" cmpd="sng">
-            <a:solidFill>
-              <a:schemeClr val="dk1"/>
-            </a:solidFill>
-            <a:prstDash val="solid"/>
-            <a:miter lim="800000"/>
-            <a:headEnd type="none" w="sm" len="sm"/>
-            <a:tailEnd type="triangle" w="lg" len="lg"/>
-          </a:ln>
-        </p:spPr>
-      </p:cxnSp>
       <p:cxnSp>
         <p:nvCxnSpPr>
           <p:cNvPr id="32" name="Elbow Connector 31">
@@ -15115,7 +14770,7 @@
           <p:nvPr/>
         </p:nvPicPr>
         <p:blipFill rotWithShape="1">
-          <a:blip r:embed="rId15">
+          <a:blip r:embed="rId14">
             <a:alphaModFix/>
           </a:blip>
           <a:srcRect/>
@@ -15123,7 +14778,7 @@
         </p:blipFill>
         <p:spPr>
           <a:xfrm>
-            <a:off x="549379" y="6285819"/>
+            <a:off x="1304158" y="5153592"/>
             <a:ext cx="525600" cy="525600"/>
           </a:xfrm>
           <a:prstGeom prst="rect">
@@ -15135,6 +14790,197 @@
           </a:ln>
         </p:spPr>
       </p:pic>
+      <p:sp>
+        <p:nvSpPr>
+          <p:cNvPr id="25" name="Rounded Rectangle 24">
+            <a:extLst>
+              <a:ext uri="{FF2B5EF4-FFF2-40B4-BE49-F238E27FC236}">
+                <a16:creationId xmlns:a16="http://schemas.microsoft.com/office/drawing/2014/main" id="{8546F04E-735B-90A6-0DEA-E870A3790DEC}"/>
+              </a:ext>
+            </a:extLst>
+          </p:cNvPr>
+          <p:cNvSpPr/>
+          <p:nvPr/>
+        </p:nvSpPr>
+        <p:spPr>
+          <a:xfrm>
+            <a:off x="1217756" y="3550206"/>
+            <a:ext cx="2621800" cy="4726434"/>
+          </a:xfrm>
+          <a:prstGeom prst="roundRect">
+            <a:avLst/>
+          </a:prstGeom>
+          <a:noFill/>
+          <a:ln w="44450">
+            <a:solidFill>
+              <a:schemeClr val="accent2"/>
+            </a:solidFill>
+            <a:prstDash val="sysDot"/>
+          </a:ln>
+        </p:spPr>
+        <p:style>
+          <a:lnRef idx="2">
+            <a:schemeClr val="accent1">
+              <a:shade val="15000"/>
+            </a:schemeClr>
+          </a:lnRef>
+          <a:fillRef idx="1">
+            <a:schemeClr val="accent1"/>
+          </a:fillRef>
+          <a:effectRef idx="0">
+            <a:schemeClr val="accent1"/>
+          </a:effectRef>
+          <a:fontRef idx="minor">
+            <a:schemeClr val="lt1"/>
+          </a:fontRef>
+        </p:style>
+        <p:txBody>
+          <a:bodyPr rtlCol="0" anchor="ctr"/>
+          <a:lstStyle/>
+          <a:p>
+            <a:pPr algn="ctr"/>
+            <a:endParaRPr lang="en-US"/>
+          </a:p>
+        </p:txBody>
+      </p:sp>
+      <p:sp>
+        <p:nvSpPr>
+          <p:cNvPr id="31" name="Rectangle 30">
+            <a:extLst>
+              <a:ext uri="{FF2B5EF4-FFF2-40B4-BE49-F238E27FC236}">
+                <a16:creationId xmlns:a16="http://schemas.microsoft.com/office/drawing/2014/main" id="{CB93FF33-3D86-5918-4507-9B0924896FF6}"/>
+              </a:ext>
+            </a:extLst>
+          </p:cNvPr>
+          <p:cNvSpPr/>
+          <p:nvPr/>
+        </p:nvSpPr>
+        <p:spPr>
+          <a:xfrm flipH="1">
+            <a:off x="3591023" y="6300079"/>
+            <a:ext cx="367965" cy="1850767"/>
+          </a:xfrm>
+          <a:prstGeom prst="rect">
+            <a:avLst/>
+          </a:prstGeom>
+          <a:solidFill>
+            <a:schemeClr val="bg1"/>
+          </a:solidFill>
+          <a:ln>
+            <a:noFill/>
+          </a:ln>
+        </p:spPr>
+        <p:style>
+          <a:lnRef idx="2">
+            <a:schemeClr val="accent1">
+              <a:shade val="15000"/>
+            </a:schemeClr>
+          </a:lnRef>
+          <a:fillRef idx="1">
+            <a:schemeClr val="accent1"/>
+          </a:fillRef>
+          <a:effectRef idx="0">
+            <a:schemeClr val="accent1"/>
+          </a:effectRef>
+          <a:fontRef idx="minor">
+            <a:schemeClr val="lt1"/>
+          </a:fontRef>
+        </p:style>
+        <p:txBody>
+          <a:bodyPr rtlCol="0" anchor="ctr"/>
+          <a:lstStyle/>
+          <a:p>
+            <a:pPr algn="ctr"/>
+            <a:endParaRPr lang="en-US" dirty="0"/>
+          </a:p>
+        </p:txBody>
+      </p:sp>
+      <p:sp>
+        <p:nvSpPr>
+          <p:cNvPr id="33" name="Rectangle 32">
+            <a:extLst>
+              <a:ext uri="{FF2B5EF4-FFF2-40B4-BE49-F238E27FC236}">
+                <a16:creationId xmlns:a16="http://schemas.microsoft.com/office/drawing/2014/main" id="{FA8D1825-8768-7115-86F8-7A68E6451DF5}"/>
+              </a:ext>
+            </a:extLst>
+          </p:cNvPr>
+          <p:cNvSpPr/>
+          <p:nvPr/>
+        </p:nvSpPr>
+        <p:spPr>
+          <a:xfrm flipH="1">
+            <a:off x="3589238" y="6514016"/>
+            <a:ext cx="367965" cy="1850767"/>
+          </a:xfrm>
+          <a:prstGeom prst="rect">
+            <a:avLst/>
+          </a:prstGeom>
+          <a:solidFill>
+            <a:schemeClr val="bg1"/>
+          </a:solidFill>
+          <a:ln>
+            <a:noFill/>
+          </a:ln>
+        </p:spPr>
+        <p:style>
+          <a:lnRef idx="2">
+            <a:schemeClr val="accent1">
+              <a:shade val="15000"/>
+            </a:schemeClr>
+          </a:lnRef>
+          <a:fillRef idx="1">
+            <a:schemeClr val="accent1"/>
+          </a:fillRef>
+          <a:effectRef idx="0">
+            <a:schemeClr val="accent1"/>
+          </a:effectRef>
+          <a:fontRef idx="minor">
+            <a:schemeClr val="lt1"/>
+          </a:fontRef>
+        </p:style>
+        <p:txBody>
+          <a:bodyPr rtlCol="0" anchor="ctr"/>
+          <a:lstStyle/>
+          <a:p>
+            <a:pPr algn="ctr"/>
+            <a:endParaRPr lang="en-US" dirty="0"/>
+          </a:p>
+        </p:txBody>
+      </p:sp>
+      <p:cxnSp>
+        <p:nvCxnSpPr>
+          <p:cNvPr id="60" name="Google Shape;442;p42">
+            <a:extLst>
+              <a:ext uri="{FF2B5EF4-FFF2-40B4-BE49-F238E27FC236}">
+                <a16:creationId xmlns:a16="http://schemas.microsoft.com/office/drawing/2014/main" id="{6073AC84-DE65-A96A-DA6B-2EFECB9712B7}"/>
+              </a:ext>
+            </a:extLst>
+          </p:cNvPr>
+          <p:cNvCxnSpPr>
+            <a:cxnSpLocks/>
+          </p:cNvCxnSpPr>
+          <p:nvPr/>
+        </p:nvCxnSpPr>
+        <p:spPr>
+          <a:xfrm flipH="1">
+            <a:off x="3205849" y="7049137"/>
+            <a:ext cx="1456337" cy="0"/>
+          </a:xfrm>
+          <a:prstGeom prst="straightConnector1">
+            <a:avLst/>
+          </a:prstGeom>
+          <a:noFill/>
+          <a:ln w="25400" cap="flat" cmpd="sng">
+            <a:solidFill>
+              <a:schemeClr val="dk1"/>
+            </a:solidFill>
+            <a:prstDash val="solid"/>
+            <a:miter lim="800000"/>
+            <a:headEnd type="none" w="sm" len="sm"/>
+            <a:tailEnd type="triangle" w="lg" len="lg"/>
+          </a:ln>
+        </p:spPr>
+      </p:cxnSp>
       <p:sp>
         <p:nvSpPr>
           <p:cNvPr id="49" name="TextBox 48">
@@ -15149,13 +14995,18 @@
         </p:nvSpPr>
         <p:spPr>
           <a:xfrm>
-            <a:off x="-490593" y="6747909"/>
+            <a:off x="218268" y="5616823"/>
             <a:ext cx="2820215" cy="276999"/>
           </a:xfrm>
           <a:prstGeom prst="rect">
             <a:avLst/>
           </a:prstGeom>
-          <a:noFill/>
+          <a:solidFill>
+            <a:schemeClr val="bg1"/>
+          </a:solidFill>
+          <a:ln>
+            <a:noFill/>
+          </a:ln>
         </p:spPr>
         <p:txBody>
           <a:bodyPr wrap="square">
@@ -15212,6 +15063,431 @@
           </a:p>
         </p:txBody>
       </p:sp>
+      <p:cxnSp>
+        <p:nvCxnSpPr>
+          <p:cNvPr id="27" name="Google Shape;442;p42">
+            <a:extLst>
+              <a:ext uri="{FF2B5EF4-FFF2-40B4-BE49-F238E27FC236}">
+                <a16:creationId xmlns:a16="http://schemas.microsoft.com/office/drawing/2014/main" id="{F6FABCE4-EACC-C327-D4C8-FAE41215FD2E}"/>
+              </a:ext>
+            </a:extLst>
+          </p:cNvPr>
+          <p:cNvCxnSpPr>
+            <a:cxnSpLocks/>
+          </p:cNvCxnSpPr>
+          <p:nvPr/>
+        </p:nvCxnSpPr>
+        <p:spPr>
+          <a:xfrm flipV="1">
+            <a:off x="2459612" y="5110480"/>
+            <a:ext cx="0" cy="1064792"/>
+          </a:xfrm>
+          <a:prstGeom prst="straightConnector1">
+            <a:avLst/>
+          </a:prstGeom>
+          <a:noFill/>
+          <a:ln w="25400" cap="flat" cmpd="sng">
+            <a:solidFill>
+              <a:schemeClr val="dk1"/>
+            </a:solidFill>
+            <a:prstDash val="solid"/>
+            <a:miter lim="800000"/>
+            <a:headEnd type="none" w="sm" len="sm"/>
+            <a:tailEnd type="triangle" w="lg" len="lg"/>
+          </a:ln>
+        </p:spPr>
+      </p:cxnSp>
+      <p:sp>
+        <p:nvSpPr>
+          <p:cNvPr id="35" name="Rectangle 34">
+            <a:extLst>
+              <a:ext uri="{FF2B5EF4-FFF2-40B4-BE49-F238E27FC236}">
+                <a16:creationId xmlns:a16="http://schemas.microsoft.com/office/drawing/2014/main" id="{C04E3C6C-6D6E-52AD-10FB-F36745C14657}"/>
+              </a:ext>
+            </a:extLst>
+          </p:cNvPr>
+          <p:cNvSpPr/>
+          <p:nvPr/>
+        </p:nvSpPr>
+        <p:spPr>
+          <a:xfrm flipH="1">
+            <a:off x="1202516" y="8069611"/>
+            <a:ext cx="2592353" cy="340280"/>
+          </a:xfrm>
+          <a:prstGeom prst="rect">
+            <a:avLst/>
+          </a:prstGeom>
+          <a:solidFill>
+            <a:schemeClr val="bg1"/>
+          </a:solidFill>
+          <a:ln>
+            <a:noFill/>
+          </a:ln>
+        </p:spPr>
+        <p:style>
+          <a:lnRef idx="2">
+            <a:schemeClr val="accent1">
+              <a:shade val="15000"/>
+            </a:schemeClr>
+          </a:lnRef>
+          <a:fillRef idx="1">
+            <a:schemeClr val="accent1"/>
+          </a:fillRef>
+          <a:effectRef idx="0">
+            <a:schemeClr val="accent1"/>
+          </a:effectRef>
+          <a:fontRef idx="minor">
+            <a:schemeClr val="lt1"/>
+          </a:fontRef>
+        </p:style>
+        <p:txBody>
+          <a:bodyPr rtlCol="0" anchor="ctr"/>
+          <a:lstStyle/>
+          <a:p>
+            <a:pPr algn="ctr"/>
+            <a:endParaRPr lang="en-US" dirty="0"/>
+          </a:p>
+        </p:txBody>
+      </p:sp>
+      <p:sp>
+        <p:nvSpPr>
+          <p:cNvPr id="34" name="Rectangle 33">
+            <a:extLst>
+              <a:ext uri="{FF2B5EF4-FFF2-40B4-BE49-F238E27FC236}">
+                <a16:creationId xmlns:a16="http://schemas.microsoft.com/office/drawing/2014/main" id="{01B59D13-8B28-7339-0E06-6159259658DD}"/>
+              </a:ext>
+            </a:extLst>
+          </p:cNvPr>
+          <p:cNvSpPr/>
+          <p:nvPr/>
+        </p:nvSpPr>
+        <p:spPr>
+          <a:xfrm flipH="1">
+            <a:off x="1050118" y="6393661"/>
+            <a:ext cx="367965" cy="1850767"/>
+          </a:xfrm>
+          <a:prstGeom prst="rect">
+            <a:avLst/>
+          </a:prstGeom>
+          <a:solidFill>
+            <a:schemeClr val="bg1"/>
+          </a:solidFill>
+          <a:ln>
+            <a:noFill/>
+          </a:ln>
+        </p:spPr>
+        <p:style>
+          <a:lnRef idx="2">
+            <a:schemeClr val="accent1">
+              <a:shade val="15000"/>
+            </a:schemeClr>
+          </a:lnRef>
+          <a:fillRef idx="1">
+            <a:schemeClr val="accent1"/>
+          </a:fillRef>
+          <a:effectRef idx="0">
+            <a:schemeClr val="accent1"/>
+          </a:effectRef>
+          <a:fontRef idx="minor">
+            <a:schemeClr val="lt1"/>
+          </a:fontRef>
+        </p:style>
+        <p:txBody>
+          <a:bodyPr rtlCol="0" anchor="ctr"/>
+          <a:lstStyle/>
+          <a:p>
+            <a:pPr algn="ctr"/>
+            <a:endParaRPr lang="en-US" dirty="0"/>
+          </a:p>
+        </p:txBody>
+      </p:sp>
+      <p:sp>
+        <p:nvSpPr>
+          <p:cNvPr id="2" name="Rounded Rectangle 1">
+            <a:extLst>
+              <a:ext uri="{FF2B5EF4-FFF2-40B4-BE49-F238E27FC236}">
+                <a16:creationId xmlns:a16="http://schemas.microsoft.com/office/drawing/2014/main" id="{53167B3B-EE2B-907D-B728-3945EFD98A3D}"/>
+              </a:ext>
+            </a:extLst>
+          </p:cNvPr>
+          <p:cNvSpPr/>
+          <p:nvPr/>
+        </p:nvSpPr>
+        <p:spPr>
+          <a:xfrm>
+            <a:off x="1214853" y="6247827"/>
+            <a:ext cx="8278914" cy="2003320"/>
+          </a:xfrm>
+          <a:prstGeom prst="roundRect">
+            <a:avLst/>
+          </a:prstGeom>
+          <a:noFill/>
+          <a:ln w="44450">
+            <a:solidFill>
+              <a:schemeClr val="accent2"/>
+            </a:solidFill>
+            <a:prstDash val="sysDot"/>
+          </a:ln>
+        </p:spPr>
+        <p:style>
+          <a:lnRef idx="2">
+            <a:schemeClr val="accent1">
+              <a:shade val="15000"/>
+            </a:schemeClr>
+          </a:lnRef>
+          <a:fillRef idx="1">
+            <a:schemeClr val="accent1"/>
+          </a:fillRef>
+          <a:effectRef idx="0">
+            <a:schemeClr val="accent1"/>
+          </a:effectRef>
+          <a:fontRef idx="minor">
+            <a:schemeClr val="lt1"/>
+          </a:fontRef>
+        </p:style>
+        <p:txBody>
+          <a:bodyPr rtlCol="0" anchor="ctr"/>
+          <a:lstStyle/>
+          <a:p>
+            <a:pPr algn="ctr"/>
+            <a:endParaRPr lang="en-US"/>
+          </a:p>
+        </p:txBody>
+      </p:sp>
+      <p:sp>
+        <p:nvSpPr>
+          <p:cNvPr id="30" name="Rectangle 29">
+            <a:extLst>
+              <a:ext uri="{FF2B5EF4-FFF2-40B4-BE49-F238E27FC236}">
+                <a16:creationId xmlns:a16="http://schemas.microsoft.com/office/drawing/2014/main" id="{EF6B8DCC-C05A-DF93-61EE-C47BBDC40BD1}"/>
+              </a:ext>
+            </a:extLst>
+          </p:cNvPr>
+          <p:cNvSpPr/>
+          <p:nvPr/>
+        </p:nvSpPr>
+        <p:spPr>
+          <a:xfrm>
+            <a:off x="1243342" y="6199151"/>
+            <a:ext cx="2592357" cy="264253"/>
+          </a:xfrm>
+          <a:prstGeom prst="rect">
+            <a:avLst/>
+          </a:prstGeom>
+          <a:solidFill>
+            <a:schemeClr val="bg1"/>
+          </a:solidFill>
+          <a:ln>
+            <a:noFill/>
+          </a:ln>
+        </p:spPr>
+        <p:style>
+          <a:lnRef idx="2">
+            <a:schemeClr val="accent1">
+              <a:shade val="15000"/>
+            </a:schemeClr>
+          </a:lnRef>
+          <a:fillRef idx="1">
+            <a:schemeClr val="accent1"/>
+          </a:fillRef>
+          <a:effectRef idx="0">
+            <a:schemeClr val="accent1"/>
+          </a:effectRef>
+          <a:fontRef idx="minor">
+            <a:schemeClr val="lt1"/>
+          </a:fontRef>
+        </p:style>
+        <p:txBody>
+          <a:bodyPr rtlCol="0" anchor="ctr"/>
+          <a:lstStyle/>
+          <a:p>
+            <a:pPr algn="ctr"/>
+            <a:endParaRPr lang="en-US" dirty="0"/>
+          </a:p>
+        </p:txBody>
+      </p:sp>
+      <p:pic>
+        <p:nvPicPr>
+          <p:cNvPr id="18" name="Google Shape;1832;p5">
+            <a:extLst>
+              <a:ext uri="{FF2B5EF4-FFF2-40B4-BE49-F238E27FC236}">
+                <a16:creationId xmlns:a16="http://schemas.microsoft.com/office/drawing/2014/main" id="{8523E0E6-6F96-5FE0-1707-786AE5A70966}"/>
+              </a:ext>
+            </a:extLst>
+          </p:cNvPr>
+          <p:cNvPicPr preferRelativeResize="0"/>
+          <p:nvPr/>
+        </p:nvPicPr>
+        <p:blipFill rotWithShape="1">
+          <a:blip r:embed="rId5">
+            <a:alphaModFix/>
+          </a:blip>
+          <a:srcRect/>
+          <a:stretch/>
+        </p:blipFill>
+        <p:spPr>
+          <a:xfrm>
+            <a:off x="1378176" y="6336955"/>
+            <a:ext cx="1766667" cy="1800000"/>
+          </a:xfrm>
+          <a:prstGeom prst="rect">
+            <a:avLst/>
+          </a:prstGeom>
+          <a:noFill/>
+          <a:ln>
+            <a:noFill/>
+          </a:ln>
+        </p:spPr>
+      </p:pic>
+      <p:sp>
+        <p:nvSpPr>
+          <p:cNvPr id="26" name="Google Shape;1833;p5">
+            <a:extLst>
+              <a:ext uri="{FF2B5EF4-FFF2-40B4-BE49-F238E27FC236}">
+                <a16:creationId xmlns:a16="http://schemas.microsoft.com/office/drawing/2014/main" id="{ED86A091-81D8-9673-791A-813BD122C60D}"/>
+              </a:ext>
+            </a:extLst>
+          </p:cNvPr>
+          <p:cNvSpPr txBox="1"/>
+          <p:nvPr/>
+        </p:nvSpPr>
+        <p:spPr>
+          <a:xfrm>
+            <a:off x="1896590" y="6877652"/>
+            <a:ext cx="1094711" cy="307736"/>
+          </a:xfrm>
+          <a:prstGeom prst="rect">
+            <a:avLst/>
+          </a:prstGeom>
+          <a:noFill/>
+          <a:ln>
+            <a:noFill/>
+          </a:ln>
+        </p:spPr>
+        <p:txBody>
+          <a:bodyPr spcFirstLastPara="1" wrap="square" lIns="91425" tIns="45700" rIns="91425" bIns="45700" anchor="t" anchorCtr="0">
+            <a:spAutoFit/>
+          </a:bodyPr>
+          <a:lstStyle/>
+          <a:p>
+            <a:pPr algn="ctr">
+              <a:buSzPts val="1400"/>
+            </a:pPr>
+            <a:r>
+              <a:rPr lang="en-US" sz="1400" b="1" i="0" u="none" strike="noStrike" cap="none" dirty="0">
+                <a:solidFill>
+                  <a:schemeClr val="lt1"/>
+                </a:solidFill>
+                <a:latin typeface="Space Grotesk"/>
+                <a:ea typeface="Space Grotesk"/>
+                <a:cs typeface="Space Grotesk"/>
+                <a:sym typeface="Space Grotesk"/>
+              </a:rPr>
+              <a:t>Make-Line</a:t>
+            </a:r>
+          </a:p>
+        </p:txBody>
+      </p:sp>
+      <p:pic>
+        <p:nvPicPr>
+          <p:cNvPr id="132" name="Google Shape;450;p42">
+            <a:extLst>
+              <a:ext uri="{FF2B5EF4-FFF2-40B4-BE49-F238E27FC236}">
+                <a16:creationId xmlns:a16="http://schemas.microsoft.com/office/drawing/2014/main" id="{2E22A764-E51A-5F62-3854-AA1F118D95E3}"/>
+              </a:ext>
+            </a:extLst>
+          </p:cNvPr>
+          <p:cNvPicPr preferRelativeResize="0"/>
+          <p:nvPr/>
+        </p:nvPicPr>
+        <p:blipFill rotWithShape="1">
+          <a:blip r:embed="rId13">
+            <a:alphaModFix/>
+          </a:blip>
+          <a:srcRect/>
+          <a:stretch/>
+        </p:blipFill>
+        <p:spPr>
+          <a:xfrm>
+            <a:off x="2973914" y="7749703"/>
+            <a:ext cx="540000" cy="540000"/>
+          </a:xfrm>
+          <a:prstGeom prst="rect">
+            <a:avLst/>
+          </a:prstGeom>
+          <a:noFill/>
+          <a:ln>
+            <a:noFill/>
+          </a:ln>
+        </p:spPr>
+      </p:pic>
+      <p:cxnSp>
+        <p:nvCxnSpPr>
+          <p:cNvPr id="97" name="Google Shape;442;p42">
+            <a:extLst>
+              <a:ext uri="{FF2B5EF4-FFF2-40B4-BE49-F238E27FC236}">
+                <a16:creationId xmlns:a16="http://schemas.microsoft.com/office/drawing/2014/main" id="{CB9A69EF-9A80-1CBD-F8C5-9D528002AB29}"/>
+              </a:ext>
+            </a:extLst>
+          </p:cNvPr>
+          <p:cNvCxnSpPr>
+            <a:cxnSpLocks/>
+          </p:cNvCxnSpPr>
+          <p:nvPr/>
+        </p:nvCxnSpPr>
+        <p:spPr>
+          <a:xfrm rot="10800000" flipV="1">
+            <a:off x="2459612" y="7830990"/>
+            <a:ext cx="0" cy="726619"/>
+          </a:xfrm>
+          <a:prstGeom prst="straightConnector1">
+            <a:avLst/>
+          </a:prstGeom>
+          <a:noFill/>
+          <a:ln w="25400" cap="flat" cmpd="sng">
+            <a:solidFill>
+              <a:schemeClr val="dk1"/>
+            </a:solidFill>
+            <a:prstDash val="solid"/>
+            <a:miter lim="800000"/>
+            <a:headEnd type="none" w="sm" len="sm"/>
+            <a:tailEnd type="triangle" w="lg" len="lg"/>
+          </a:ln>
+        </p:spPr>
+      </p:cxnSp>
+      <p:pic>
+        <p:nvPicPr>
+          <p:cNvPr id="3" name="Google Shape;881;p64">
+            <a:extLst>
+              <a:ext uri="{FF2B5EF4-FFF2-40B4-BE49-F238E27FC236}">
+                <a16:creationId xmlns:a16="http://schemas.microsoft.com/office/drawing/2014/main" id="{28AB1D81-1F20-662A-38B8-6B596ECB3724}"/>
+              </a:ext>
+            </a:extLst>
+          </p:cNvPr>
+          <p:cNvPicPr preferRelativeResize="0"/>
+          <p:nvPr/>
+        </p:nvPicPr>
+        <p:blipFill rotWithShape="1">
+          <a:blip r:embed="rId15">
+            <a:alphaModFix/>
+          </a:blip>
+          <a:srcRect/>
+          <a:stretch/>
+        </p:blipFill>
+        <p:spPr>
+          <a:xfrm>
+            <a:off x="8759322" y="7845496"/>
+            <a:ext cx="825528" cy="837918"/>
+          </a:xfrm>
+          <a:prstGeom prst="rect">
+            <a:avLst/>
+          </a:prstGeom>
+          <a:noFill/>
+          <a:ln>
+            <a:noFill/>
+          </a:ln>
+        </p:spPr>
+      </p:pic>
     </p:spTree>
     <p:extLst>
       <p:ext uri="{BB962C8B-B14F-4D97-AF65-F5344CB8AC3E}">
